--- a/校园RPG：大学生存物语项目答辩.pptx
+++ b/校园RPG：大学生存物语项目答辩.pptx
@@ -5,63 +5,56 @@
     <p:sldMasterId id="2147483648" r:id="rId1"/>
   </p:sldMasterIdLst>
   <p:notesMasterIdLst>
-    <p:notesMasterId r:id="rId4"/>
+    <p:notesMasterId r:id="rId16"/>
   </p:notesMasterIdLst>
   <p:sldIdLst>
-    <p:sldId id="256" r:id="rId3"/>
-    <p:sldId id="257" r:id="rId5"/>
-    <p:sldId id="258" r:id="rId6"/>
-    <p:sldId id="259" r:id="rId7"/>
-    <p:sldId id="260" r:id="rId8"/>
-    <p:sldId id="261" r:id="rId9"/>
-    <p:sldId id="262" r:id="rId10"/>
-    <p:sldId id="263" r:id="rId11"/>
-    <p:sldId id="264" r:id="rId12"/>
-    <p:sldId id="265" r:id="rId13"/>
-    <p:sldId id="266" r:id="rId14"/>
-    <p:sldId id="267" r:id="rId15"/>
-    <p:sldId id="268" r:id="rId16"/>
-    <p:sldId id="269" r:id="rId17"/>
+    <p:sldId id="256" r:id="rId2"/>
+    <p:sldId id="257" r:id="rId3"/>
+    <p:sldId id="258" r:id="rId4"/>
+    <p:sldId id="259" r:id="rId5"/>
+    <p:sldId id="260" r:id="rId6"/>
+    <p:sldId id="261" r:id="rId7"/>
+    <p:sldId id="262" r:id="rId8"/>
+    <p:sldId id="263" r:id="rId9"/>
+    <p:sldId id="264" r:id="rId10"/>
+    <p:sldId id="265" r:id="rId11"/>
+    <p:sldId id="266" r:id="rId12"/>
+    <p:sldId id="267" r:id="rId13"/>
+    <p:sldId id="268" r:id="rId14"/>
+    <p:sldId id="269" r:id="rId15"/>
   </p:sldIdLst>
   <p:sldSz cx="12192000" cy="6858000"/>
   <p:notesSz cx="6858000" cy="9144000"/>
   <p:embeddedFontLst>
     <p:embeddedFont>
-      <p:font typeface="Calibri" panose="020F0502020204030204"/>
-      <p:regular r:id="rId21"/>
-      <p:bold r:id="rId22"/>
-      <p:italic r:id="rId23"/>
-      <p:boldItalic r:id="rId24"/>
+      <p:font typeface="黑体" panose="02010609060101010101" pitchFamily="49" charset="-122"/>
+      <p:regular r:id="rId17"/>
     </p:embeddedFont>
     <p:embeddedFont>
       <p:font typeface="Comfortaa"/>
-      <p:regular r:id="rId25"/>
-      <p:bold r:id="rId26"/>
+      <p:regular r:id="rId18"/>
+      <p:bold r:id="rId19"/>
     </p:embeddedFont>
     <p:embeddedFont>
       <p:font typeface="Inter" panose="02000503000000020004"/>
-      <p:regular r:id="rId27"/>
-      <p:bold r:id="rId28"/>
-      <p:italic r:id="rId29"/>
-      <p:boldItalic r:id="rId30"/>
+      <p:regular r:id="rId20"/>
+      <p:bold r:id="rId21"/>
+      <p:italic r:id="rId22"/>
+      <p:boldItalic r:id="rId23"/>
     </p:embeddedFont>
     <p:embeddedFont>
-      <p:font typeface="JetBrains Mono Medium" panose="02000009000000000000"/>
-      <p:regular r:id="rId31"/>
-      <p:bold r:id="rId32"/>
-      <p:italic r:id="rId33"/>
-      <p:boldItalic r:id="rId34"/>
+      <p:font typeface="Inter Medium" panose="02000503000000020004" pitchFamily="2" charset="0"/>
+      <p:regular r:id="rId24"/>
+      <p:bold r:id="rId25"/>
+      <p:italic r:id="rId26"/>
+      <p:boldItalic r:id="rId27"/>
     </p:embeddedFont>
     <p:embeddedFont>
-      <p:font typeface="Inter Medium" panose="02000503000000020004"/>
-      <p:regular r:id="rId35"/>
-      <p:bold r:id="rId36"/>
-      <p:italic r:id="rId37"/>
-      <p:boldItalic r:id="rId38"/>
-    </p:embeddedFont>
-    <p:embeddedFont>
-      <p:font typeface="黑体" panose="02010609060101010101" charset="-122"/>
-      <p:regular r:id="rId39"/>
+      <p:font typeface="JetBrains Mono Medium" panose="02000009000000000000" pitchFamily="49" charset="0"/>
+      <p:regular r:id="rId28"/>
+      <p:bold r:id="rId29"/>
+      <p:italic r:id="rId30"/>
+      <p:boldItalic r:id="rId31"/>
     </p:embeddedFont>
   </p:embeddedFontLst>
   <p:defaultTextStyle>
@@ -513,7 +506,9 @@
               <a:defRPr sz="1100"/>
             </a:lvl9pPr>
           </a:lstStyle>
-          <a:p/>
+          <a:p>
+            <a:endParaRPr/>
+          </a:p>
         </p:txBody>
       </p:sp>
     </p:spTree>
@@ -752,7 +747,7 @@
 </file>
 
 <file path=ppt/notesSlides/notesSlide1.xml><?xml version="1.0" encoding="utf-8"?>
-<p:notes xmlns:a="http://schemas.openxmlformats.org/drawingml/2006/main" xmlns:r="http://schemas.openxmlformats.org/officeDocument/2006/relationships" xmlns:p="http://schemas.openxmlformats.org/presentationml/2006/main" showMasterPhAnim="0" showMasterSp="0">
+<p:notes xmlns:a="http://schemas.openxmlformats.org/drawingml/2006/main" xmlns:r="http://schemas.openxmlformats.org/officeDocument/2006/relationships" xmlns:p="http://schemas.openxmlformats.org/presentationml/2006/main" showMasterSp="0" showMasterPhAnim="0">
   <p:cSld>
     <p:spTree>
       <p:nvGrpSpPr>
@@ -802,6 +797,7 @@
               </a:spcAft>
               <a:buNone/>
             </a:pPr>
+            <a:endParaRPr/>
           </a:p>
         </p:txBody>
       </p:sp>
@@ -855,7 +851,7 @@
 </file>
 
 <file path=ppt/notesSlides/notesSlide10.xml><?xml version="1.0" encoding="utf-8"?>
-<p:notes xmlns:a="http://schemas.openxmlformats.org/drawingml/2006/main" xmlns:r="http://schemas.openxmlformats.org/officeDocument/2006/relationships" xmlns:p="http://schemas.openxmlformats.org/presentationml/2006/main" showMasterPhAnim="0" showMasterSp="0">
+<p:notes xmlns:a="http://schemas.openxmlformats.org/drawingml/2006/main" xmlns:r="http://schemas.openxmlformats.org/officeDocument/2006/relationships" xmlns:p="http://schemas.openxmlformats.org/presentationml/2006/main" showMasterSp="0" showMasterPhAnim="0">
   <p:cSld>
     <p:spTree>
       <p:nvGrpSpPr>
@@ -905,6 +901,7 @@
               </a:spcAft>
               <a:buNone/>
             </a:pPr>
+            <a:endParaRPr/>
           </a:p>
         </p:txBody>
       </p:sp>
@@ -958,7 +955,7 @@
 </file>
 
 <file path=ppt/notesSlides/notesSlide11.xml><?xml version="1.0" encoding="utf-8"?>
-<p:notes xmlns:a="http://schemas.openxmlformats.org/drawingml/2006/main" xmlns:r="http://schemas.openxmlformats.org/officeDocument/2006/relationships" xmlns:p="http://schemas.openxmlformats.org/presentationml/2006/main" showMasterPhAnim="0" showMasterSp="0">
+<p:notes xmlns:a="http://schemas.openxmlformats.org/drawingml/2006/main" xmlns:r="http://schemas.openxmlformats.org/officeDocument/2006/relationships" xmlns:p="http://schemas.openxmlformats.org/presentationml/2006/main" showMasterSp="0" showMasterPhAnim="0">
   <p:cSld>
     <p:spTree>
       <p:nvGrpSpPr>
@@ -1008,6 +1005,7 @@
               </a:spcAft>
               <a:buNone/>
             </a:pPr>
+            <a:endParaRPr/>
           </a:p>
         </p:txBody>
       </p:sp>
@@ -1061,7 +1059,7 @@
 </file>
 
 <file path=ppt/notesSlides/notesSlide12.xml><?xml version="1.0" encoding="utf-8"?>
-<p:notes xmlns:a="http://schemas.openxmlformats.org/drawingml/2006/main" xmlns:r="http://schemas.openxmlformats.org/officeDocument/2006/relationships" xmlns:p="http://schemas.openxmlformats.org/presentationml/2006/main" showMasterPhAnim="0" showMasterSp="0">
+<p:notes xmlns:a="http://schemas.openxmlformats.org/drawingml/2006/main" xmlns:r="http://schemas.openxmlformats.org/officeDocument/2006/relationships" xmlns:p="http://schemas.openxmlformats.org/presentationml/2006/main" showMasterSp="0" showMasterPhAnim="0">
   <p:cSld>
     <p:spTree>
       <p:nvGrpSpPr>
@@ -1111,6 +1109,7 @@
               </a:spcAft>
               <a:buNone/>
             </a:pPr>
+            <a:endParaRPr/>
           </a:p>
         </p:txBody>
       </p:sp>
@@ -1164,7 +1163,7 @@
 </file>
 
 <file path=ppt/notesSlides/notesSlide13.xml><?xml version="1.0" encoding="utf-8"?>
-<p:notes xmlns:a="http://schemas.openxmlformats.org/drawingml/2006/main" xmlns:r="http://schemas.openxmlformats.org/officeDocument/2006/relationships" xmlns:p="http://schemas.openxmlformats.org/presentationml/2006/main" showMasterPhAnim="0" showMasterSp="0">
+<p:notes xmlns:a="http://schemas.openxmlformats.org/drawingml/2006/main" xmlns:r="http://schemas.openxmlformats.org/officeDocument/2006/relationships" xmlns:p="http://schemas.openxmlformats.org/presentationml/2006/main" showMasterSp="0" showMasterPhAnim="0">
   <p:cSld>
     <p:spTree>
       <p:nvGrpSpPr>
@@ -1214,6 +1213,7 @@
               </a:spcAft>
               <a:buNone/>
             </a:pPr>
+            <a:endParaRPr/>
           </a:p>
         </p:txBody>
       </p:sp>
@@ -1267,7 +1267,7 @@
 </file>
 
 <file path=ppt/notesSlides/notesSlide14.xml><?xml version="1.0" encoding="utf-8"?>
-<p:notes xmlns:a="http://schemas.openxmlformats.org/drawingml/2006/main" xmlns:r="http://schemas.openxmlformats.org/officeDocument/2006/relationships" xmlns:p="http://schemas.openxmlformats.org/presentationml/2006/main" showMasterPhAnim="0" showMasterSp="0">
+<p:notes xmlns:a="http://schemas.openxmlformats.org/drawingml/2006/main" xmlns:r="http://schemas.openxmlformats.org/officeDocument/2006/relationships" xmlns:p="http://schemas.openxmlformats.org/presentationml/2006/main" showMasterSp="0" showMasterPhAnim="0">
   <p:cSld>
     <p:spTree>
       <p:nvGrpSpPr>
@@ -1317,6 +1317,7 @@
               </a:spcAft>
               <a:buNone/>
             </a:pPr>
+            <a:endParaRPr/>
           </a:p>
         </p:txBody>
       </p:sp>
@@ -1370,7 +1371,7 @@
 </file>
 
 <file path=ppt/notesSlides/notesSlide2.xml><?xml version="1.0" encoding="utf-8"?>
-<p:notes xmlns:a="http://schemas.openxmlformats.org/drawingml/2006/main" xmlns:r="http://schemas.openxmlformats.org/officeDocument/2006/relationships" xmlns:p="http://schemas.openxmlformats.org/presentationml/2006/main" showMasterPhAnim="0" showMasterSp="0">
+<p:notes xmlns:a="http://schemas.openxmlformats.org/drawingml/2006/main" xmlns:r="http://schemas.openxmlformats.org/officeDocument/2006/relationships" xmlns:p="http://schemas.openxmlformats.org/presentationml/2006/main" showMasterSp="0" showMasterPhAnim="0">
   <p:cSld>
     <p:spTree>
       <p:nvGrpSpPr>
@@ -1420,6 +1421,7 @@
               </a:spcAft>
               <a:buNone/>
             </a:pPr>
+            <a:endParaRPr/>
           </a:p>
         </p:txBody>
       </p:sp>
@@ -1473,7 +1475,7 @@
 </file>
 
 <file path=ppt/notesSlides/notesSlide3.xml><?xml version="1.0" encoding="utf-8"?>
-<p:notes xmlns:a="http://schemas.openxmlformats.org/drawingml/2006/main" xmlns:r="http://schemas.openxmlformats.org/officeDocument/2006/relationships" xmlns:p="http://schemas.openxmlformats.org/presentationml/2006/main" showMasterPhAnim="0" showMasterSp="0">
+<p:notes xmlns:a="http://schemas.openxmlformats.org/drawingml/2006/main" xmlns:r="http://schemas.openxmlformats.org/officeDocument/2006/relationships" xmlns:p="http://schemas.openxmlformats.org/presentationml/2006/main" showMasterSp="0" showMasterPhAnim="0">
   <p:cSld>
     <p:spTree>
       <p:nvGrpSpPr>
@@ -1523,6 +1525,7 @@
               </a:spcAft>
               <a:buNone/>
             </a:pPr>
+            <a:endParaRPr/>
           </a:p>
         </p:txBody>
       </p:sp>
@@ -1576,7 +1579,7 @@
 </file>
 
 <file path=ppt/notesSlides/notesSlide4.xml><?xml version="1.0" encoding="utf-8"?>
-<p:notes xmlns:a="http://schemas.openxmlformats.org/drawingml/2006/main" xmlns:r="http://schemas.openxmlformats.org/officeDocument/2006/relationships" xmlns:p="http://schemas.openxmlformats.org/presentationml/2006/main" showMasterPhAnim="0" showMasterSp="0">
+<p:notes xmlns:a="http://schemas.openxmlformats.org/drawingml/2006/main" xmlns:r="http://schemas.openxmlformats.org/officeDocument/2006/relationships" xmlns:p="http://schemas.openxmlformats.org/presentationml/2006/main" showMasterSp="0" showMasterPhAnim="0">
   <p:cSld>
     <p:spTree>
       <p:nvGrpSpPr>
@@ -1626,6 +1629,7 @@
               </a:spcAft>
               <a:buNone/>
             </a:pPr>
+            <a:endParaRPr/>
           </a:p>
         </p:txBody>
       </p:sp>
@@ -1679,7 +1683,7 @@
 </file>
 
 <file path=ppt/notesSlides/notesSlide5.xml><?xml version="1.0" encoding="utf-8"?>
-<p:notes xmlns:a="http://schemas.openxmlformats.org/drawingml/2006/main" xmlns:r="http://schemas.openxmlformats.org/officeDocument/2006/relationships" xmlns:p="http://schemas.openxmlformats.org/presentationml/2006/main" showMasterPhAnim="0" showMasterSp="0">
+<p:notes xmlns:a="http://schemas.openxmlformats.org/drawingml/2006/main" xmlns:r="http://schemas.openxmlformats.org/officeDocument/2006/relationships" xmlns:p="http://schemas.openxmlformats.org/presentationml/2006/main" showMasterSp="0" showMasterPhAnim="0">
   <p:cSld>
     <p:spTree>
       <p:nvGrpSpPr>
@@ -1729,6 +1733,7 @@
               </a:spcAft>
               <a:buNone/>
             </a:pPr>
+            <a:endParaRPr/>
           </a:p>
         </p:txBody>
       </p:sp>
@@ -1782,7 +1787,7 @@
 </file>
 
 <file path=ppt/notesSlides/notesSlide6.xml><?xml version="1.0" encoding="utf-8"?>
-<p:notes xmlns:a="http://schemas.openxmlformats.org/drawingml/2006/main" xmlns:r="http://schemas.openxmlformats.org/officeDocument/2006/relationships" xmlns:p="http://schemas.openxmlformats.org/presentationml/2006/main" showMasterPhAnim="0" showMasterSp="0">
+<p:notes xmlns:a="http://schemas.openxmlformats.org/drawingml/2006/main" xmlns:r="http://schemas.openxmlformats.org/officeDocument/2006/relationships" xmlns:p="http://schemas.openxmlformats.org/presentationml/2006/main" showMasterSp="0" showMasterPhAnim="0">
   <p:cSld>
     <p:spTree>
       <p:nvGrpSpPr>
@@ -1938,7 +1943,7 @@
 </file>
 
 <file path=ppt/notesSlides/notesSlide7.xml><?xml version="1.0" encoding="utf-8"?>
-<p:notes xmlns:a="http://schemas.openxmlformats.org/drawingml/2006/main" xmlns:r="http://schemas.openxmlformats.org/officeDocument/2006/relationships" xmlns:p="http://schemas.openxmlformats.org/presentationml/2006/main" showMasterPhAnim="0" showMasterSp="0">
+<p:notes xmlns:a="http://schemas.openxmlformats.org/drawingml/2006/main" xmlns:r="http://schemas.openxmlformats.org/officeDocument/2006/relationships" xmlns:p="http://schemas.openxmlformats.org/presentationml/2006/main" showMasterSp="0" showMasterPhAnim="0">
   <p:cSld>
     <p:spTree>
       <p:nvGrpSpPr>
@@ -1988,6 +1993,7 @@
               </a:spcAft>
               <a:buNone/>
             </a:pPr>
+            <a:endParaRPr/>
           </a:p>
         </p:txBody>
       </p:sp>
@@ -2041,7 +2047,7 @@
 </file>
 
 <file path=ppt/notesSlides/notesSlide8.xml><?xml version="1.0" encoding="utf-8"?>
-<p:notes xmlns:a="http://schemas.openxmlformats.org/drawingml/2006/main" xmlns:r="http://schemas.openxmlformats.org/officeDocument/2006/relationships" xmlns:p="http://schemas.openxmlformats.org/presentationml/2006/main" showMasterPhAnim="0" showMasterSp="0">
+<p:notes xmlns:a="http://schemas.openxmlformats.org/drawingml/2006/main" xmlns:r="http://schemas.openxmlformats.org/officeDocument/2006/relationships" xmlns:p="http://schemas.openxmlformats.org/presentationml/2006/main" showMasterSp="0" showMasterPhAnim="0">
   <p:cSld>
     <p:spTree>
       <p:nvGrpSpPr>
@@ -2091,6 +2097,7 @@
               </a:spcAft>
               <a:buNone/>
             </a:pPr>
+            <a:endParaRPr/>
           </a:p>
         </p:txBody>
       </p:sp>
@@ -2144,7 +2151,7 @@
 </file>
 
 <file path=ppt/notesSlides/notesSlide9.xml><?xml version="1.0" encoding="utf-8"?>
-<p:notes xmlns:a="http://schemas.openxmlformats.org/drawingml/2006/main" xmlns:r="http://schemas.openxmlformats.org/officeDocument/2006/relationships" xmlns:p="http://schemas.openxmlformats.org/presentationml/2006/main" showMasterPhAnim="0" showMasterSp="0">
+<p:notes xmlns:a="http://schemas.openxmlformats.org/drawingml/2006/main" xmlns:r="http://schemas.openxmlformats.org/officeDocument/2006/relationships" xmlns:p="http://schemas.openxmlformats.org/presentationml/2006/main" showMasterSp="0" showMasterPhAnim="0">
   <p:cSld>
     <p:spTree>
       <p:nvGrpSpPr>
@@ -2194,6 +2201,7 @@
               </a:spcAft>
               <a:buNone/>
             </a:pPr>
+            <a:endParaRPr/>
           </a:p>
         </p:txBody>
       </p:sp>
@@ -2247,7 +2255,7 @@
 </file>
 
 <file path=ppt/slideLayouts/slideLayout1.xml><?xml version="1.0" encoding="utf-8"?>
-<p:sldLayout xmlns:a="http://schemas.openxmlformats.org/drawingml/2006/main" xmlns:r="http://schemas.openxmlformats.org/officeDocument/2006/relationships" xmlns:p="http://schemas.openxmlformats.org/presentationml/2006/main" type="blank" matchingName="Blank">
+<p:sldLayout xmlns:a="http://schemas.openxmlformats.org/drawingml/2006/main" xmlns:r="http://schemas.openxmlformats.org/officeDocument/2006/relationships" xmlns:p="http://schemas.openxmlformats.org/presentationml/2006/main" matchingName="Blank" type="blank">
   <p:cSld name="BLANK">
     <p:spTree>
       <p:nvGrpSpPr>
@@ -2391,7 +2399,9 @@
               <a:defRPr/>
             </a:lvl9pPr>
           </a:lstStyle>
-          <a:p/>
+          <a:p>
+            <a:endParaRPr/>
+          </a:p>
         </p:txBody>
       </p:sp>
       <p:sp>
@@ -2522,7 +2532,9 @@
               <a:defRPr/>
             </a:lvl9pPr>
           </a:lstStyle>
-          <a:p/>
+          <a:p>
+            <a:endParaRPr/>
+          </a:p>
         </p:txBody>
       </p:sp>
       <p:sp>
@@ -2629,6 +2641,7 @@
             </a:pPr>
             <a:fld id="{00000000-1234-1234-1234-123412341234}" type="slidenum">
               <a:rPr lang="en-US"/>
+              <a:t>‹#›</a:t>
             </a:fld>
             <a:endParaRPr lang="en-US"/>
           </a:p>
@@ -2643,7 +2656,7 @@
 </file>
 
 <file path=ppt/slideLayouts/slideLayout10.xml><?xml version="1.0" encoding="utf-8"?>
-<p:sldLayout xmlns:a="http://schemas.openxmlformats.org/drawingml/2006/main" xmlns:r="http://schemas.openxmlformats.org/officeDocument/2006/relationships" xmlns:p="http://schemas.openxmlformats.org/presentationml/2006/main" type="vertTx" matchingName="Title and Vertical Text">
+<p:sldLayout xmlns:a="http://schemas.openxmlformats.org/drawingml/2006/main" xmlns:r="http://schemas.openxmlformats.org/officeDocument/2006/relationships" xmlns:p="http://schemas.openxmlformats.org/presentationml/2006/main" matchingName="Title and Vertical Text" type="vertTx">
   <p:cSld name="VERTICAL_TEXT">
     <p:spTree>
       <p:nvGrpSpPr>
@@ -2790,7 +2803,9 @@
               <a:defRPr/>
             </a:lvl9pPr>
           </a:lstStyle>
-          <a:p/>
+          <a:p>
+            <a:endParaRPr/>
+          </a:p>
         </p:txBody>
       </p:sp>
       <p:sp>
@@ -2948,7 +2963,9 @@
               <a:defRPr/>
             </a:lvl9pPr>
           </a:lstStyle>
-          <a:p/>
+          <a:p>
+            <a:endParaRPr/>
+          </a:p>
         </p:txBody>
       </p:sp>
       <p:sp>
@@ -3079,7 +3096,9 @@
               <a:defRPr/>
             </a:lvl9pPr>
           </a:lstStyle>
-          <a:p/>
+          <a:p>
+            <a:endParaRPr/>
+          </a:p>
         </p:txBody>
       </p:sp>
       <p:sp>
@@ -3210,7 +3229,9 @@
               <a:defRPr/>
             </a:lvl9pPr>
           </a:lstStyle>
-          <a:p/>
+          <a:p>
+            <a:endParaRPr/>
+          </a:p>
         </p:txBody>
       </p:sp>
       <p:sp>
@@ -3317,6 +3338,7 @@
             </a:pPr>
             <a:fld id="{00000000-1234-1234-1234-123412341234}" type="slidenum">
               <a:rPr lang="en-US"/>
+              <a:t>‹#›</a:t>
             </a:fld>
             <a:endParaRPr lang="en-US"/>
           </a:p>
@@ -3331,7 +3353,7 @@
 </file>
 
 <file path=ppt/slideLayouts/slideLayout11.xml><?xml version="1.0" encoding="utf-8"?>
-<p:sldLayout xmlns:a="http://schemas.openxmlformats.org/drawingml/2006/main" xmlns:r="http://schemas.openxmlformats.org/officeDocument/2006/relationships" xmlns:p="http://schemas.openxmlformats.org/presentationml/2006/main" type="vertTitleAndTx" matchingName="Vertical Title and Text">
+<p:sldLayout xmlns:a="http://schemas.openxmlformats.org/drawingml/2006/main" xmlns:r="http://schemas.openxmlformats.org/officeDocument/2006/relationships" xmlns:p="http://schemas.openxmlformats.org/presentationml/2006/main" matchingName="Vertical Title and Text" type="vertTitleAndTx">
   <p:cSld name="VERTICAL_TITLE_AND_VERTICAL_TEXT">
     <p:spTree>
       <p:nvGrpSpPr>
@@ -3478,7 +3500,9 @@
               <a:defRPr/>
             </a:lvl9pPr>
           </a:lstStyle>
-          <a:p/>
+          <a:p>
+            <a:endParaRPr/>
+          </a:p>
         </p:txBody>
       </p:sp>
       <p:sp>
@@ -3636,7 +3660,9 @@
               <a:defRPr/>
             </a:lvl9pPr>
           </a:lstStyle>
-          <a:p/>
+          <a:p>
+            <a:endParaRPr/>
+          </a:p>
         </p:txBody>
       </p:sp>
       <p:sp>
@@ -3767,7 +3793,9 @@
               <a:defRPr/>
             </a:lvl9pPr>
           </a:lstStyle>
-          <a:p/>
+          <a:p>
+            <a:endParaRPr/>
+          </a:p>
         </p:txBody>
       </p:sp>
       <p:sp>
@@ -3898,7 +3926,9 @@
               <a:defRPr/>
             </a:lvl9pPr>
           </a:lstStyle>
-          <a:p/>
+          <a:p>
+            <a:endParaRPr/>
+          </a:p>
         </p:txBody>
       </p:sp>
       <p:sp>
@@ -4005,6 +4035,7 @@
             </a:pPr>
             <a:fld id="{00000000-1234-1234-1234-123412341234}" type="slidenum">
               <a:rPr lang="en-US"/>
+              <a:t>‹#›</a:t>
             </a:fld>
             <a:endParaRPr lang="en-US"/>
           </a:p>
@@ -4019,7 +4050,7 @@
 </file>
 
 <file path=ppt/slideLayouts/slideLayout2.xml><?xml version="1.0" encoding="utf-8"?>
-<p:sldLayout xmlns:a="http://schemas.openxmlformats.org/drawingml/2006/main" xmlns:r="http://schemas.openxmlformats.org/officeDocument/2006/relationships" xmlns:p="http://schemas.openxmlformats.org/presentationml/2006/main" type="title" matchingName="Title Slide">
+<p:sldLayout xmlns:a="http://schemas.openxmlformats.org/drawingml/2006/main" xmlns:r="http://schemas.openxmlformats.org/officeDocument/2006/relationships" xmlns:p="http://schemas.openxmlformats.org/presentationml/2006/main" matchingName="Title Slide" type="title">
   <p:cSld name="TITLE">
     <p:spTree>
       <p:nvGrpSpPr>
@@ -4166,7 +4197,9 @@
               <a:defRPr/>
             </a:lvl9pPr>
           </a:lstStyle>
-          <a:p/>
+          <a:p>
+            <a:endParaRPr/>
+          </a:p>
         </p:txBody>
       </p:sp>
       <p:sp>
@@ -4360,7 +4393,9 @@
               </a:defRPr>
             </a:lvl9pPr>
           </a:lstStyle>
-          <a:p/>
+          <a:p>
+            <a:endParaRPr/>
+          </a:p>
         </p:txBody>
       </p:sp>
       <p:sp>
@@ -4491,7 +4526,9 @@
               <a:defRPr/>
             </a:lvl9pPr>
           </a:lstStyle>
-          <a:p/>
+          <a:p>
+            <a:endParaRPr/>
+          </a:p>
         </p:txBody>
       </p:sp>
       <p:sp>
@@ -4622,7 +4659,9 @@
               <a:defRPr/>
             </a:lvl9pPr>
           </a:lstStyle>
-          <a:p/>
+          <a:p>
+            <a:endParaRPr/>
+          </a:p>
         </p:txBody>
       </p:sp>
       <p:sp>
@@ -4729,6 +4768,7 @@
             </a:pPr>
             <a:fld id="{00000000-1234-1234-1234-123412341234}" type="slidenum">
               <a:rPr lang="en-US"/>
+              <a:t>‹#›</a:t>
             </a:fld>
             <a:endParaRPr lang="en-US"/>
           </a:p>
@@ -4743,7 +4783,7 @@
 </file>
 
 <file path=ppt/slideLayouts/slideLayout3.xml><?xml version="1.0" encoding="utf-8"?>
-<p:sldLayout xmlns:a="http://schemas.openxmlformats.org/drawingml/2006/main" xmlns:r="http://schemas.openxmlformats.org/officeDocument/2006/relationships" xmlns:p="http://schemas.openxmlformats.org/presentationml/2006/main" type="obj" matchingName="Title and Content">
+<p:sldLayout xmlns:a="http://schemas.openxmlformats.org/drawingml/2006/main" xmlns:r="http://schemas.openxmlformats.org/officeDocument/2006/relationships" xmlns:p="http://schemas.openxmlformats.org/presentationml/2006/main" matchingName="Title and Content" type="obj">
   <p:cSld name="OBJECT">
     <p:spTree>
       <p:nvGrpSpPr>
@@ -4890,7 +4930,9 @@
               <a:defRPr/>
             </a:lvl9pPr>
           </a:lstStyle>
-          <a:p/>
+          <a:p>
+            <a:endParaRPr/>
+          </a:p>
         </p:txBody>
       </p:sp>
       <p:sp>
@@ -5048,7 +5090,9 @@
               <a:defRPr/>
             </a:lvl9pPr>
           </a:lstStyle>
-          <a:p/>
+          <a:p>
+            <a:endParaRPr/>
+          </a:p>
         </p:txBody>
       </p:sp>
       <p:sp>
@@ -5179,7 +5223,9 @@
               <a:defRPr/>
             </a:lvl9pPr>
           </a:lstStyle>
-          <a:p/>
+          <a:p>
+            <a:endParaRPr/>
+          </a:p>
         </p:txBody>
       </p:sp>
       <p:sp>
@@ -5310,7 +5356,9 @@
               <a:defRPr/>
             </a:lvl9pPr>
           </a:lstStyle>
-          <a:p/>
+          <a:p>
+            <a:endParaRPr/>
+          </a:p>
         </p:txBody>
       </p:sp>
       <p:sp>
@@ -5417,6 +5465,7 @@
             </a:pPr>
             <a:fld id="{00000000-1234-1234-1234-123412341234}" type="slidenum">
               <a:rPr lang="en-US"/>
+              <a:t>‹#›</a:t>
             </a:fld>
             <a:endParaRPr lang="en-US"/>
           </a:p>
@@ -5431,7 +5480,7 @@
 </file>
 
 <file path=ppt/slideLayouts/slideLayout4.xml><?xml version="1.0" encoding="utf-8"?>
-<p:sldLayout xmlns:a="http://schemas.openxmlformats.org/drawingml/2006/main" xmlns:r="http://schemas.openxmlformats.org/officeDocument/2006/relationships" xmlns:p="http://schemas.openxmlformats.org/presentationml/2006/main" type="secHead" matchingName="Section Header">
+<p:sldLayout xmlns:a="http://schemas.openxmlformats.org/drawingml/2006/main" xmlns:r="http://schemas.openxmlformats.org/officeDocument/2006/relationships" xmlns:p="http://schemas.openxmlformats.org/presentationml/2006/main" matchingName="Section Header" type="secHead">
   <p:cSld name="SECTION_HEADER">
     <p:spTree>
       <p:nvGrpSpPr>
@@ -5579,7 +5628,9 @@
               <a:defRPr/>
             </a:lvl9pPr>
           </a:lstStyle>
-          <a:p/>
+          <a:p>
+            <a:endParaRPr/>
+          </a:p>
         </p:txBody>
       </p:sp>
       <p:sp>
@@ -5773,7 +5824,9 @@
               </a:defRPr>
             </a:lvl9pPr>
           </a:lstStyle>
-          <a:p/>
+          <a:p>
+            <a:endParaRPr/>
+          </a:p>
         </p:txBody>
       </p:sp>
       <p:sp>
@@ -5904,7 +5957,9 @@
               <a:defRPr/>
             </a:lvl9pPr>
           </a:lstStyle>
-          <a:p/>
+          <a:p>
+            <a:endParaRPr/>
+          </a:p>
         </p:txBody>
       </p:sp>
       <p:sp>
@@ -6035,7 +6090,9 @@
               <a:defRPr/>
             </a:lvl9pPr>
           </a:lstStyle>
-          <a:p/>
+          <a:p>
+            <a:endParaRPr/>
+          </a:p>
         </p:txBody>
       </p:sp>
       <p:sp>
@@ -6142,6 +6199,7 @@
             </a:pPr>
             <a:fld id="{00000000-1234-1234-1234-123412341234}" type="slidenum">
               <a:rPr lang="en-US"/>
+              <a:t>‹#›</a:t>
             </a:fld>
             <a:endParaRPr lang="en-US"/>
           </a:p>
@@ -6156,7 +6214,7 @@
 </file>
 
 <file path=ppt/slideLayouts/slideLayout5.xml><?xml version="1.0" encoding="utf-8"?>
-<p:sldLayout xmlns:a="http://schemas.openxmlformats.org/drawingml/2006/main" xmlns:r="http://schemas.openxmlformats.org/officeDocument/2006/relationships" xmlns:p="http://schemas.openxmlformats.org/presentationml/2006/main" type="twoObj" matchingName="Two Content">
+<p:sldLayout xmlns:a="http://schemas.openxmlformats.org/drawingml/2006/main" xmlns:r="http://schemas.openxmlformats.org/officeDocument/2006/relationships" xmlns:p="http://schemas.openxmlformats.org/presentationml/2006/main" matchingName="Two Content" type="twoObj">
   <p:cSld name="TWO_OBJECTS">
     <p:spTree>
       <p:nvGrpSpPr>
@@ -6303,7 +6361,9 @@
               <a:defRPr/>
             </a:lvl9pPr>
           </a:lstStyle>
-          <a:p/>
+          <a:p>
+            <a:endParaRPr/>
+          </a:p>
         </p:txBody>
       </p:sp>
       <p:sp>
@@ -6461,7 +6521,9 @@
               <a:defRPr sz="1800"/>
             </a:lvl9pPr>
           </a:lstStyle>
-          <a:p/>
+          <a:p>
+            <a:endParaRPr/>
+          </a:p>
         </p:txBody>
       </p:sp>
       <p:sp>
@@ -6619,7 +6681,9 @@
               <a:defRPr sz="1800"/>
             </a:lvl9pPr>
           </a:lstStyle>
-          <a:p/>
+          <a:p>
+            <a:endParaRPr/>
+          </a:p>
         </p:txBody>
       </p:sp>
       <p:sp>
@@ -6750,7 +6814,9 @@
               <a:defRPr/>
             </a:lvl9pPr>
           </a:lstStyle>
-          <a:p/>
+          <a:p>
+            <a:endParaRPr/>
+          </a:p>
         </p:txBody>
       </p:sp>
       <p:sp>
@@ -6881,7 +6947,9 @@
               <a:defRPr/>
             </a:lvl9pPr>
           </a:lstStyle>
-          <a:p/>
+          <a:p>
+            <a:endParaRPr/>
+          </a:p>
         </p:txBody>
       </p:sp>
       <p:sp>
@@ -6988,6 +7056,7 @@
             </a:pPr>
             <a:fld id="{00000000-1234-1234-1234-123412341234}" type="slidenum">
               <a:rPr lang="en-US"/>
+              <a:t>‹#›</a:t>
             </a:fld>
             <a:endParaRPr lang="en-US"/>
           </a:p>
@@ -7002,7 +7071,7 @@
 </file>
 
 <file path=ppt/slideLayouts/slideLayout6.xml><?xml version="1.0" encoding="utf-8"?>
-<p:sldLayout xmlns:a="http://schemas.openxmlformats.org/drawingml/2006/main" xmlns:r="http://schemas.openxmlformats.org/officeDocument/2006/relationships" xmlns:p="http://schemas.openxmlformats.org/presentationml/2006/main" type="twoTxTwoObj" matchingName="Comparison">
+<p:sldLayout xmlns:a="http://schemas.openxmlformats.org/drawingml/2006/main" xmlns:r="http://schemas.openxmlformats.org/officeDocument/2006/relationships" xmlns:p="http://schemas.openxmlformats.org/presentationml/2006/main" matchingName="Comparison" type="twoTxTwoObj">
   <p:cSld name="TWO_OBJECTS_WITH_TEXT">
     <p:spTree>
       <p:nvGrpSpPr>
@@ -7150,7 +7219,9 @@
               <a:defRPr/>
             </a:lvl9pPr>
           </a:lstStyle>
-          <a:p/>
+          <a:p>
+            <a:endParaRPr/>
+          </a:p>
         </p:txBody>
       </p:sp>
       <p:sp>
@@ -7308,7 +7379,9 @@
               <a:defRPr sz="1600" b="1"/>
             </a:lvl9pPr>
           </a:lstStyle>
-          <a:p/>
+          <a:p>
+            <a:endParaRPr/>
+          </a:p>
         </p:txBody>
       </p:sp>
       <p:sp>
@@ -7466,7 +7539,9 @@
               <a:defRPr sz="1600"/>
             </a:lvl9pPr>
           </a:lstStyle>
-          <a:p/>
+          <a:p>
+            <a:endParaRPr/>
+          </a:p>
         </p:txBody>
       </p:sp>
       <p:sp>
@@ -7624,7 +7699,9 @@
               <a:defRPr sz="1600" b="1"/>
             </a:lvl9pPr>
           </a:lstStyle>
-          <a:p/>
+          <a:p>
+            <a:endParaRPr/>
+          </a:p>
         </p:txBody>
       </p:sp>
       <p:sp>
@@ -7782,7 +7859,9 @@
               <a:defRPr sz="1600"/>
             </a:lvl9pPr>
           </a:lstStyle>
-          <a:p/>
+          <a:p>
+            <a:endParaRPr/>
+          </a:p>
         </p:txBody>
       </p:sp>
       <p:sp>
@@ -7913,7 +7992,9 @@
               <a:defRPr/>
             </a:lvl9pPr>
           </a:lstStyle>
-          <a:p/>
+          <a:p>
+            <a:endParaRPr/>
+          </a:p>
         </p:txBody>
       </p:sp>
       <p:sp>
@@ -8044,7 +8125,9 @@
               <a:defRPr/>
             </a:lvl9pPr>
           </a:lstStyle>
-          <a:p/>
+          <a:p>
+            <a:endParaRPr/>
+          </a:p>
         </p:txBody>
       </p:sp>
       <p:sp>
@@ -8151,6 +8234,7 @@
             </a:pPr>
             <a:fld id="{00000000-1234-1234-1234-123412341234}" type="slidenum">
               <a:rPr lang="en-US"/>
+              <a:t>‹#›</a:t>
             </a:fld>
             <a:endParaRPr lang="en-US"/>
           </a:p>
@@ -8165,7 +8249,7 @@
 </file>
 
 <file path=ppt/slideLayouts/slideLayout7.xml><?xml version="1.0" encoding="utf-8"?>
-<p:sldLayout xmlns:a="http://schemas.openxmlformats.org/drawingml/2006/main" xmlns:r="http://schemas.openxmlformats.org/officeDocument/2006/relationships" xmlns:p="http://schemas.openxmlformats.org/presentationml/2006/main" type="titleOnly" matchingName="Title Only">
+<p:sldLayout xmlns:a="http://schemas.openxmlformats.org/drawingml/2006/main" xmlns:r="http://schemas.openxmlformats.org/officeDocument/2006/relationships" xmlns:p="http://schemas.openxmlformats.org/presentationml/2006/main" matchingName="Title Only" type="titleOnly">
   <p:cSld name="TITLE_ONLY">
     <p:spTree>
       <p:nvGrpSpPr>
@@ -8312,7 +8396,9 @@
               <a:defRPr/>
             </a:lvl9pPr>
           </a:lstStyle>
-          <a:p/>
+          <a:p>
+            <a:endParaRPr/>
+          </a:p>
         </p:txBody>
       </p:sp>
       <p:sp>
@@ -8443,7 +8529,9 @@
               <a:defRPr/>
             </a:lvl9pPr>
           </a:lstStyle>
-          <a:p/>
+          <a:p>
+            <a:endParaRPr/>
+          </a:p>
         </p:txBody>
       </p:sp>
       <p:sp>
@@ -8574,7 +8662,9 @@
               <a:defRPr/>
             </a:lvl9pPr>
           </a:lstStyle>
-          <a:p/>
+          <a:p>
+            <a:endParaRPr/>
+          </a:p>
         </p:txBody>
       </p:sp>
       <p:sp>
@@ -8681,6 +8771,7 @@
             </a:pPr>
             <a:fld id="{00000000-1234-1234-1234-123412341234}" type="slidenum">
               <a:rPr lang="en-US"/>
+              <a:t>‹#›</a:t>
             </a:fld>
             <a:endParaRPr lang="en-US"/>
           </a:p>
@@ -8695,7 +8786,7 @@
 </file>
 
 <file path=ppt/slideLayouts/slideLayout8.xml><?xml version="1.0" encoding="utf-8"?>
-<p:sldLayout xmlns:a="http://schemas.openxmlformats.org/drawingml/2006/main" xmlns:r="http://schemas.openxmlformats.org/officeDocument/2006/relationships" xmlns:p="http://schemas.openxmlformats.org/presentationml/2006/main" type="objTx" matchingName="Content with Caption">
+<p:sldLayout xmlns:a="http://schemas.openxmlformats.org/drawingml/2006/main" xmlns:r="http://schemas.openxmlformats.org/officeDocument/2006/relationships" xmlns:p="http://schemas.openxmlformats.org/presentationml/2006/main" matchingName="Content with Caption" type="objTx">
   <p:cSld name="OBJECT_WITH_CAPTION_TEXT">
     <p:spTree>
       <p:nvGrpSpPr>
@@ -8843,7 +8934,9 @@
               <a:defRPr/>
             </a:lvl9pPr>
           </a:lstStyle>
-          <a:p/>
+          <a:p>
+            <a:endParaRPr/>
+          </a:p>
         </p:txBody>
       </p:sp>
       <p:sp>
@@ -9001,7 +9094,9 @@
               <a:defRPr sz="2000"/>
             </a:lvl9pPr>
           </a:lstStyle>
-          <a:p/>
+          <a:p>
+            <a:endParaRPr/>
+          </a:p>
         </p:txBody>
       </p:sp>
       <p:sp>
@@ -9159,7 +9254,9 @@
               <a:defRPr sz="900"/>
             </a:lvl9pPr>
           </a:lstStyle>
-          <a:p/>
+          <a:p>
+            <a:endParaRPr/>
+          </a:p>
         </p:txBody>
       </p:sp>
       <p:sp>
@@ -9290,7 +9387,9 @@
               <a:defRPr/>
             </a:lvl9pPr>
           </a:lstStyle>
-          <a:p/>
+          <a:p>
+            <a:endParaRPr/>
+          </a:p>
         </p:txBody>
       </p:sp>
       <p:sp>
@@ -9421,7 +9520,9 @@
               <a:defRPr/>
             </a:lvl9pPr>
           </a:lstStyle>
-          <a:p/>
+          <a:p>
+            <a:endParaRPr/>
+          </a:p>
         </p:txBody>
       </p:sp>
       <p:sp>
@@ -9528,6 +9629,7 @@
             </a:pPr>
             <a:fld id="{00000000-1234-1234-1234-123412341234}" type="slidenum">
               <a:rPr lang="en-US"/>
+              <a:t>‹#›</a:t>
             </a:fld>
             <a:endParaRPr lang="en-US"/>
           </a:p>
@@ -9542,7 +9644,7 @@
 </file>
 
 <file path=ppt/slideLayouts/slideLayout9.xml><?xml version="1.0" encoding="utf-8"?>
-<p:sldLayout xmlns:a="http://schemas.openxmlformats.org/drawingml/2006/main" xmlns:r="http://schemas.openxmlformats.org/officeDocument/2006/relationships" xmlns:p="http://schemas.openxmlformats.org/presentationml/2006/main" type="picTx" matchingName="Picture with Caption">
+<p:sldLayout xmlns:a="http://schemas.openxmlformats.org/drawingml/2006/main" xmlns:r="http://schemas.openxmlformats.org/officeDocument/2006/relationships" xmlns:p="http://schemas.openxmlformats.org/presentationml/2006/main" matchingName="Picture with Caption" type="picTx">
   <p:cSld name="PICTURE_WITH_CAPTION_TEXT">
     <p:spTree>
       <p:nvGrpSpPr>
@@ -9690,7 +9792,9 @@
               <a:defRPr/>
             </a:lvl9pPr>
           </a:lstStyle>
-          <a:p/>
+          <a:p>
+            <a:endParaRPr/>
+          </a:p>
         </p:txBody>
       </p:sp>
       <p:sp>
@@ -9872,7 +9976,9 @@
               <a:defRPr sz="900"/>
             </a:lvl9pPr>
           </a:lstStyle>
-          <a:p/>
+          <a:p>
+            <a:endParaRPr/>
+          </a:p>
         </p:txBody>
       </p:sp>
       <p:sp>
@@ -10003,7 +10109,9 @@
               <a:defRPr/>
             </a:lvl9pPr>
           </a:lstStyle>
-          <a:p/>
+          <a:p>
+            <a:endParaRPr/>
+          </a:p>
         </p:txBody>
       </p:sp>
       <p:sp>
@@ -10134,7 +10242,9 @@
               <a:defRPr/>
             </a:lvl9pPr>
           </a:lstStyle>
-          <a:p/>
+          <a:p>
+            <a:endParaRPr/>
+          </a:p>
         </p:txBody>
       </p:sp>
       <p:sp>
@@ -10241,6 +10351,7 @@
             </a:pPr>
             <a:fld id="{00000000-1234-1234-1234-123412341234}" type="slidenum">
               <a:rPr lang="en-US"/>
+              <a:t>‹#›</a:t>
             </a:fld>
             <a:endParaRPr lang="en-US"/>
           </a:p>
@@ -10419,7 +10530,9 @@
               <a:defRPr sz="1800"/>
             </a:lvl9pPr>
           </a:lstStyle>
-          <a:p/>
+          <a:p>
+            <a:endParaRPr/>
+          </a:p>
         </p:txBody>
       </p:sp>
       <p:sp>
@@ -10658,7 +10771,9 @@
               </a:defRPr>
             </a:lvl9pPr>
           </a:lstStyle>
-          <a:p/>
+          <a:p>
+            <a:endParaRPr/>
+          </a:p>
         </p:txBody>
       </p:sp>
       <p:sp>
@@ -10861,7 +10976,9 @@
               </a:defRPr>
             </a:lvl9pPr>
           </a:lstStyle>
-          <a:p/>
+          <a:p>
+            <a:endParaRPr/>
+          </a:p>
         </p:txBody>
       </p:sp>
       <p:sp>
@@ -11064,7 +11181,9 @@
               </a:defRPr>
             </a:lvl9pPr>
           </a:lstStyle>
-          <a:p/>
+          <a:p>
+            <a:endParaRPr/>
+          </a:p>
         </p:txBody>
       </p:sp>
       <p:sp>
@@ -11243,6 +11362,7 @@
             </a:pPr>
             <a:fld id="{00000000-1234-1234-1234-123412341234}" type="slidenum">
               <a:rPr lang="en-US"/>
+              <a:t>‹#›</a:t>
             </a:fld>
             <a:endParaRPr lang="en-US"/>
           </a:p>
@@ -11989,7 +12109,7 @@
           <p:nvPr/>
         </p:nvPicPr>
         <p:blipFill rotWithShape="1">
-          <a:blip r:embed="rId1"/>
+          <a:blip r:embed="rId3"/>
           <a:srcRect/>
           <a:stretch>
             <a:fillRect/>
@@ -12177,15 +12297,6 @@
               </a:rPr>
               <a:t>)</a:t>
             </a:r>
-            <a:endParaRPr lang="en-US" sz="1200" b="1" i="0" u="none" strike="noStrike" cap="none">
-              <a:solidFill>
-                <a:srgbClr val="1E40AF"/>
-              </a:solidFill>
-              <a:latin typeface="Inter" panose="02000503000000020004"/>
-              <a:ea typeface="Inter" panose="02000503000000020004"/>
-              <a:cs typeface="Inter" panose="02000503000000020004"/>
-              <a:sym typeface="Inter" panose="02000503000000020004"/>
-            </a:endParaRPr>
           </a:p>
         </p:txBody>
       </p:sp>
@@ -12345,15 +12456,6 @@
               </a:rPr>
               <a:t>蒋敏 老师</a:t>
             </a:r>
-            <a:endParaRPr lang="en-US" sz="1600" b="1" i="0" u="none" strike="noStrike" cap="none">
-              <a:solidFill>
-                <a:srgbClr val="1E40AF"/>
-              </a:solidFill>
-              <a:latin typeface="Inter" panose="02000503000000020004"/>
-              <a:ea typeface="Inter" panose="02000503000000020004"/>
-              <a:cs typeface="Inter" panose="02000503000000020004"/>
-              <a:sym typeface="Inter" panose="02000503000000020004"/>
-            </a:endParaRPr>
           </a:p>
         </p:txBody>
       </p:sp>
@@ -12427,15 +12529,6 @@
               </a:rPr>
               <a:t>2026年7月</a:t>
             </a:r>
-            <a:endParaRPr lang="en-US" sz="1600" b="1" i="0" u="none" strike="noStrike" cap="none">
-              <a:solidFill>
-                <a:srgbClr val="1E40AF"/>
-              </a:solidFill>
-              <a:latin typeface="Inter" panose="02000503000000020004"/>
-              <a:ea typeface="Inter" panose="02000503000000020004"/>
-              <a:cs typeface="Inter" panose="02000503000000020004"/>
-              <a:sym typeface="Inter" panose="02000503000000020004"/>
-            </a:endParaRPr>
           </a:p>
         </p:txBody>
       </p:sp>
@@ -12459,6 +12552,7 @@
           <a:bodyPr wrap="square" rtlCol="0">
             <a:spAutoFit/>
           </a:bodyPr>
+          <a:lstStyle/>
           <a:p>
             <a:r>
               <a:rPr lang="zh-CN" altLang="en-US" sz="2000">
@@ -12500,11 +12594,6 @@
               </a:rPr>
               <a:t>的面向对象课程设计</a:t>
             </a:r>
-            <a:endParaRPr lang="zh-CN" altLang="en-US" sz="2000">
-              <a:latin typeface="黑体" panose="02010609060101010101" charset="-122"/>
-              <a:ea typeface="黑体" panose="02010609060101010101" charset="-122"/>
-              <a:cs typeface="黑体" panose="02010609060101010101" charset="-122"/>
-            </a:endParaRPr>
           </a:p>
         </p:txBody>
       </p:sp>
@@ -12548,7 +12637,7 @@
           <p:nvPr/>
         </p:nvPicPr>
         <p:blipFill rotWithShape="1">
-          <a:blip r:embed="rId1"/>
+          <a:blip r:embed="rId11"/>
           <a:srcRect/>
           <a:stretch>
             <a:fillRect/>
@@ -12574,12 +12663,12 @@
           <p:cNvPicPr preferRelativeResize="0"/>
           <p:nvPr>
             <p:custDataLst>
-              <p:tags r:id="rId2"/>
+              <p:tags r:id="rId1"/>
             </p:custDataLst>
           </p:nvPr>
         </p:nvPicPr>
         <p:blipFill rotWithShape="1">
-          <a:blip r:embed="rId3"/>
+          <a:blip r:embed="rId12"/>
           <a:srcRect/>
           <a:stretch>
             <a:fillRect/>
@@ -12605,12 +12694,12 @@
           <p:cNvPicPr preferRelativeResize="0"/>
           <p:nvPr>
             <p:custDataLst>
-              <p:tags r:id="rId4"/>
+              <p:tags r:id="rId2"/>
             </p:custDataLst>
           </p:nvPr>
         </p:nvPicPr>
         <p:blipFill rotWithShape="1">
-          <a:blip r:embed="rId5"/>
+          <a:blip r:embed="rId13"/>
           <a:srcRect/>
           <a:stretch>
             <a:fillRect/>
@@ -12679,15 +12768,6 @@
               </a:rPr>
               <a:t>核心挑战：多线程与异步调度</a:t>
             </a:r>
-            <a:endParaRPr lang="en-US" sz="2850" b="1" i="0" u="none" strike="noStrike" cap="none">
-              <a:solidFill>
-                <a:srgbClr val="1E40AF"/>
-              </a:solidFill>
-              <a:latin typeface="Inter" panose="02000503000000020004"/>
-              <a:ea typeface="Inter" panose="02000503000000020004"/>
-              <a:cs typeface="Inter" panose="02000503000000020004"/>
-              <a:sym typeface="Inter" panose="02000503000000020004"/>
-            </a:endParaRPr>
           </a:p>
         </p:txBody>
       </p:sp>
@@ -12785,15 +12865,6 @@
               </a:rPr>
               <a:t>CHALLENGE II: ASYNCHRONOUS MULTI-THREADING</a:t>
             </a:r>
-            <a:endParaRPr lang="en-US" sz="1350" b="0" i="0" u="none" strike="noStrike" cap="none">
-              <a:solidFill>
-                <a:srgbClr val="0891B2"/>
-              </a:solidFill>
-              <a:latin typeface="JetBrains Mono Medium" panose="02000009000000000000"/>
-              <a:ea typeface="JetBrains Mono Medium" panose="02000009000000000000"/>
-              <a:cs typeface="JetBrains Mono Medium" panose="02000009000000000000"/>
-              <a:sym typeface="JetBrains Mono Medium" panose="02000009000000000000"/>
-            </a:endParaRPr>
           </a:p>
         </p:txBody>
       </p:sp>
@@ -12803,7 +12874,7 @@
           <p:cNvSpPr txBox="1"/>
           <p:nvPr>
             <p:custDataLst>
-              <p:tags r:id="rId6"/>
+              <p:tags r:id="rId3"/>
             </p:custDataLst>
           </p:nvPr>
         </p:nvSpPr>
@@ -12847,15 +12918,6 @@
               </a:rPr>
               <a:t>界面主渲染线程完全解放</a:t>
             </a:r>
-            <a:endParaRPr lang="en-US" sz="1800" b="1" i="0" u="none" strike="noStrike" cap="none">
-              <a:solidFill>
-                <a:srgbClr val="1E40AF"/>
-              </a:solidFill>
-              <a:latin typeface="Inter" panose="02000503000000020004"/>
-              <a:ea typeface="Inter" panose="02000503000000020004"/>
-              <a:cs typeface="Inter" panose="02000503000000020004"/>
-              <a:sym typeface="Inter" panose="02000503000000020004"/>
-            </a:endParaRPr>
           </a:p>
         </p:txBody>
       </p:sp>
@@ -12865,7 +12927,7 @@
           <p:cNvSpPr txBox="1"/>
           <p:nvPr>
             <p:custDataLst>
-              <p:tags r:id="rId7"/>
+              <p:tags r:id="rId4"/>
             </p:custDataLst>
           </p:nvPr>
         </p:nvSpPr>
@@ -13078,7 +13140,7 @@
           <p:cNvSpPr txBox="1"/>
           <p:nvPr>
             <p:custDataLst>
-              <p:tags r:id="rId8"/>
+              <p:tags r:id="rId5"/>
             </p:custDataLst>
           </p:nvPr>
         </p:nvSpPr>
@@ -13122,15 +13184,6 @@
               </a:rPr>
               <a:t>平滑的黑屏淡入淡出动画</a:t>
             </a:r>
-            <a:endParaRPr lang="en-US" sz="1800" b="1" i="0" u="none" strike="noStrike" cap="none">
-              <a:solidFill>
-                <a:srgbClr val="1E40AF"/>
-              </a:solidFill>
-              <a:latin typeface="Inter" panose="02000503000000020004"/>
-              <a:ea typeface="Inter" panose="02000503000000020004"/>
-              <a:cs typeface="Inter" panose="02000503000000020004"/>
-              <a:sym typeface="Inter" panose="02000503000000020004"/>
-            </a:endParaRPr>
           </a:p>
         </p:txBody>
       </p:sp>
@@ -13140,13 +13193,13 @@
           <p:cNvSpPr txBox="1"/>
           <p:nvPr>
             <p:custDataLst>
-              <p:tags r:id="rId9"/>
+              <p:tags r:id="rId6"/>
             </p:custDataLst>
           </p:nvPr>
         </p:nvSpPr>
         <p:spPr>
           <a:xfrm>
-            <a:off x="6475412" y="2559813"/>
+            <a:off x="6553200" y="2510601"/>
             <a:ext cx="4743450" cy="3544570"/>
           </a:xfrm>
           <a:prstGeom prst="rect">
@@ -13389,12 +13442,12 @@
           <p:cNvPicPr preferRelativeResize="0"/>
           <p:nvPr>
             <p:custDataLst>
-              <p:tags r:id="rId10"/>
+              <p:tags r:id="rId7"/>
             </p:custDataLst>
           </p:nvPr>
         </p:nvPicPr>
         <p:blipFill rotWithShape="1">
-          <a:blip r:embed="rId11"/>
+          <a:blip r:embed="rId14"/>
           <a:srcRect/>
           <a:stretch>
             <a:fillRect/>
@@ -13420,12 +13473,12 @@
           <p:cNvPicPr preferRelativeResize="0"/>
           <p:nvPr>
             <p:custDataLst>
-              <p:tags r:id="rId12"/>
+              <p:tags r:id="rId8"/>
             </p:custDataLst>
           </p:nvPr>
         </p:nvPicPr>
         <p:blipFill rotWithShape="1">
-          <a:blip r:embed="rId13"/>
+          <a:blip r:embed="rId15"/>
           <a:srcRect/>
           <a:stretch>
             <a:fillRect/>
@@ -13527,15 +13580,6 @@
               </a:rPr>
               <a:t>STL 高阶应用与 A* 寻路算法</a:t>
             </a:r>
-            <a:endParaRPr lang="en-US" sz="2850" b="1" i="0" u="none" strike="noStrike" cap="none">
-              <a:solidFill>
-                <a:srgbClr val="1E40AF"/>
-              </a:solidFill>
-              <a:latin typeface="Inter" panose="02000503000000020004"/>
-              <a:ea typeface="Inter" panose="02000503000000020004"/>
-              <a:cs typeface="Inter" panose="02000503000000020004"/>
-              <a:sym typeface="Inter" panose="02000503000000020004"/>
-            </a:endParaRPr>
           </a:p>
         </p:txBody>
       </p:sp>
@@ -13633,15 +13677,6 @@
               </a:rPr>
               <a:t>CHALLENGE III: STL INTEGRATION &amp; A-STAR ALGORITHM</a:t>
             </a:r>
-            <a:endParaRPr lang="en-US" sz="1350" b="0" i="0" u="none" strike="noStrike" cap="none">
-              <a:solidFill>
-                <a:srgbClr val="0891B2"/>
-              </a:solidFill>
-              <a:latin typeface="JetBrains Mono Medium" panose="02000009000000000000"/>
-              <a:ea typeface="JetBrains Mono Medium" panose="02000009000000000000"/>
-              <a:cs typeface="JetBrains Mono Medium" panose="02000009000000000000"/>
-              <a:sym typeface="JetBrains Mono Medium" panose="02000009000000000000"/>
-            </a:endParaRPr>
           </a:p>
         </p:txBody>
       </p:sp>
@@ -13652,7 +13687,7 @@
           <p:nvPr/>
         </p:nvPicPr>
         <p:blipFill rotWithShape="1">
-          <a:blip r:embed="rId1"/>
+          <a:blip r:embed="rId3"/>
           <a:srcRect/>
           <a:stretch>
             <a:fillRect/>
@@ -14222,7 +14257,7 @@
           <p:nvPr/>
         </p:nvPicPr>
         <p:blipFill rotWithShape="1">
-          <a:blip r:embed="rId2"/>
+          <a:blip r:embed="rId4"/>
           <a:srcRect/>
           <a:stretch>
             <a:fillRect/>
@@ -14249,7 +14284,7 @@
           <p:nvPr/>
         </p:nvPicPr>
         <p:blipFill rotWithShape="1">
-          <a:blip r:embed="rId3"/>
+          <a:blip r:embed="rId5"/>
           <a:srcRect/>
           <a:stretch>
             <a:fillRect/>
@@ -14276,7 +14311,7 @@
           <p:nvPr/>
         </p:nvPicPr>
         <p:blipFill rotWithShape="1">
-          <a:blip r:embed="rId4"/>
+          <a:blip r:embed="rId6"/>
           <a:srcRect/>
           <a:stretch>
             <a:fillRect/>
@@ -14359,12 +14394,6 @@
               </a:rPr>
               <a:t>容器声明</a:t>
             </a:r>
-            <a:endParaRPr lang="zh-CN" altLang="en-US" dirty="0">
-              <a:solidFill>
-                <a:srgbClr val="0F172A"/>
-              </a:solidFill>
-              <a:latin typeface="Inter" panose="02000503000000020004"/>
-            </a:endParaRPr>
           </a:p>
           <a:p>
             <a:pPr>
@@ -14408,12 +14437,6 @@
               </a:rPr>
               <a:t>Open List)</a:t>
             </a:r>
-            <a:endParaRPr lang="en-GB" altLang="zh-CN" dirty="0">
-              <a:solidFill>
-                <a:srgbClr val="0F172A"/>
-              </a:solidFill>
-              <a:latin typeface="Inter" panose="02000503000000020004"/>
-            </a:endParaRPr>
           </a:p>
           <a:p>
             <a:pPr>
@@ -14520,12 +14543,6 @@
               </a:rPr>
               <a:t>;</a:t>
             </a:r>
-            <a:endParaRPr lang="en-GB" altLang="zh-CN" dirty="0">
-              <a:solidFill>
-                <a:srgbClr val="0F172A"/>
-              </a:solidFill>
-              <a:latin typeface="Inter" panose="02000503000000020004"/>
-            </a:endParaRPr>
           </a:p>
           <a:p>
             <a:pPr>
@@ -14569,12 +14586,6 @@
               </a:rPr>
               <a:t>Close List)</a:t>
             </a:r>
-            <a:endParaRPr lang="en-GB" altLang="zh-CN" dirty="0">
-              <a:solidFill>
-                <a:srgbClr val="0F172A"/>
-              </a:solidFill>
-              <a:latin typeface="Inter" panose="02000503000000020004"/>
-            </a:endParaRPr>
           </a:p>
           <a:p>
             <a:pPr>
@@ -14645,12 +14656,6 @@
               </a:rPr>
               <a:t>, false));</a:t>
             </a:r>
-            <a:endParaRPr lang="en-GB" altLang="zh-CN" dirty="0">
-              <a:solidFill>
-                <a:srgbClr val="0F172A"/>
-              </a:solidFill>
-              <a:latin typeface="Inter" panose="02000503000000020004"/>
-            </a:endParaRPr>
           </a:p>
           <a:p>
             <a:pPr>
@@ -14703,12 +14708,6 @@
               </a:rPr>
               <a:t>)</a:t>
             </a:r>
-            <a:endParaRPr lang="en-US" altLang="zh-CN" dirty="0">
-              <a:solidFill>
-                <a:srgbClr val="0F172A"/>
-              </a:solidFill>
-              <a:latin typeface="Inter" panose="02000503000000020004"/>
-            </a:endParaRPr>
           </a:p>
           <a:p>
             <a:pPr>
@@ -14818,7 +14817,7 @@
           <p:nvPr/>
         </p:nvPicPr>
         <p:blipFill rotWithShape="1">
-          <a:blip r:embed="rId1"/>
+          <a:blip r:embed="rId3"/>
           <a:srcRect/>
           <a:stretch>
             <a:fillRect/>
@@ -14845,7 +14844,7 @@
           <p:nvPr/>
         </p:nvPicPr>
         <p:blipFill rotWithShape="1">
-          <a:blip r:embed="rId2"/>
+          <a:blip r:embed="rId4"/>
           <a:srcRect/>
           <a:stretch>
             <a:fillRect/>
@@ -14914,15 +14913,6 @@
               </a:rPr>
               <a:t>高效的模块化团队协作</a:t>
             </a:r>
-            <a:endParaRPr lang="en-US" sz="2850" b="1" i="0" u="none" strike="noStrike" cap="none">
-              <a:solidFill>
-                <a:srgbClr val="1E40AF"/>
-              </a:solidFill>
-              <a:latin typeface="Inter" panose="02000503000000020004"/>
-              <a:ea typeface="Inter" panose="02000503000000020004"/>
-              <a:cs typeface="Inter" panose="02000503000000020004"/>
-              <a:sym typeface="Inter" panose="02000503000000020004"/>
-            </a:endParaRPr>
           </a:p>
         </p:txBody>
       </p:sp>
@@ -15020,15 +15010,6 @@
               </a:rPr>
               <a:t>TEAM ROLES AND COLLABORATIVE WORKFLOW</a:t>
             </a:r>
-            <a:endParaRPr lang="en-US" sz="1350" b="0" i="0" u="none" strike="noStrike" cap="none">
-              <a:solidFill>
-                <a:srgbClr val="0891B2"/>
-              </a:solidFill>
-              <a:latin typeface="JetBrains Mono Medium" panose="02000009000000000000"/>
-              <a:ea typeface="JetBrains Mono Medium" panose="02000009000000000000"/>
-              <a:cs typeface="JetBrains Mono Medium" panose="02000009000000000000"/>
-              <a:sym typeface="JetBrains Mono Medium" panose="02000009000000000000"/>
-            </a:endParaRPr>
           </a:p>
         </p:txBody>
       </p:sp>
@@ -15050,10 +15031,34 @@
                 <a:tableStyleId>{4579CC66-B2EF-4C60-BFF7-A1B67CE13D10}</a:tableStyleId>
               </a:tblPr>
               <a:tblGrid>
-                <a:gridCol w="1654375"/>
-                <a:gridCol w="2205925"/>
-                <a:gridCol w="4963425"/>
-                <a:gridCol w="2206225"/>
+                <a:gridCol w="1654375">
+                  <a:extLst>
+                    <a:ext uri="{9D8B030D-6E8A-4147-A177-3AD203B41FA5}">
+                      <a16:colId xmlns:a16="http://schemas.microsoft.com/office/drawing/2014/main" val="20000"/>
+                    </a:ext>
+                  </a:extLst>
+                </a:gridCol>
+                <a:gridCol w="2205925">
+                  <a:extLst>
+                    <a:ext uri="{9D8B030D-6E8A-4147-A177-3AD203B41FA5}">
+                      <a16:colId xmlns:a16="http://schemas.microsoft.com/office/drawing/2014/main" val="20001"/>
+                    </a:ext>
+                  </a:extLst>
+                </a:gridCol>
+                <a:gridCol w="4963425">
+                  <a:extLst>
+                    <a:ext uri="{9D8B030D-6E8A-4147-A177-3AD203B41FA5}">
+                      <a16:colId xmlns:a16="http://schemas.microsoft.com/office/drawing/2014/main" val="20002"/>
+                    </a:ext>
+                  </a:extLst>
+                </a:gridCol>
+                <a:gridCol w="2206225">
+                  <a:extLst>
+                    <a:ext uri="{9D8B030D-6E8A-4147-A177-3AD203B41FA5}">
+                      <a16:colId xmlns:a16="http://schemas.microsoft.com/office/drawing/2014/main" val="20003"/>
+                    </a:ext>
+                  </a:extLst>
+                </a:gridCol>
               </a:tblGrid>
               <a:tr h="672475">
                 <a:tc>
@@ -15082,15 +15087,6 @@
                         </a:rPr>
                         <a:t>姓名</a:t>
                       </a:r>
-                      <a:endParaRPr lang="en-US" sz="1200" b="1" i="0" u="none" strike="noStrike" cap="none">
-                        <a:solidFill>
-                          <a:srgbClr val="1E40AF"/>
-                        </a:solidFill>
-                        <a:latin typeface="Inter" panose="02000503000000020004"/>
-                        <a:ea typeface="Inter" panose="02000503000000020004"/>
-                        <a:cs typeface="Inter" panose="02000503000000020004"/>
-                        <a:sym typeface="Inter" panose="02000503000000020004"/>
-                      </a:endParaRPr>
                     </a:p>
                   </a:txBody>
                   <a:tcPr marL="63500" marR="63500" marT="25400" marB="25400" anchor="ctr">
@@ -15169,15 +15165,6 @@
                         </a:rPr>
                         <a:t>职责分工</a:t>
                       </a:r>
-                      <a:endParaRPr lang="en-US" sz="1200" b="1" i="0" u="none" strike="noStrike" cap="none">
-                        <a:solidFill>
-                          <a:srgbClr val="1E40AF"/>
-                        </a:solidFill>
-                        <a:latin typeface="Inter" panose="02000503000000020004"/>
-                        <a:ea typeface="Inter" panose="02000503000000020004"/>
-                        <a:cs typeface="Inter" panose="02000503000000020004"/>
-                        <a:sym typeface="Inter" panose="02000503000000020004"/>
-                      </a:endParaRPr>
                     </a:p>
                   </a:txBody>
                   <a:tcPr marL="63500" marR="63500" marT="25400" marB="25400" anchor="ctr">
@@ -15256,15 +15243,6 @@
                         </a:rPr>
                         <a:t>核心贡献与产出</a:t>
                       </a:r>
-                      <a:endParaRPr lang="en-US" sz="1200" b="1" i="0" u="none" strike="noStrike" cap="none">
-                        <a:solidFill>
-                          <a:srgbClr val="1E40AF"/>
-                        </a:solidFill>
-                        <a:latin typeface="Inter" panose="02000503000000020004"/>
-                        <a:ea typeface="Inter" panose="02000503000000020004"/>
-                        <a:cs typeface="Inter" panose="02000503000000020004"/>
-                        <a:sym typeface="Inter" panose="02000503000000020004"/>
-                      </a:endParaRPr>
                     </a:p>
                   </a:txBody>
                   <a:tcPr marL="63500" marR="63500" marT="25400" marB="25400" anchor="ctr">
@@ -15343,15 +15321,6 @@
                         </a:rPr>
                         <a:t>状态</a:t>
                       </a:r>
-                      <a:endParaRPr lang="en-US" sz="1200" b="1" i="0" u="none" strike="noStrike" cap="none">
-                        <a:solidFill>
-                          <a:srgbClr val="1E40AF"/>
-                        </a:solidFill>
-                        <a:latin typeface="Inter" panose="02000503000000020004"/>
-                        <a:ea typeface="Inter" panose="02000503000000020004"/>
-                        <a:cs typeface="Inter" panose="02000503000000020004"/>
-                        <a:sym typeface="Inter" panose="02000503000000020004"/>
-                      </a:endParaRPr>
                     </a:p>
                   </a:txBody>
                   <a:tcPr marL="63500" marR="63500" marT="25400" marB="25400" anchor="ctr">
@@ -15404,6 +15373,11 @@
                     </a:solidFill>
                   </a:tcPr>
                 </a:tc>
+                <a:extLst>
+                  <a:ext uri="{0D108BD9-81ED-4DB2-BD59-A6C34878D82A}">
+                    <a16:rowId xmlns:a16="http://schemas.microsoft.com/office/drawing/2014/main" val="10000"/>
+                  </a:ext>
+                </a:extLst>
               </a:tr>
               <a:tr h="672475">
                 <a:tc>
@@ -15444,15 +15418,6 @@
                         </a:rPr>
                         <a:t> (组长)</a:t>
                       </a:r>
-                      <a:endParaRPr lang="en-US" sz="1125" b="0" i="0" u="none" strike="noStrike" cap="none">
-                        <a:solidFill>
-                          <a:srgbClr val="0F172A"/>
-                        </a:solidFill>
-                        <a:latin typeface="Inter" panose="02000503000000020004"/>
-                        <a:ea typeface="Inter" panose="02000503000000020004"/>
-                        <a:cs typeface="Inter" panose="02000503000000020004"/>
-                        <a:sym typeface="Inter" panose="02000503000000020004"/>
-                      </a:endParaRPr>
                     </a:p>
                   </a:txBody>
                   <a:tcPr marL="63500" marR="63500" marT="25400" marB="25400" anchor="ctr">
@@ -15528,15 +15493,6 @@
                         </a:rPr>
                         <a:t>架构设计 / 业务逻辑</a:t>
                       </a:r>
-                      <a:endParaRPr lang="en-US" sz="1125" b="0" i="0" u="none" strike="noStrike" cap="none">
-                        <a:solidFill>
-                          <a:srgbClr val="0F172A"/>
-                        </a:solidFill>
-                        <a:latin typeface="Inter" panose="02000503000000020004"/>
-                        <a:ea typeface="Inter" panose="02000503000000020004"/>
-                        <a:cs typeface="Inter" panose="02000503000000020004"/>
-                        <a:sym typeface="Inter" panose="02000503000000020004"/>
-                      </a:endParaRPr>
                     </a:p>
                   </a:txBody>
                   <a:tcPr marL="63500" marR="63500" marT="25400" marB="25400" anchor="ctr">
@@ -15612,15 +15568,6 @@
                         </a:rPr>
                         <a:t>编写全部基础头文件、定义面向对象基类、打通核心逻辑与数据流。</a:t>
                       </a:r>
-                      <a:endParaRPr lang="en-US" sz="1125" b="0" i="0" u="none" strike="noStrike" cap="none">
-                        <a:solidFill>
-                          <a:srgbClr val="0F172A"/>
-                        </a:solidFill>
-                        <a:latin typeface="Inter" panose="02000503000000020004"/>
-                        <a:ea typeface="Inter" panose="02000503000000020004"/>
-                        <a:cs typeface="Inter" panose="02000503000000020004"/>
-                        <a:sym typeface="Inter" panose="02000503000000020004"/>
-                      </a:endParaRPr>
                     </a:p>
                   </a:txBody>
                   <a:tcPr marL="63500" marR="63500" marT="25400" marB="25400" anchor="ctr">
@@ -15696,15 +15643,6 @@
                         </a:rPr>
                         <a:t>已完成</a:t>
                       </a:r>
-                      <a:endParaRPr lang="en-US" sz="1125" b="0" i="0" u="none" strike="noStrike" cap="none">
-                        <a:solidFill>
-                          <a:srgbClr val="0F172A"/>
-                        </a:solidFill>
-                        <a:latin typeface="Inter" panose="02000503000000020004"/>
-                        <a:ea typeface="Inter" panose="02000503000000020004"/>
-                        <a:cs typeface="Inter" panose="02000503000000020004"/>
-                        <a:sym typeface="Inter" panose="02000503000000020004"/>
-                      </a:endParaRPr>
                     </a:p>
                   </a:txBody>
                   <a:tcPr marL="63500" marR="63500" marT="25400" marB="25400" anchor="ctr">
@@ -15754,6 +15692,11 @@
                     </a:lnB>
                   </a:tcPr>
                 </a:tc>
+                <a:extLst>
+                  <a:ext uri="{0D108BD9-81ED-4DB2-BD59-A6C34878D82A}">
+                    <a16:rowId xmlns:a16="http://schemas.microsoft.com/office/drawing/2014/main" val="10001"/>
+                  </a:ext>
+                </a:extLst>
               </a:tr>
               <a:tr h="672475">
                 <a:tc>
@@ -15782,15 +15725,6 @@
                         </a:rPr>
                         <a:t>陈律举</a:t>
                       </a:r>
-                      <a:endParaRPr lang="en-US" sz="1125" b="1" i="0" u="none" strike="noStrike" cap="none">
-                        <a:solidFill>
-                          <a:srgbClr val="0F172A"/>
-                        </a:solidFill>
-                        <a:latin typeface="Inter" panose="02000503000000020004"/>
-                        <a:ea typeface="Inter" panose="02000503000000020004"/>
-                        <a:cs typeface="Inter" panose="02000503000000020004"/>
-                        <a:sym typeface="Inter" panose="02000503000000020004"/>
-                      </a:endParaRPr>
                     </a:p>
                   </a:txBody>
                   <a:tcPr marL="63500" marR="63500" marT="25400" marB="25400" anchor="ctr">
@@ -15866,15 +15800,6 @@
                         </a:rPr>
                         <a:t>图形化重构 / UI 交付</a:t>
                       </a:r>
-                      <a:endParaRPr lang="en-US" sz="1125" b="0" i="0" u="none" strike="noStrike" cap="none">
-                        <a:solidFill>
-                          <a:srgbClr val="0F172A"/>
-                        </a:solidFill>
-                        <a:latin typeface="Inter" panose="02000503000000020004"/>
-                        <a:ea typeface="Inter" panose="02000503000000020004"/>
-                        <a:cs typeface="Inter" panose="02000503000000020004"/>
-                        <a:sym typeface="Inter" panose="02000503000000020004"/>
-                      </a:endParaRPr>
                     </a:p>
                   </a:txBody>
                   <a:tcPr marL="63500" marR="63500" marT="25400" marB="25400" anchor="ctr">
@@ -15950,15 +15875,6 @@
                         </a:rPr>
                         <a:t>主导接入 Qt6 框架、设计 QGraphicsView 跑图逻辑、完成键鼠事件拦截与无卡顿重构。</a:t>
                       </a:r>
-                      <a:endParaRPr lang="en-US" sz="1125" b="0" i="0" u="none" strike="noStrike" cap="none">
-                        <a:solidFill>
-                          <a:srgbClr val="0F172A"/>
-                        </a:solidFill>
-                        <a:latin typeface="Inter" panose="02000503000000020004"/>
-                        <a:ea typeface="Inter" panose="02000503000000020004"/>
-                        <a:cs typeface="Inter" panose="02000503000000020004"/>
-                        <a:sym typeface="Inter" panose="02000503000000020004"/>
-                      </a:endParaRPr>
                     </a:p>
                   </a:txBody>
                   <a:tcPr marL="63500" marR="63500" marT="25400" marB="25400" anchor="ctr">
@@ -16034,15 +15950,6 @@
                         </a:rPr>
                         <a:t>已完成</a:t>
                       </a:r>
-                      <a:endParaRPr lang="en-US" sz="1125" b="0" i="0" u="none" strike="noStrike" cap="none">
-                        <a:solidFill>
-                          <a:srgbClr val="0F172A"/>
-                        </a:solidFill>
-                        <a:latin typeface="Inter" panose="02000503000000020004"/>
-                        <a:ea typeface="Inter" panose="02000503000000020004"/>
-                        <a:cs typeface="Inter" panose="02000503000000020004"/>
-                        <a:sym typeface="Inter" panose="02000503000000020004"/>
-                      </a:endParaRPr>
                     </a:p>
                   </a:txBody>
                   <a:tcPr marL="63500" marR="63500" marT="25400" marB="25400" anchor="ctr">
@@ -16092,6 +15999,11 @@
                     </a:lnB>
                   </a:tcPr>
                 </a:tc>
+                <a:extLst>
+                  <a:ext uri="{0D108BD9-81ED-4DB2-BD59-A6C34878D82A}">
+                    <a16:rowId xmlns:a16="http://schemas.microsoft.com/office/drawing/2014/main" val="10002"/>
+                  </a:ext>
+                </a:extLst>
               </a:tr>
               <a:tr h="672475">
                 <a:tc>
@@ -16120,15 +16032,6 @@
                         </a:rPr>
                         <a:t>王铭钊</a:t>
                       </a:r>
-                      <a:endParaRPr lang="en-US" sz="1125" b="1" i="0" u="none" strike="noStrike" cap="none">
-                        <a:solidFill>
-                          <a:srgbClr val="0F172A"/>
-                        </a:solidFill>
-                        <a:latin typeface="Inter" panose="02000503000000020004"/>
-                        <a:ea typeface="Inter" panose="02000503000000020004"/>
-                        <a:cs typeface="Inter" panose="02000503000000020004"/>
-                        <a:sym typeface="Inter" panose="02000503000000020004"/>
-                      </a:endParaRPr>
                     </a:p>
                   </a:txBody>
                   <a:tcPr marL="63500" marR="63500" marT="25400" marB="25400" anchor="ctr">
@@ -16204,15 +16107,6 @@
                         </a:rPr>
                         <a:t>文档编写 / 功能测试</a:t>
                       </a:r>
-                      <a:endParaRPr lang="en-US" sz="1125" b="0" i="0" u="none" strike="noStrike" cap="none">
-                        <a:solidFill>
-                          <a:srgbClr val="0F172A"/>
-                        </a:solidFill>
-                        <a:latin typeface="Inter" panose="02000503000000020004"/>
-                        <a:ea typeface="Inter" panose="02000503000000020004"/>
-                        <a:cs typeface="Inter" panose="02000503000000020004"/>
-                        <a:sym typeface="Inter" panose="02000503000000020004"/>
-                      </a:endParaRPr>
                     </a:p>
                   </a:txBody>
                   <a:tcPr marL="63500" marR="63500" marT="25400" marB="25400" anchor="ctr">
@@ -16288,15 +16182,6 @@
                         </a:rPr>
                         <a:t>整理全阶段需求与开发白皮书，进行多平台边界测试，建立覆盖核心算法的测试用例集。</a:t>
                       </a:r>
-                      <a:endParaRPr lang="en-US" sz="1125" b="0" i="0" u="none" strike="noStrike" cap="none">
-                        <a:solidFill>
-                          <a:srgbClr val="0F172A"/>
-                        </a:solidFill>
-                        <a:latin typeface="Inter" panose="02000503000000020004"/>
-                        <a:ea typeface="Inter" panose="02000503000000020004"/>
-                        <a:cs typeface="Inter" panose="02000503000000020004"/>
-                        <a:sym typeface="Inter" panose="02000503000000020004"/>
-                      </a:endParaRPr>
                     </a:p>
                   </a:txBody>
                   <a:tcPr marL="63500" marR="63500" marT="25400" marB="25400" anchor="ctr">
@@ -16372,15 +16257,6 @@
                         </a:rPr>
                         <a:t>已完成</a:t>
                       </a:r>
-                      <a:endParaRPr lang="en-US" sz="1125" b="0" i="0" u="none" strike="noStrike" cap="none">
-                        <a:solidFill>
-                          <a:srgbClr val="0F172A"/>
-                        </a:solidFill>
-                        <a:latin typeface="Inter" panose="02000503000000020004"/>
-                        <a:ea typeface="Inter" panose="02000503000000020004"/>
-                        <a:cs typeface="Inter" panose="02000503000000020004"/>
-                        <a:sym typeface="Inter" panose="02000503000000020004"/>
-                      </a:endParaRPr>
                     </a:p>
                   </a:txBody>
                   <a:tcPr marL="63500" marR="63500" marT="25400" marB="25400" anchor="ctr">
@@ -16430,6 +16306,11 @@
                     </a:lnB>
                   </a:tcPr>
                 </a:tc>
+                <a:extLst>
+                  <a:ext uri="{0D108BD9-81ED-4DB2-BD59-A6C34878D82A}">
+                    <a16:rowId xmlns:a16="http://schemas.microsoft.com/office/drawing/2014/main" val="10003"/>
+                  </a:ext>
+                </a:extLst>
               </a:tr>
               <a:tr h="672475">
                 <a:tc>
@@ -16458,15 +16339,6 @@
                         </a:rPr>
                         <a:t>游云</a:t>
                       </a:r>
-                      <a:endParaRPr lang="en-US" sz="1125" b="1" i="0" u="none" strike="noStrike" cap="none">
-                        <a:solidFill>
-                          <a:srgbClr val="0F172A"/>
-                        </a:solidFill>
-                        <a:latin typeface="Inter" panose="02000503000000020004"/>
-                        <a:ea typeface="Inter" panose="02000503000000020004"/>
-                        <a:cs typeface="Inter" panose="02000503000000020004"/>
-                        <a:sym typeface="Inter" panose="02000503000000020004"/>
-                      </a:endParaRPr>
                     </a:p>
                   </a:txBody>
                   <a:tcPr marL="63500" marR="63500" marT="25400" marB="25400" anchor="ctr">
@@ -16542,15 +16414,6 @@
                         </a:rPr>
                         <a:t>美术资产 / 地图与剧情</a:t>
                       </a:r>
-                      <a:endParaRPr lang="en-US" sz="1125" b="0" i="0" u="none" strike="noStrike" cap="none">
-                        <a:solidFill>
-                          <a:srgbClr val="0F172A"/>
-                        </a:solidFill>
-                        <a:latin typeface="Inter" panose="02000503000000020004"/>
-                        <a:ea typeface="Inter" panose="02000503000000020004"/>
-                        <a:cs typeface="Inter" panose="02000503000000020004"/>
-                        <a:sym typeface="Inter" panose="02000503000000020004"/>
-                      </a:endParaRPr>
                     </a:p>
                   </a:txBody>
                   <a:tcPr marL="63500" marR="63500" marT="25400" marB="25400" anchor="ctr">
@@ -16626,15 +16489,6 @@
                         </a:rPr>
                         <a:t>完成 2D JSON 格式地图的手工绘制，编写并注入全部校园剧情任务与黑市剧本事件。</a:t>
                       </a:r>
-                      <a:endParaRPr lang="en-US" sz="1125" b="0" i="0" u="none" strike="noStrike" cap="none">
-                        <a:solidFill>
-                          <a:srgbClr val="0F172A"/>
-                        </a:solidFill>
-                        <a:latin typeface="Inter" panose="02000503000000020004"/>
-                        <a:ea typeface="Inter" panose="02000503000000020004"/>
-                        <a:cs typeface="Inter" panose="02000503000000020004"/>
-                        <a:sym typeface="Inter" panose="02000503000000020004"/>
-                      </a:endParaRPr>
                     </a:p>
                   </a:txBody>
                   <a:tcPr marL="63500" marR="63500" marT="25400" marB="25400" anchor="ctr">
@@ -16710,15 +16564,6 @@
                         </a:rPr>
                         <a:t>已完成</a:t>
                       </a:r>
-                      <a:endParaRPr lang="en-US" sz="1125" b="0" i="0" u="none" strike="noStrike" cap="none">
-                        <a:solidFill>
-                          <a:srgbClr val="0F172A"/>
-                        </a:solidFill>
-                        <a:latin typeface="Inter" panose="02000503000000020004"/>
-                        <a:ea typeface="Inter" panose="02000503000000020004"/>
-                        <a:cs typeface="Inter" panose="02000503000000020004"/>
-                        <a:sym typeface="Inter" panose="02000503000000020004"/>
-                      </a:endParaRPr>
                     </a:p>
                   </a:txBody>
                   <a:tcPr marL="63500" marR="63500" marT="25400" marB="25400" anchor="ctr">
@@ -16768,6 +16613,11 @@
                     </a:lnB>
                   </a:tcPr>
                 </a:tc>
+                <a:extLst>
+                  <a:ext uri="{0D108BD9-81ED-4DB2-BD59-A6C34878D82A}">
+                    <a16:rowId xmlns:a16="http://schemas.microsoft.com/office/drawing/2014/main" val="10004"/>
+                  </a:ext>
+                </a:extLst>
               </a:tr>
             </a:tbl>
           </a:graphicData>
@@ -17581,7 +17431,7 @@
           <p:nvPr/>
         </p:nvPicPr>
         <p:blipFill rotWithShape="1">
-          <a:blip r:embed="rId1"/>
+          <a:blip r:embed="rId3"/>
           <a:srcRect/>
           <a:stretch>
             <a:fillRect/>
@@ -17608,7 +17458,7 @@
           <p:nvPr/>
         </p:nvPicPr>
         <p:blipFill rotWithShape="1">
-          <a:blip r:embed="rId2"/>
+          <a:blip r:embed="rId4"/>
           <a:srcRect/>
           <a:stretch>
             <a:fillRect/>
@@ -17635,7 +17485,7 @@
           <p:nvPr/>
         </p:nvPicPr>
         <p:blipFill rotWithShape="1">
-          <a:blip r:embed="rId3"/>
+          <a:blip r:embed="rId5"/>
           <a:srcRect/>
           <a:stretch>
             <a:fillRect/>
@@ -17704,15 +17554,6 @@
               </a:rPr>
               <a:t>总结与未来展望</a:t>
             </a:r>
-            <a:endParaRPr lang="en-US" sz="2850" b="1" i="0" u="none" strike="noStrike" cap="none">
-              <a:solidFill>
-                <a:srgbClr val="1E40AF"/>
-              </a:solidFill>
-              <a:latin typeface="Inter" panose="02000503000000020004"/>
-              <a:ea typeface="Inter" panose="02000503000000020004"/>
-              <a:cs typeface="Inter" panose="02000503000000020004"/>
-              <a:sym typeface="Inter" panose="02000503000000020004"/>
-            </a:endParaRPr>
           </a:p>
         </p:txBody>
       </p:sp>
@@ -17810,15 +17651,6 @@
               </a:rPr>
               <a:t>CONCLUSIONS &amp; PROJECT ROADMAP</a:t>
             </a:r>
-            <a:endParaRPr lang="en-US" sz="1350" b="0" i="0" u="none" strike="noStrike" cap="none">
-              <a:solidFill>
-                <a:srgbClr val="0891B2"/>
-              </a:solidFill>
-              <a:latin typeface="JetBrains Mono Medium" panose="02000009000000000000"/>
-              <a:ea typeface="JetBrains Mono Medium" panose="02000009000000000000"/>
-              <a:cs typeface="JetBrains Mono Medium" panose="02000009000000000000"/>
-              <a:sym typeface="JetBrains Mono Medium" panose="02000009000000000000"/>
-            </a:endParaRPr>
           </a:p>
         </p:txBody>
       </p:sp>
@@ -17868,15 +17700,6 @@
               </a:rPr>
               <a:t>课设攻坚总结</a:t>
             </a:r>
-            <a:endParaRPr lang="en-US" sz="1800" b="1" i="0" u="none" strike="noStrike" cap="none">
-              <a:solidFill>
-                <a:srgbClr val="1E40AF"/>
-              </a:solidFill>
-              <a:latin typeface="Inter" panose="02000503000000020004"/>
-              <a:ea typeface="Inter" panose="02000503000000020004"/>
-              <a:cs typeface="Inter" panose="02000503000000020004"/>
-              <a:sym typeface="Inter" panose="02000503000000020004"/>
-            </a:endParaRPr>
           </a:p>
         </p:txBody>
       </p:sp>
@@ -18063,15 +17886,6 @@
               </a:rPr>
               <a:t>下一阶段优化蓝图</a:t>
             </a:r>
-            <a:endParaRPr lang="en-US" sz="1800" b="1" i="0" u="none" strike="noStrike" cap="none">
-              <a:solidFill>
-                <a:srgbClr val="1E40AF"/>
-              </a:solidFill>
-              <a:latin typeface="Inter" panose="02000503000000020004"/>
-              <a:ea typeface="Inter" panose="02000503000000020004"/>
-              <a:cs typeface="Inter" panose="02000503000000020004"/>
-              <a:sym typeface="Inter" panose="02000503000000020004"/>
-            </a:endParaRPr>
           </a:p>
         </p:txBody>
       </p:sp>
@@ -18278,7 +18092,7 @@
           <p:nvPr/>
         </p:nvPicPr>
         <p:blipFill rotWithShape="1">
-          <a:blip r:embed="rId4"/>
+          <a:blip r:embed="rId6"/>
           <a:srcRect/>
           <a:stretch>
             <a:fillRect/>
@@ -18305,7 +18119,7 @@
           <p:nvPr/>
         </p:nvPicPr>
         <p:blipFill rotWithShape="1">
-          <a:blip r:embed="rId5"/>
+          <a:blip r:embed="rId7"/>
           <a:srcRect/>
           <a:stretch>
             <a:fillRect/>
@@ -18365,7 +18179,7 @@
           <p:nvPr/>
         </p:nvPicPr>
         <p:blipFill rotWithShape="1">
-          <a:blip r:embed="rId1"/>
+          <a:blip r:embed="rId3"/>
           <a:srcRect/>
           <a:stretch>
             <a:fillRect/>
@@ -18392,7 +18206,7 @@
           <p:nvPr/>
         </p:nvPicPr>
         <p:blipFill rotWithShape="1">
-          <a:blip r:embed="rId2"/>
+          <a:blip r:embed="rId4"/>
           <a:srcRect/>
           <a:stretch>
             <a:fillRect/>
@@ -18458,15 +18272,6 @@
               </a:rPr>
               <a:t>感谢聆听，请多指教</a:t>
             </a:r>
-            <a:endParaRPr lang="en-US" sz="4800" b="1" i="0" u="none" strike="noStrike" cap="none">
-              <a:solidFill>
-                <a:srgbClr val="1E40AF"/>
-              </a:solidFill>
-              <a:latin typeface="Comfortaa"/>
-              <a:ea typeface="Comfortaa"/>
-              <a:cs typeface="Comfortaa"/>
-              <a:sym typeface="Comfortaa"/>
-            </a:endParaRPr>
           </a:p>
         </p:txBody>
       </p:sp>
@@ -18516,15 +18321,6 @@
               </a:rPr>
               <a:t>Q &amp; A T H A N K Y O U</a:t>
             </a:r>
-            <a:endParaRPr lang="en-US" sz="1650" b="0" i="0" u="none" strike="noStrike" cap="none">
-              <a:solidFill>
-                <a:srgbClr val="0891B2"/>
-              </a:solidFill>
-              <a:latin typeface="Inter Medium" panose="02000503000000020004"/>
-              <a:ea typeface="Inter Medium" panose="02000503000000020004"/>
-              <a:cs typeface="Inter Medium" panose="02000503000000020004"/>
-              <a:sym typeface="Inter Medium" panose="02000503000000020004"/>
-            </a:endParaRPr>
           </a:p>
         </p:txBody>
       </p:sp>
@@ -18566,7 +18362,7 @@
               <a:buNone/>
             </a:pPr>
             <a:r>
-              <a:rPr lang="en-US" b="0" i="0" u="none" strike="noStrike" cap="none">
+              <a:rPr lang="en-US" b="0" i="0" u="none" strike="noStrike" cap="none" dirty="0" err="1">
                 <a:solidFill>
                   <a:srgbClr val="475569"/>
                 </a:solidFill>
@@ -18575,10 +18371,22 @@
                 <a:cs typeface="Inter Medium" panose="02000503000000020004"/>
                 <a:sym typeface="Inter Medium" panose="02000503000000020004"/>
               </a:rPr>
-              <a:t>衷心感谢各位评委老师百忙之中的聆听与蒋敏老师的精心指导！</a:t>
+              <a:t>衷心感谢各位评委老师百忙之中的聆听与蒋敏老师的精心指导</a:t>
+            </a:r>
+            <a:r>
+              <a:rPr lang="en-US" b="0" i="0" u="none" strike="noStrike" cap="none" dirty="0">
+                <a:solidFill>
+                  <a:srgbClr val="475569"/>
+                </a:solidFill>
+                <a:latin typeface="Inter Medium" panose="02000503000000020004"/>
+                <a:ea typeface="Inter Medium" panose="02000503000000020004"/>
+                <a:cs typeface="Inter Medium" panose="02000503000000020004"/>
+                <a:sym typeface="Inter Medium" panose="02000503000000020004"/>
+              </a:rPr>
+              <a:t>！</a:t>
             </a:r>
             <a:br>
-              <a:rPr lang="en-US" b="0" i="0" u="none" strike="noStrike" cap="none">
+              <a:rPr lang="en-US" b="0" i="0" u="none" strike="noStrike" cap="none" dirty="0">
                 <a:solidFill>
                   <a:schemeClr val="dk1"/>
                 </a:solidFill>
@@ -18589,7 +18397,7 @@
               </a:rPr>
             </a:br>
             <a:r>
-              <a:rPr lang="en-US" b="0" i="0" u="none" strike="noStrike" cap="none">
+              <a:rPr lang="en-US" b="0" i="0" u="none" strike="noStrike" cap="none" dirty="0">
                 <a:solidFill>
                   <a:srgbClr val="475569"/>
                 </a:solidFill>
@@ -18598,17 +18406,32 @@
                 <a:cs typeface="Inter Medium" panose="02000503000000020004"/>
                 <a:sym typeface="Inter Medium" panose="02000503000000020004"/>
               </a:rPr>
-              <a:t> 诚挚欢迎各位老师对我们项目不完善之处提出批评、指正与宝贵提问。</a:t>
-            </a:r>
-            <a:endParaRPr lang="en-US" b="0" i="0" u="none" strike="noStrike" cap="none">
-              <a:solidFill>
-                <a:srgbClr val="475569"/>
-              </a:solidFill>
-              <a:latin typeface="Inter Medium" panose="02000503000000020004"/>
-              <a:ea typeface="Inter Medium" panose="02000503000000020004"/>
-              <a:cs typeface="Inter Medium" panose="02000503000000020004"/>
-              <a:sym typeface="Inter Medium" panose="02000503000000020004"/>
-            </a:endParaRPr>
+              <a:t> </a:t>
+            </a:r>
+            <a:r>
+              <a:rPr lang="en-US" b="0" i="0" u="none" strike="noStrike" cap="none" dirty="0" err="1">
+                <a:solidFill>
+                  <a:srgbClr val="475569"/>
+                </a:solidFill>
+                <a:latin typeface="Inter Medium" panose="02000503000000020004"/>
+                <a:ea typeface="Inter Medium" panose="02000503000000020004"/>
+                <a:cs typeface="Inter Medium" panose="02000503000000020004"/>
+                <a:sym typeface="Inter Medium" panose="02000503000000020004"/>
+              </a:rPr>
+              <a:t>诚挚欢迎各位老师对我们项目不完善之处提出批评、指正与宝贵提问</a:t>
+            </a:r>
+            <a:r>
+              <a:rPr lang="en-US" b="0" i="0" u="none" strike="noStrike" cap="none" dirty="0">
+                <a:solidFill>
+                  <a:srgbClr val="475569"/>
+                </a:solidFill>
+                <a:latin typeface="Inter Medium" panose="02000503000000020004"/>
+                <a:ea typeface="Inter Medium" panose="02000503000000020004"/>
+                <a:cs typeface="Inter Medium" panose="02000503000000020004"/>
+                <a:sym typeface="Inter Medium" panose="02000503000000020004"/>
+              </a:rPr>
+              <a:t>。</a:t>
+            </a:r>
           </a:p>
         </p:txBody>
       </p:sp>
@@ -18658,15 +18481,6 @@
               </a:rPr>
               <a:t>《校园RPG：大学生存物语》项目开发组 2026年7月</a:t>
             </a:r>
-            <a:endParaRPr lang="en-US" b="0" i="0" u="none" strike="noStrike" cap="none">
-              <a:solidFill>
-                <a:srgbClr val="475569"/>
-              </a:solidFill>
-              <a:latin typeface="Inter" panose="02000503000000020004"/>
-              <a:ea typeface="Inter" panose="02000503000000020004"/>
-              <a:cs typeface="Inter" panose="02000503000000020004"/>
-              <a:sym typeface="Inter" panose="02000503000000020004"/>
-            </a:endParaRPr>
           </a:p>
         </p:txBody>
       </p:sp>
@@ -18705,43 +18519,16 @@
       </p:grpSpPr>
       <p:pic>
         <p:nvPicPr>
-          <p:cNvPr id="96" name="Google Shape;96;p14" descr="image.png"/>
-          <p:cNvPicPr preferRelativeResize="0"/>
-          <p:nvPr/>
-        </p:nvPicPr>
-        <p:blipFill rotWithShape="1">
-          <a:blip r:embed="rId1"/>
-          <a:srcRect/>
-          <a:stretch>
-            <a:fillRect/>
-          </a:stretch>
-        </p:blipFill>
-        <p:spPr>
-          <a:xfrm>
-            <a:off x="0" y="0"/>
-            <a:ext cx="12192000" cy="6858000"/>
-          </a:xfrm>
-          <a:prstGeom prst="rect">
-            <a:avLst/>
-          </a:prstGeom>
-          <a:noFill/>
-          <a:ln>
-            <a:noFill/>
-          </a:ln>
-        </p:spPr>
-      </p:pic>
-      <p:pic>
-        <p:nvPicPr>
           <p:cNvPr id="97" name="Google Shape;97;p14" descr="image.png"/>
           <p:cNvPicPr preferRelativeResize="0"/>
           <p:nvPr>
             <p:custDataLst>
-              <p:tags r:id="rId2"/>
+              <p:tags r:id="rId1"/>
             </p:custDataLst>
           </p:nvPr>
         </p:nvPicPr>
         <p:blipFill rotWithShape="1">
-          <a:blip r:embed="rId3"/>
+          <a:blip r:embed="rId11"/>
           <a:srcRect/>
           <a:stretch>
             <a:fillRect/>
@@ -18767,12 +18554,12 @@
           <p:cNvPicPr preferRelativeResize="0"/>
           <p:nvPr>
             <p:custDataLst>
-              <p:tags r:id="rId4"/>
+              <p:tags r:id="rId2"/>
             </p:custDataLst>
           </p:nvPr>
         </p:nvPicPr>
         <p:blipFill rotWithShape="1">
-          <a:blip r:embed="rId5"/>
+          <a:blip r:embed="rId12"/>
           <a:srcRect/>
           <a:stretch>
             <a:fillRect/>
@@ -18841,15 +18628,6 @@
               </a:rPr>
               <a:t>项目初衷与重构蜕变</a:t>
             </a:r>
-            <a:endParaRPr lang="en-US" sz="2850" b="1" i="0" u="none" strike="noStrike" cap="none">
-              <a:solidFill>
-                <a:srgbClr val="1E40AF"/>
-              </a:solidFill>
-              <a:latin typeface="Inter" panose="02000503000000020004"/>
-              <a:ea typeface="Inter" panose="02000503000000020004"/>
-              <a:cs typeface="Inter" panose="02000503000000020004"/>
-              <a:sym typeface="Inter" panose="02000503000000020004"/>
-            </a:endParaRPr>
           </a:p>
         </p:txBody>
       </p:sp>
@@ -18947,15 +18725,6 @@
               </a:rPr>
               <a:t>FROM CONSOLE TO MODERN GRAPHICS GUI</a:t>
             </a:r>
-            <a:endParaRPr lang="en-US" sz="1350" b="0" i="0" u="none" strike="noStrike" cap="none">
-              <a:solidFill>
-                <a:srgbClr val="0891B2"/>
-              </a:solidFill>
-              <a:latin typeface="JetBrains Mono Medium" panose="02000009000000000000"/>
-              <a:ea typeface="JetBrains Mono Medium" panose="02000009000000000000"/>
-              <a:cs typeface="JetBrains Mono Medium" panose="02000009000000000000"/>
-              <a:sym typeface="JetBrains Mono Medium" panose="02000009000000000000"/>
-            </a:endParaRPr>
           </a:p>
         </p:txBody>
       </p:sp>
@@ -18965,7 +18734,7 @@
           <p:cNvSpPr txBox="1"/>
           <p:nvPr>
             <p:custDataLst>
-              <p:tags r:id="rId6"/>
+              <p:tags r:id="rId3"/>
             </p:custDataLst>
           </p:nvPr>
         </p:nvSpPr>
@@ -19009,15 +18778,6 @@
               </a:rPr>
               <a:t>项目背景与题材</a:t>
             </a:r>
-            <a:endParaRPr lang="en-US" sz="1800" b="1" i="0" u="none" strike="noStrike" cap="none">
-              <a:solidFill>
-                <a:srgbClr val="1E40AF"/>
-              </a:solidFill>
-              <a:latin typeface="Inter" panose="02000503000000020004"/>
-              <a:ea typeface="Inter" panose="02000503000000020004"/>
-              <a:cs typeface="Inter" panose="02000503000000020004"/>
-              <a:sym typeface="Inter" panose="02000503000000020004"/>
-            </a:endParaRPr>
           </a:p>
         </p:txBody>
       </p:sp>
@@ -19027,7 +18787,7 @@
           <p:cNvSpPr txBox="1"/>
           <p:nvPr>
             <p:custDataLst>
-              <p:tags r:id="rId7"/>
+              <p:tags r:id="rId4"/>
             </p:custDataLst>
           </p:nvPr>
         </p:nvSpPr>
@@ -19096,7 +18856,7 @@
           <p:cNvSpPr txBox="1"/>
           <p:nvPr>
             <p:custDataLst>
-              <p:tags r:id="rId8"/>
+              <p:tags r:id="rId5"/>
             </p:custDataLst>
           </p:nvPr>
         </p:nvSpPr>
@@ -19140,15 +18900,6 @@
               </a:rPr>
               <a:t>图形重构与跃迁</a:t>
             </a:r>
-            <a:endParaRPr lang="en-US" sz="1800" b="1" i="0" u="none" strike="noStrike" cap="none">
-              <a:solidFill>
-                <a:srgbClr val="1E40AF"/>
-              </a:solidFill>
-              <a:latin typeface="Inter" panose="02000503000000020004"/>
-              <a:ea typeface="Inter" panose="02000503000000020004"/>
-              <a:cs typeface="Inter" panose="02000503000000020004"/>
-              <a:sym typeface="Inter" panose="02000503000000020004"/>
-            </a:endParaRPr>
           </a:p>
         </p:txBody>
       </p:sp>
@@ -19158,7 +18909,7 @@
           <p:cNvSpPr txBox="1"/>
           <p:nvPr>
             <p:custDataLst>
-              <p:tags r:id="rId9"/>
+              <p:tags r:id="rId6"/>
             </p:custDataLst>
           </p:nvPr>
         </p:nvSpPr>
@@ -19323,12 +19074,12 @@
           <p:cNvPicPr preferRelativeResize="0"/>
           <p:nvPr>
             <p:custDataLst>
-              <p:tags r:id="rId10"/>
+              <p:tags r:id="rId7"/>
             </p:custDataLst>
           </p:nvPr>
         </p:nvPicPr>
         <p:blipFill rotWithShape="1">
-          <a:blip r:embed="rId11"/>
+          <a:blip r:embed="rId13"/>
           <a:srcRect/>
           <a:stretch>
             <a:fillRect/>
@@ -19354,12 +19105,12 @@
           <p:cNvPicPr preferRelativeResize="0"/>
           <p:nvPr>
             <p:custDataLst>
-              <p:tags r:id="rId12"/>
+              <p:tags r:id="rId8"/>
             </p:custDataLst>
           </p:nvPr>
         </p:nvPicPr>
         <p:blipFill rotWithShape="1">
-          <a:blip r:embed="rId13"/>
+          <a:blip r:embed="rId14"/>
           <a:srcRect/>
           <a:stretch>
             <a:fillRect/>
@@ -19412,33 +19163,6 @@
           <a:chExt cx="0" cy="0"/>
         </a:xfrm>
       </p:grpSpPr>
-      <p:pic>
-        <p:nvPicPr>
-          <p:cNvPr id="112" name="Google Shape;112;p15" descr="image.png"/>
-          <p:cNvPicPr preferRelativeResize="0"/>
-          <p:nvPr/>
-        </p:nvPicPr>
-        <p:blipFill rotWithShape="1">
-          <a:blip r:embed="rId1"/>
-          <a:srcRect/>
-          <a:stretch>
-            <a:fillRect/>
-          </a:stretch>
-        </p:blipFill>
-        <p:spPr>
-          <a:xfrm>
-            <a:off x="0" y="246489"/>
-            <a:ext cx="12192000" cy="6858000"/>
-          </a:xfrm>
-          <a:prstGeom prst="rect">
-            <a:avLst/>
-          </a:prstGeom>
-          <a:noFill/>
-          <a:ln>
-            <a:noFill/>
-          </a:ln>
-        </p:spPr>
-      </p:pic>
       <p:sp>
         <p:nvSpPr>
           <p:cNvPr id="114" name="Google Shape;114;p15"/>
@@ -19447,7 +19171,7 @@
         </p:nvSpPr>
         <p:spPr>
           <a:xfrm>
-            <a:off x="714375" y="476250"/>
+            <a:off x="740569" y="431468"/>
             <a:ext cx="11451431" cy="434280"/>
           </a:xfrm>
           <a:prstGeom prst="rect">
@@ -19477,7 +19201,7 @@
               <a:buNone/>
             </a:pPr>
             <a:r>
-              <a:rPr lang="en-US" sz="2850" b="1" i="0" u="none" strike="noStrike" cap="none">
+              <a:rPr lang="en-US" sz="2850" b="1" i="0" u="none" strike="noStrike" cap="none" dirty="0" err="1">
                 <a:solidFill>
                   <a:srgbClr val="1E40AF"/>
                 </a:solidFill>
@@ -19488,7 +19212,7 @@
               </a:rPr>
               <a:t>游戏特色与核心玩法</a:t>
             </a:r>
-            <a:endParaRPr lang="en-US" sz="2850" b="1" i="0" u="none" strike="noStrike" cap="none">
+            <a:endParaRPr lang="en-US" sz="2850" b="1" i="0" u="none" strike="noStrike" cap="none" dirty="0">
               <a:solidFill>
                 <a:srgbClr val="1E40AF"/>
               </a:solidFill>
@@ -19594,15 +19318,6 @@
               </a:rPr>
               <a:t>IMMERSIVE CAMPUS EXPLORATION GAMEPLAY</a:t>
             </a:r>
-            <a:endParaRPr lang="en-US" sz="1350" b="0" i="0" u="none" strike="noStrike" cap="none">
-              <a:solidFill>
-                <a:srgbClr val="0891B2"/>
-              </a:solidFill>
-              <a:latin typeface="JetBrains Mono Medium" panose="02000009000000000000"/>
-              <a:ea typeface="JetBrains Mono Medium" panose="02000009000000000000"/>
-              <a:cs typeface="JetBrains Mono Medium" panose="02000009000000000000"/>
-              <a:sym typeface="JetBrains Mono Medium" panose="02000009000000000000"/>
-            </a:endParaRPr>
           </a:p>
         </p:txBody>
       </p:sp>
@@ -19614,8 +19329,8 @@
         </p:nvSpPr>
         <p:spPr>
           <a:xfrm>
-            <a:off x="1222375" y="1390620"/>
-            <a:ext cx="5485507" cy="1246505"/>
+            <a:off x="1135289" y="1451550"/>
+            <a:ext cx="3991882" cy="1661993"/>
           </a:xfrm>
           <a:prstGeom prst="rect">
             <a:avLst/>
@@ -19763,8 +19478,8 @@
         </p:nvSpPr>
         <p:spPr>
           <a:xfrm>
-            <a:off x="1222375" y="2840960"/>
-            <a:ext cx="5485507" cy="830580"/>
+            <a:off x="6468397" y="1483945"/>
+            <a:ext cx="3741511" cy="1246495"/>
           </a:xfrm>
           <a:prstGeom prst="rect">
             <a:avLst/>
@@ -19888,8 +19603,8 @@
         </p:nvSpPr>
         <p:spPr>
           <a:xfrm>
-            <a:off x="1222375" y="3820765"/>
-            <a:ext cx="5485507" cy="830580"/>
+            <a:off x="1135289" y="3649557"/>
+            <a:ext cx="3991882" cy="1246495"/>
           </a:xfrm>
           <a:prstGeom prst="rect">
             <a:avLst/>
@@ -19963,7 +19678,7 @@
                 <a:cs typeface="Inter" panose="02000503000000020004"/>
                 <a:sym typeface="Inter" panose="02000503000000020004"/>
               </a:rPr>
-              <a:t>暗影黑市</a:t>
+              <a:t>黑市</a:t>
             </a:r>
             <a:r>
               <a:rPr lang="en-US" sz="1800" b="0" i="0" u="none" strike="noStrike" cap="none" dirty="0">
@@ -20013,8 +19728,8 @@
         </p:nvSpPr>
         <p:spPr>
           <a:xfrm>
-            <a:off x="1222375" y="4916140"/>
-            <a:ext cx="5485507" cy="830580"/>
+            <a:off x="6466284" y="3649557"/>
+            <a:ext cx="3980996" cy="1246495"/>
           </a:xfrm>
           <a:prstGeom prst="rect">
             <a:avLst/>
@@ -20106,87 +19821,6 @@
           </a:p>
         </p:txBody>
       </p:sp>
-      <p:pic>
-        <p:nvPicPr>
-          <p:cNvPr id="122" name="Google Shape;122;p15" descr="image.png"/>
-          <p:cNvPicPr preferRelativeResize="0"/>
-          <p:nvPr/>
-        </p:nvPicPr>
-        <p:blipFill rotWithShape="1">
-          <a:blip r:embed="rId2"/>
-          <a:srcRect/>
-          <a:stretch>
-            <a:fillRect/>
-          </a:stretch>
-        </p:blipFill>
-        <p:spPr>
-          <a:xfrm>
-            <a:off x="571500" y="1473200"/>
-            <a:ext cx="396875" cy="263525"/>
-          </a:xfrm>
-          <a:prstGeom prst="rect">
-            <a:avLst/>
-          </a:prstGeom>
-          <a:noFill/>
-          <a:ln>
-            <a:noFill/>
-          </a:ln>
-        </p:spPr>
-      </p:pic>
-      <p:pic>
-        <p:nvPicPr>
-          <p:cNvPr id="123" name="Google Shape;123;p15" descr="image.png"/>
-          <p:cNvPicPr preferRelativeResize="0"/>
-          <p:nvPr/>
-        </p:nvPicPr>
-        <p:blipFill rotWithShape="1">
-          <a:blip r:embed="rId3"/>
-          <a:srcRect/>
-          <a:stretch>
-            <a:fillRect/>
-          </a:stretch>
-        </p:blipFill>
-        <p:spPr>
-          <a:xfrm>
-            <a:off x="619125" y="3009265"/>
-            <a:ext cx="349250" cy="288925"/>
-          </a:xfrm>
-          <a:prstGeom prst="rect">
-            <a:avLst/>
-          </a:prstGeom>
-          <a:noFill/>
-          <a:ln>
-            <a:noFill/>
-          </a:ln>
-        </p:spPr>
-      </p:pic>
-      <p:pic>
-        <p:nvPicPr>
-          <p:cNvPr id="124" name="Google Shape;124;p15" descr="image.png"/>
-          <p:cNvPicPr preferRelativeResize="0"/>
-          <p:nvPr/>
-        </p:nvPicPr>
-        <p:blipFill rotWithShape="1">
-          <a:blip r:embed="rId4"/>
-          <a:srcRect/>
-          <a:stretch>
-            <a:fillRect/>
-          </a:stretch>
-        </p:blipFill>
-        <p:spPr>
-          <a:xfrm>
-            <a:off x="571500" y="3939540"/>
-            <a:ext cx="397510" cy="307975"/>
-          </a:xfrm>
-          <a:prstGeom prst="rect">
-            <a:avLst/>
-          </a:prstGeom>
-          <a:noFill/>
-          <a:ln>
-            <a:noFill/>
-          </a:ln>
-        </p:spPr>
-      </p:pic>
     </p:spTree>
   </p:cSld>
   <p:clrMapOvr>
@@ -20231,7 +19865,7 @@
           </p:nvPr>
         </p:nvPicPr>
         <p:blipFill rotWithShape="1">
-          <a:blip r:embed="rId2"/>
+          <a:blip r:embed="rId14"/>
           <a:srcRect/>
           <a:stretch>
             <a:fillRect/>
@@ -20257,12 +19891,12 @@
           <p:cNvPicPr preferRelativeResize="0"/>
           <p:nvPr>
             <p:custDataLst>
-              <p:tags r:id="rId3"/>
+              <p:tags r:id="rId2"/>
             </p:custDataLst>
           </p:nvPr>
         </p:nvPicPr>
         <p:blipFill rotWithShape="1">
-          <a:blip r:embed="rId4"/>
+          <a:blip r:embed="rId15"/>
           <a:srcRect/>
           <a:stretch>
             <a:fillRect/>
@@ -20288,12 +19922,12 @@
           <p:cNvPicPr preferRelativeResize="0"/>
           <p:nvPr>
             <p:custDataLst>
-              <p:tags r:id="rId5"/>
+              <p:tags r:id="rId3"/>
             </p:custDataLst>
           </p:nvPr>
         </p:nvPicPr>
         <p:blipFill rotWithShape="1">
-          <a:blip r:embed="rId6"/>
+          <a:blip r:embed="rId16"/>
           <a:srcRect/>
           <a:stretch>
             <a:fillRect/>
@@ -20362,15 +19996,6 @@
               </a:rPr>
               <a:t>MVC 彻底解耦的底层架构</a:t>
             </a:r>
-            <a:endParaRPr lang="en-US" sz="2850" b="1" i="0" u="none" strike="noStrike" cap="none">
-              <a:solidFill>
-                <a:srgbClr val="1E40AF"/>
-              </a:solidFill>
-              <a:latin typeface="Inter" panose="02000503000000020004"/>
-              <a:ea typeface="Inter" panose="02000503000000020004"/>
-              <a:cs typeface="Inter" panose="02000503000000020004"/>
-              <a:sym typeface="Inter" panose="02000503000000020004"/>
-            </a:endParaRPr>
           </a:p>
         </p:txBody>
       </p:sp>
@@ -20468,15 +20093,6 @@
               </a:rPr>
               <a:t>ARCHITECTURE: DECOUPLING MODEL, VIEW AND CONTROLLER</a:t>
             </a:r>
-            <a:endParaRPr lang="en-US" sz="1350" b="0" i="0" u="none" strike="noStrike" cap="none">
-              <a:solidFill>
-                <a:srgbClr val="0891B2"/>
-              </a:solidFill>
-              <a:latin typeface="JetBrains Mono Medium" panose="02000009000000000000"/>
-              <a:ea typeface="JetBrains Mono Medium" panose="02000009000000000000"/>
-              <a:cs typeface="JetBrains Mono Medium" panose="02000009000000000000"/>
-              <a:sym typeface="JetBrains Mono Medium" panose="02000009000000000000"/>
-            </a:endParaRPr>
           </a:p>
         </p:txBody>
       </p:sp>
@@ -20534,7 +20150,7 @@
           <p:cNvSpPr txBox="1"/>
           <p:nvPr>
             <p:custDataLst>
-              <p:tags r:id="rId7"/>
+              <p:tags r:id="rId4"/>
             </p:custDataLst>
           </p:nvPr>
         </p:nvSpPr>
@@ -20578,15 +20194,6 @@
               </a:rPr>
               <a:t>Model (数据模型层)</a:t>
             </a:r>
-            <a:endParaRPr lang="en-US" sz="1500" b="1" i="0" u="none" strike="noStrike" cap="none">
-              <a:solidFill>
-                <a:srgbClr val="1E40AF"/>
-              </a:solidFill>
-              <a:latin typeface="Inter" panose="02000503000000020004"/>
-              <a:ea typeface="Inter" panose="02000503000000020004"/>
-              <a:cs typeface="Inter" panose="02000503000000020004"/>
-              <a:sym typeface="Inter" panose="02000503000000020004"/>
-            </a:endParaRPr>
           </a:p>
         </p:txBody>
       </p:sp>
@@ -20596,7 +20203,7 @@
           <p:cNvSpPr txBox="1"/>
           <p:nvPr>
             <p:custDataLst>
-              <p:tags r:id="rId8"/>
+              <p:tags r:id="rId5"/>
             </p:custDataLst>
           </p:nvPr>
         </p:nvSpPr>
@@ -20809,7 +20416,7 @@
           <p:cNvSpPr txBox="1"/>
           <p:nvPr>
             <p:custDataLst>
-              <p:tags r:id="rId9"/>
+              <p:tags r:id="rId6"/>
             </p:custDataLst>
           </p:nvPr>
         </p:nvSpPr>
@@ -20853,15 +20460,6 @@
               </a:rPr>
               <a:t>View (图形渲染层)</a:t>
             </a:r>
-            <a:endParaRPr lang="en-US" sz="1500" b="1" i="0" u="none" strike="noStrike" cap="none">
-              <a:solidFill>
-                <a:srgbClr val="1E40AF"/>
-              </a:solidFill>
-              <a:latin typeface="Inter" panose="02000503000000020004"/>
-              <a:ea typeface="Inter" panose="02000503000000020004"/>
-              <a:cs typeface="Inter" panose="02000503000000020004"/>
-              <a:sym typeface="Inter" panose="02000503000000020004"/>
-            </a:endParaRPr>
           </a:p>
         </p:txBody>
       </p:sp>
@@ -20871,7 +20469,7 @@
           <p:cNvSpPr txBox="1"/>
           <p:nvPr>
             <p:custDataLst>
-              <p:tags r:id="rId10"/>
+              <p:tags r:id="rId7"/>
             </p:custDataLst>
           </p:nvPr>
         </p:nvSpPr>
@@ -20928,19 +20526,7 @@
                 <a:cs typeface="Inter" panose="02000503000000020004"/>
                 <a:sym typeface="Inter" panose="02000503000000020004"/>
               </a:rPr>
-              <a:t> </a:t>
-            </a:r>
-            <a:r>
-              <a:rPr lang="en-US" sz="1600" b="0" i="0" u="none" strike="noStrike" cap="none" dirty="0">
-                <a:solidFill>
-                  <a:srgbClr val="475569"/>
-                </a:solidFill>
-                <a:latin typeface="Inter" panose="02000503000000020004"/>
-                <a:ea typeface="Inter" panose="02000503000000020004"/>
-                <a:cs typeface="Inter" panose="02000503000000020004"/>
-                <a:sym typeface="Inter" panose="02000503000000020004"/>
-              </a:rPr>
-              <a:t>Qt6 Graphics View </a:t>
+              <a:t> Qt6 Graphics View </a:t>
             </a:r>
             <a:r>
               <a:rPr lang="en-US" sz="1600" b="0" i="0" u="none" strike="noStrike" cap="none" dirty="0" err="1">
@@ -21072,7 +20658,7 @@
           <p:cNvSpPr txBox="1"/>
           <p:nvPr>
             <p:custDataLst>
-              <p:tags r:id="rId11"/>
+              <p:tags r:id="rId8"/>
             </p:custDataLst>
           </p:nvPr>
         </p:nvSpPr>
@@ -21116,15 +20702,6 @@
               </a:rPr>
               <a:t>Controller (控制调度)</a:t>
             </a:r>
-            <a:endParaRPr lang="en-US" sz="1500" b="1" i="0" u="none" strike="noStrike" cap="none">
-              <a:solidFill>
-                <a:srgbClr val="1E40AF"/>
-              </a:solidFill>
-              <a:latin typeface="Inter" panose="02000503000000020004"/>
-              <a:ea typeface="Inter" panose="02000503000000020004"/>
-              <a:cs typeface="Inter" panose="02000503000000020004"/>
-              <a:sym typeface="Inter" panose="02000503000000020004"/>
-            </a:endParaRPr>
           </a:p>
         </p:txBody>
       </p:sp>
@@ -21134,7 +20711,7 @@
           <p:cNvSpPr txBox="1"/>
           <p:nvPr>
             <p:custDataLst>
-              <p:tags r:id="rId12"/>
+              <p:tags r:id="rId9"/>
             </p:custDataLst>
           </p:nvPr>
         </p:nvSpPr>
@@ -21204,7 +20781,7 @@
           <p:nvPr/>
         </p:nvPicPr>
         <p:blipFill rotWithShape="1">
-          <a:blip r:embed="rId13"/>
+          <a:blip r:embed="rId17"/>
           <a:srcRect/>
           <a:stretch>
             <a:fillRect/>
@@ -21259,7 +20836,7 @@
               <a:buNone/>
             </a:pPr>
             <a:r>
-              <a:rPr lang="en-US" sz="2000" b="1" i="0" u="none" strike="noStrike" cap="none">
+              <a:rPr lang="en-US" sz="2000" b="1" i="0" u="none" strike="noStrike" cap="none" dirty="0" err="1">
                 <a:solidFill>
                   <a:srgbClr val="1E40AF"/>
                 </a:solidFill>
@@ -21268,10 +20845,10 @@
                 <a:cs typeface="Inter" panose="02000503000000020004"/>
                 <a:sym typeface="Inter" panose="02000503000000020004"/>
               </a:rPr>
-              <a:t>解耦优势：</a:t>
-            </a:r>
-            <a:r>
-              <a:rPr lang="zh-CN" altLang="en-US" sz="2000" b="1" i="0" u="none" strike="noStrike" cap="none">
+              <a:t>解耦优势</a:t>
+            </a:r>
+            <a:r>
+              <a:rPr lang="en-US" sz="2000" b="1" i="0" u="none" strike="noStrike" cap="none" dirty="0">
                 <a:solidFill>
                   <a:srgbClr val="1E40AF"/>
                 </a:solidFill>
@@ -21280,10 +20857,22 @@
                 <a:cs typeface="Inter" panose="02000503000000020004"/>
                 <a:sym typeface="Inter" panose="02000503000000020004"/>
               </a:rPr>
+              <a:t>：</a:t>
+            </a:r>
+            <a:r>
+              <a:rPr lang="zh-CN" altLang="en-US" sz="2000" b="1" i="0" u="none" strike="noStrike" cap="none" dirty="0">
+                <a:solidFill>
+                  <a:srgbClr val="1E40AF"/>
+                </a:solidFill>
+                <a:latin typeface="Inter" panose="02000503000000020004"/>
+                <a:ea typeface="Inter" panose="02000503000000020004"/>
+                <a:cs typeface="Inter" panose="02000503000000020004"/>
+                <a:sym typeface="Inter" panose="02000503000000020004"/>
+              </a:rPr>
               <a:t>得益于标准的</a:t>
             </a:r>
             <a:r>
-              <a:rPr lang="en-US" altLang="zh-CN" sz="2000" b="1" i="0" u="none" strike="noStrike" cap="none">
+              <a:rPr lang="en-US" altLang="zh-CN" sz="2000" b="1" i="0" u="none" strike="noStrike" cap="none" dirty="0">
                 <a:solidFill>
                   <a:srgbClr val="1E40AF"/>
                 </a:solidFill>
@@ -21295,7 +20884,7 @@
               <a:t>MVC</a:t>
             </a:r>
             <a:r>
-              <a:rPr lang="zh-CN" altLang="en-US" sz="2000" b="1" i="0" u="none" strike="noStrike" cap="none">
+              <a:rPr lang="zh-CN" altLang="en-US" sz="2000" b="1" i="0" u="none" strike="noStrike" cap="none" dirty="0">
                 <a:solidFill>
                   <a:srgbClr val="1E40AF"/>
                 </a:solidFill>
@@ -21307,7 +20896,7 @@
               <a:t>设计模式，核心游戏逻辑可无缝外接</a:t>
             </a:r>
             <a:r>
-              <a:rPr lang="en-US" altLang="zh-CN" sz="2000" b="1" i="0" u="none" strike="noStrike" cap="none">
+              <a:rPr lang="en-US" altLang="zh-CN" sz="2000" b="1" i="0" u="none" strike="noStrike" cap="none" dirty="0">
                 <a:solidFill>
                   <a:srgbClr val="1E40AF"/>
                 </a:solidFill>
@@ -21319,7 +20908,7 @@
               <a:t>“</a:t>
             </a:r>
             <a:r>
-              <a:rPr lang="zh-CN" altLang="en-US" sz="2000" b="1" i="0" u="none" strike="noStrike" cap="none">
+              <a:rPr lang="zh-CN" altLang="en-US" sz="2000" b="1" i="0" u="none" strike="noStrike" cap="none" dirty="0">
                 <a:solidFill>
                   <a:srgbClr val="1E40AF"/>
                 </a:solidFill>
@@ -21331,7 +20920,7 @@
               <a:t>纯控制台文本版</a:t>
             </a:r>
             <a:r>
-              <a:rPr lang="en-US" altLang="zh-CN" sz="2000" b="1" i="0" u="none" strike="noStrike" cap="none">
+              <a:rPr lang="en-US" altLang="zh-CN" sz="2000" b="1" i="0" u="none" strike="noStrike" cap="none" dirty="0">
                 <a:solidFill>
                   <a:srgbClr val="1E40AF"/>
                 </a:solidFill>
@@ -21343,7 +20932,7 @@
               <a:t>”</a:t>
             </a:r>
             <a:r>
-              <a:rPr lang="zh-CN" altLang="en-US" sz="2000" b="1" i="0" u="none" strike="noStrike" cap="none">
+              <a:rPr lang="zh-CN" altLang="en-US" sz="2000" b="1" i="0" u="none" strike="noStrike" cap="none" dirty="0">
                 <a:solidFill>
                   <a:srgbClr val="1E40AF"/>
                 </a:solidFill>
@@ -21355,7 +20944,7 @@
               <a:t>与</a:t>
             </a:r>
             <a:r>
-              <a:rPr lang="en-US" altLang="zh-CN" sz="2000" b="1" i="0" u="none" strike="noStrike" cap="none">
+              <a:rPr lang="en-US" altLang="zh-CN" sz="2000" b="1" i="0" u="none" strike="noStrike" cap="none" dirty="0">
                 <a:solidFill>
                   <a:srgbClr val="1E40AF"/>
                 </a:solidFill>
@@ -21367,7 +20956,7 @@
               <a:t>“</a:t>
             </a:r>
             <a:r>
-              <a:rPr lang="zh-CN" altLang="en-US" sz="2000" b="1" i="0" u="none" strike="noStrike" cap="none">
+              <a:rPr lang="zh-CN" altLang="en-US" sz="2000" b="1" i="0" u="none" strike="noStrike" cap="none" dirty="0">
                 <a:solidFill>
                   <a:srgbClr val="1E40AF"/>
                 </a:solidFill>
@@ -21379,7 +20968,7 @@
               <a:t>现代图形</a:t>
             </a:r>
             <a:r>
-              <a:rPr lang="en-US" altLang="zh-CN" sz="2000" b="1" i="0" u="none" strike="noStrike" cap="none">
+              <a:rPr lang="en-US" altLang="zh-CN" sz="2000" b="1" i="0" u="none" strike="noStrike" cap="none" dirty="0">
                 <a:solidFill>
                   <a:srgbClr val="1E40AF"/>
                 </a:solidFill>
@@ -21391,7 +20980,7 @@
               <a:t>Qt</a:t>
             </a:r>
             <a:r>
-              <a:rPr lang="zh-CN" altLang="en-US" sz="2000" b="1" i="0" u="none" strike="noStrike" cap="none">
+              <a:rPr lang="zh-CN" altLang="en-US" sz="2000" b="1" i="0" u="none" strike="noStrike" cap="none" dirty="0">
                 <a:solidFill>
                   <a:srgbClr val="1E40AF"/>
                 </a:solidFill>
@@ -21403,7 +20992,7 @@
               <a:t>版</a:t>
             </a:r>
             <a:r>
-              <a:rPr lang="en-US" altLang="zh-CN" sz="2000" b="1" i="0" u="none" strike="noStrike" cap="none">
+              <a:rPr lang="en-US" altLang="zh-CN" sz="2000" b="1" i="0" u="none" strike="noStrike" cap="none" dirty="0">
                 <a:solidFill>
                   <a:srgbClr val="1E40AF"/>
                 </a:solidFill>
@@ -21415,7 +21004,7 @@
               <a:t>”</a:t>
             </a:r>
             <a:r>
-              <a:rPr lang="zh-CN" altLang="en-US" sz="2000" b="1" i="0" u="none" strike="noStrike" cap="none">
+              <a:rPr lang="zh-CN" altLang="en-US" sz="2000" b="1" i="0" u="none" strike="noStrike" cap="none" dirty="0">
                 <a:solidFill>
                   <a:srgbClr val="1E40AF"/>
                 </a:solidFill>
@@ -21426,15 +21015,6 @@
               </a:rPr>
               <a:t>双向运行</a:t>
             </a:r>
-            <a:endParaRPr lang="zh-CN" altLang="en-US" sz="2000" b="1" i="0" u="none" strike="noStrike" cap="none">
-              <a:solidFill>
-                <a:srgbClr val="1E40AF"/>
-              </a:solidFill>
-              <a:latin typeface="Inter" panose="02000503000000020004"/>
-              <a:ea typeface="Inter" panose="02000503000000020004"/>
-              <a:cs typeface="Inter" panose="02000503000000020004"/>
-              <a:sym typeface="Inter" panose="02000503000000020004"/>
-            </a:endParaRPr>
           </a:p>
         </p:txBody>
       </p:sp>
@@ -21444,12 +21024,12 @@
           <p:cNvPicPr preferRelativeResize="0"/>
           <p:nvPr>
             <p:custDataLst>
-              <p:tags r:id="rId14"/>
+              <p:tags r:id="rId10"/>
             </p:custDataLst>
           </p:nvPr>
         </p:nvPicPr>
         <p:blipFill rotWithShape="1">
-          <a:blip r:embed="rId15"/>
+          <a:blip r:embed="rId18"/>
           <a:srcRect/>
           <a:stretch>
             <a:fillRect/>
@@ -21475,12 +21055,12 @@
           <p:cNvPicPr preferRelativeResize="0"/>
           <p:nvPr>
             <p:custDataLst>
-              <p:tags r:id="rId16"/>
+              <p:tags r:id="rId11"/>
             </p:custDataLst>
           </p:nvPr>
         </p:nvPicPr>
         <p:blipFill rotWithShape="1">
-          <a:blip r:embed="rId17"/>
+          <a:blip r:embed="rId19"/>
           <a:srcRect/>
           <a:stretch>
             <a:fillRect/>
@@ -21533,33 +21113,6 @@
           <a:chExt cx="0" cy="0"/>
         </a:xfrm>
       </p:grpSpPr>
-      <p:pic>
-        <p:nvPicPr>
-          <p:cNvPr id="153" name="Google Shape;153;p17" descr="image.png"/>
-          <p:cNvPicPr preferRelativeResize="0"/>
-          <p:nvPr/>
-        </p:nvPicPr>
-        <p:blipFill rotWithShape="1">
-          <a:blip r:embed="rId1"/>
-          <a:srcRect/>
-          <a:stretch>
-            <a:fillRect/>
-          </a:stretch>
-        </p:blipFill>
-        <p:spPr>
-          <a:xfrm>
-            <a:off x="0" y="159096"/>
-            <a:ext cx="12192000" cy="6858000"/>
-          </a:xfrm>
-          <a:prstGeom prst="rect">
-            <a:avLst/>
-          </a:prstGeom>
-          <a:noFill/>
-          <a:ln>
-            <a:noFill/>
-          </a:ln>
-        </p:spPr>
-      </p:pic>
       <p:sp>
         <p:nvSpPr>
           <p:cNvPr id="155" name="Google Shape;155;p17"/>
@@ -21568,7 +21121,7 @@
         </p:nvSpPr>
         <p:spPr>
           <a:xfrm>
-            <a:off x="714375" y="476250"/>
+            <a:off x="714375" y="207037"/>
             <a:ext cx="5400675" cy="434280"/>
           </a:xfrm>
           <a:prstGeom prst="rect">
@@ -21598,7 +21151,7 @@
               <a:buNone/>
             </a:pPr>
             <a:r>
-              <a:rPr lang="en-US" sz="2850" b="1" i="0" u="none" strike="noStrike" cap="none">
+              <a:rPr lang="en-US" sz="2850" b="1" i="0" u="none" strike="noStrike" cap="none" dirty="0">
                 <a:solidFill>
                   <a:srgbClr val="1E40AF"/>
                 </a:solidFill>
@@ -21607,9 +21160,21 @@
                 <a:cs typeface="Inter" panose="02000503000000020004"/>
                 <a:sym typeface="Inter" panose="02000503000000020004"/>
               </a:rPr>
-              <a:t>2D 瓦片地图与物理防穿模</a:t>
-            </a:r>
-            <a:endParaRPr lang="en-US" sz="2850" b="1" i="0" u="none" strike="noStrike" cap="none">
+              <a:t>2D </a:t>
+            </a:r>
+            <a:r>
+              <a:rPr lang="en-US" sz="2850" b="1" i="0" u="none" strike="noStrike" cap="none" dirty="0" err="1">
+                <a:solidFill>
+                  <a:srgbClr val="1E40AF"/>
+                </a:solidFill>
+                <a:latin typeface="Inter" panose="02000503000000020004"/>
+                <a:ea typeface="Inter" panose="02000503000000020004"/>
+                <a:cs typeface="Inter" panose="02000503000000020004"/>
+                <a:sym typeface="Inter" panose="02000503000000020004"/>
+              </a:rPr>
+              <a:t>瓦片地图与物理防穿模</a:t>
+            </a:r>
+            <a:endParaRPr lang="en-US" sz="2850" b="1" i="0" u="none" strike="noStrike" cap="none" dirty="0">
               <a:solidFill>
                 <a:srgbClr val="1E40AF"/>
               </a:solidFill>
@@ -21629,7 +21194,7 @@
         </p:nvSpPr>
         <p:spPr>
           <a:xfrm>
-            <a:off x="571500" y="476250"/>
+            <a:off x="571500" y="285384"/>
             <a:ext cx="57150" cy="434280"/>
           </a:xfrm>
           <a:prstGeom prst="rect">
@@ -21677,7 +21242,7 @@
         </p:nvSpPr>
         <p:spPr>
           <a:xfrm>
-            <a:off x="771525" y="967680"/>
+            <a:off x="728662" y="729747"/>
             <a:ext cx="5086350" cy="219075"/>
           </a:xfrm>
           <a:prstGeom prst="rect">
@@ -21715,15 +21280,6 @@
               </a:rPr>
               <a:t>MAP RENDERING &amp; COLLISION SYSTEM</a:t>
             </a:r>
-            <a:endParaRPr lang="en-US" sz="1350" b="0" i="0" u="none" strike="noStrike" cap="none">
-              <a:solidFill>
-                <a:srgbClr val="0891B2"/>
-              </a:solidFill>
-              <a:latin typeface="JetBrains Mono Medium" panose="02000009000000000000"/>
-              <a:ea typeface="JetBrains Mono Medium" panose="02000009000000000000"/>
-              <a:cs typeface="JetBrains Mono Medium" panose="02000009000000000000"/>
-              <a:sym typeface="JetBrains Mono Medium" panose="02000009000000000000"/>
-            </a:endParaRPr>
           </a:p>
         </p:txBody>
       </p:sp>
@@ -21735,7 +21291,7 @@
         </p:nvSpPr>
         <p:spPr>
           <a:xfrm>
-            <a:off x="564357" y="1288851"/>
+            <a:off x="382093" y="1016789"/>
             <a:ext cx="5550693" cy="247650"/>
           </a:xfrm>
           <a:prstGeom prst="rect">
@@ -21785,7 +21341,7 @@
         </p:nvSpPr>
         <p:spPr>
           <a:xfrm>
-            <a:off x="714375" y="1580057"/>
+            <a:off x="571500" y="1324294"/>
             <a:ext cx="5286375" cy="590931"/>
           </a:xfrm>
           <a:prstGeom prst="rect">
@@ -21874,7 +21430,7 @@
         </p:nvSpPr>
         <p:spPr>
           <a:xfrm>
-            <a:off x="628650" y="2213971"/>
+            <a:off x="439340" y="1975080"/>
             <a:ext cx="5550693" cy="247650"/>
           </a:xfrm>
           <a:prstGeom prst="rect">
@@ -21924,7 +21480,7 @@
         </p:nvSpPr>
         <p:spPr>
           <a:xfrm>
-            <a:off x="628650" y="2370587"/>
+            <a:off x="628650" y="2222730"/>
             <a:ext cx="5286375" cy="5013960"/>
           </a:xfrm>
           <a:prstGeom prst="rect">
@@ -22049,15 +21605,6 @@
               </a:rPr>
               <a:t> Bug。</a:t>
             </a:r>
-            <a:endParaRPr lang="en-US" sz="1200" b="0" i="0" u="none" strike="noStrike" cap="none" dirty="0">
-              <a:solidFill>
-                <a:srgbClr val="475569"/>
-              </a:solidFill>
-              <a:latin typeface="Inter" panose="02000503000000020004"/>
-              <a:ea typeface="Inter" panose="02000503000000020004"/>
-              <a:cs typeface="Inter" panose="02000503000000020004"/>
-              <a:sym typeface="Inter" panose="02000503000000020004"/>
-            </a:endParaRPr>
           </a:p>
           <a:p>
             <a:pPr marL="0" marR="0" lvl="0" indent="0" algn="l" rtl="0">
@@ -22117,12 +21664,6 @@
               </a:rPr>
               <a:t>动态缩减的“脚部滑动碰撞”算法</a:t>
             </a:r>
-            <a:endParaRPr lang="zh-CN" altLang="en-US" sz="1200" dirty="0">
-              <a:solidFill>
-                <a:srgbClr val="475569"/>
-              </a:solidFill>
-              <a:latin typeface="Inter" panose="02000503000000020004"/>
-            </a:endParaRPr>
           </a:p>
           <a:p>
             <a:pPr marL="0" marR="0" lvl="0" indent="0" algn="l" rtl="0">
@@ -22191,12 +21732,6 @@
               </a:rPr>
               <a:t>();</a:t>
             </a:r>
-            <a:endParaRPr lang="en-GB" sz="1200" dirty="0">
-              <a:solidFill>
-                <a:srgbClr val="475569"/>
-              </a:solidFill>
-              <a:latin typeface="Inter" panose="02000503000000020004"/>
-            </a:endParaRPr>
           </a:p>
           <a:p>
             <a:pPr marL="0" marR="0" lvl="0" indent="0" algn="l" rtl="0">
@@ -22265,12 +21800,6 @@
               </a:rPr>
               <a:t>();</a:t>
             </a:r>
-            <a:endParaRPr lang="en-GB" sz="1200" dirty="0">
-              <a:solidFill>
-                <a:srgbClr val="475569"/>
-              </a:solidFill>
-              <a:latin typeface="Inter" panose="02000503000000020004"/>
-            </a:endParaRPr>
           </a:p>
           <a:p>
             <a:pPr marL="0" marR="0" lvl="0" indent="0" algn="l" rtl="0">
@@ -22294,12 +21823,6 @@
               </a:rPr>
               <a:t>抛弃全身碰撞，动态计算缩小后的“脚部碰撞箱”</a:t>
             </a:r>
-            <a:endParaRPr lang="zh-CN" altLang="en-US" sz="1200" dirty="0">
-              <a:solidFill>
-                <a:srgbClr val="475569"/>
-              </a:solidFill>
-              <a:latin typeface="Inter" panose="02000503000000020004"/>
-            </a:endParaRPr>
           </a:p>
           <a:p>
             <a:pPr marL="0" marR="0" lvl="0" indent="0" algn="l" rtl="0">
@@ -22377,12 +21900,6 @@
               </a:rPr>
               <a:t>的狭窄走廊中不会因为肩部蹭墙而卡死</a:t>
             </a:r>
-            <a:endParaRPr lang="zh-CN" altLang="en-US" sz="1200" dirty="0">
-              <a:solidFill>
-                <a:srgbClr val="475569"/>
-              </a:solidFill>
-              <a:latin typeface="Inter" panose="02000503000000020004"/>
-            </a:endParaRPr>
           </a:p>
           <a:p>
             <a:pPr marL="0" marR="0" lvl="0" indent="0" algn="l" rtl="0">
@@ -22451,12 +21968,6 @@
               </a:rPr>
               <a:t> * 10.0 / 32.0;</a:t>
             </a:r>
-            <a:endParaRPr lang="en-GB" sz="1200" dirty="0">
-              <a:solidFill>
-                <a:srgbClr val="475569"/>
-              </a:solidFill>
-              <a:latin typeface="Inter" panose="02000503000000020004"/>
-            </a:endParaRPr>
           </a:p>
           <a:p>
             <a:pPr marL="0" marR="0" lvl="0" indent="0" algn="l" rtl="0">
@@ -22525,12 +22036,6 @@
               </a:rPr>
               <a:t> * 20.0 / 32.0;</a:t>
             </a:r>
-            <a:endParaRPr lang="en-GB" sz="1200" dirty="0">
-              <a:solidFill>
-                <a:srgbClr val="475569"/>
-              </a:solidFill>
-              <a:latin typeface="Inter" panose="02000503000000020004"/>
-            </a:endParaRPr>
           </a:p>
           <a:p>
             <a:pPr marL="0" marR="0" lvl="0" indent="0" algn="l" rtl="0">
@@ -22599,12 +22104,6 @@
               </a:rPr>
               <a:t> * 12.0 / 32.0;</a:t>
             </a:r>
-            <a:endParaRPr lang="en-GB" sz="1200" dirty="0">
-              <a:solidFill>
-                <a:srgbClr val="475569"/>
-              </a:solidFill>
-              <a:latin typeface="Inter" panose="02000503000000020004"/>
-            </a:endParaRPr>
           </a:p>
           <a:p>
             <a:pPr marL="0" marR="0" lvl="0" indent="0" algn="l" rtl="0">
@@ -22646,12 +22145,6 @@
               </a:rPr>
               <a:t>网格内</a:t>
             </a:r>
-            <a:endParaRPr lang="zh-CN" altLang="en-US" sz="1200" dirty="0">
-              <a:solidFill>
-                <a:srgbClr val="475569"/>
-              </a:solidFill>
-              <a:latin typeface="Inter" panose="02000503000000020004"/>
-            </a:endParaRPr>
           </a:p>
           <a:p>
             <a:pPr marL="0" marR="0" lvl="0" indent="0" algn="l" rtl="0">
@@ -22747,12 +22240,6 @@
               </a:rPr>
               <a:t> ty&gt;) {</a:t>
             </a:r>
-            <a:endParaRPr lang="en-GB" sz="1200" dirty="0">
-              <a:solidFill>
-                <a:srgbClr val="475569"/>
-              </a:solidFill>
-              <a:latin typeface="Inter" panose="02000503000000020004"/>
-            </a:endParaRPr>
           </a:p>
           <a:p>
             <a:pPr marL="0" marR="0" lvl="0" indent="0" algn="l" rtl="0">
@@ -22794,12 +22281,6 @@
               </a:rPr>
               <a:t>...</a:t>
             </a:r>
-            <a:endParaRPr lang="en-US" altLang="zh-CN" sz="1200" dirty="0">
-              <a:solidFill>
-                <a:srgbClr val="475569"/>
-              </a:solidFill>
-              <a:latin typeface="Inter" panose="02000503000000020004"/>
-            </a:endParaRPr>
           </a:p>
           <a:p>
             <a:pPr marL="0" marR="0" lvl="0" indent="0" algn="l" rtl="0">
@@ -22940,12 +22421,6 @@
               </a:rPr>
               <a:t>);</a:t>
             </a:r>
-            <a:endParaRPr lang="en-GB" sz="1200" dirty="0">
-              <a:solidFill>
-                <a:srgbClr val="475569"/>
-              </a:solidFill>
-              <a:latin typeface="Inter" panose="02000503000000020004"/>
-            </a:endParaRPr>
           </a:p>
           <a:p>
             <a:pPr marL="0" marR="0" lvl="0" indent="0" algn="l" rtl="0">
@@ -22969,12 +22444,6 @@
               </a:rPr>
               <a:t>};</a:t>
             </a:r>
-            <a:endParaRPr lang="en-GB" sz="1200" dirty="0">
-              <a:solidFill>
-                <a:srgbClr val="475569"/>
-              </a:solidFill>
-              <a:latin typeface="Inter" panose="02000503000000020004"/>
-            </a:endParaRPr>
           </a:p>
           <a:p>
             <a:pPr marL="0" marR="0" lvl="0" indent="0" algn="l" rtl="0">
@@ -23007,7 +22476,7 @@
           <p:nvPr/>
         </p:nvPicPr>
         <p:blipFill>
-          <a:blip r:embed="rId2"/>
+          <a:blip r:embed="rId3"/>
           <a:stretch>
             <a:fillRect/>
           </a:stretch>
@@ -23042,6 +22511,7 @@
           <a:bodyPr wrap="square" rtlCol="0">
             <a:spAutoFit/>
           </a:bodyPr>
+          <a:lstStyle/>
           <a:p>
             <a:pPr marL="0" marR="0" lvl="0" indent="0" algn="l" rtl="0">
               <a:lnSpc>
@@ -23355,7 +22825,7 @@
               </a:rPr>
               <a:t>;</a:t>
             </a:r>
-            <a:endParaRPr lang="zh-CN" altLang="en-US"/>
+            <a:endParaRPr lang="zh-CN" altLang="en-US" dirty="0"/>
           </a:p>
         </p:txBody>
       </p:sp>
@@ -23403,7 +22873,7 @@
           </p:nvPr>
         </p:nvPicPr>
         <p:blipFill rotWithShape="1">
-          <a:blip r:embed="rId2"/>
+          <a:blip r:embed="rId15"/>
           <a:srcRect/>
           <a:stretch>
             <a:fillRect/>
@@ -23429,12 +22899,12 @@
           <p:cNvPicPr preferRelativeResize="0"/>
           <p:nvPr>
             <p:custDataLst>
-              <p:tags r:id="rId3"/>
+              <p:tags r:id="rId2"/>
             </p:custDataLst>
           </p:nvPr>
         </p:nvPicPr>
         <p:blipFill rotWithShape="1">
-          <a:blip r:embed="rId4"/>
+          <a:blip r:embed="rId16"/>
           <a:srcRect/>
           <a:stretch>
             <a:fillRect/>
@@ -23460,12 +22930,12 @@
           <p:cNvPicPr preferRelativeResize="0"/>
           <p:nvPr>
             <p:custDataLst>
-              <p:tags r:id="rId5"/>
+              <p:tags r:id="rId3"/>
             </p:custDataLst>
           </p:nvPr>
         </p:nvPicPr>
         <p:blipFill rotWithShape="1">
-          <a:blip r:embed="rId6"/>
+          <a:blip r:embed="rId17"/>
           <a:srcRect/>
           <a:stretch>
             <a:fillRect/>
@@ -23534,15 +23004,6 @@
               </a:rPr>
               <a:t>动态时钟驱动的校园环境</a:t>
             </a:r>
-            <a:endParaRPr lang="en-US" sz="2850" b="1" i="0" u="none" strike="noStrike" cap="none">
-              <a:solidFill>
-                <a:srgbClr val="1E40AF"/>
-              </a:solidFill>
-              <a:latin typeface="Inter" panose="02000503000000020004"/>
-              <a:ea typeface="Inter" panose="02000503000000020004"/>
-              <a:cs typeface="Inter" panose="02000503000000020004"/>
-              <a:sym typeface="Inter" panose="02000503000000020004"/>
-            </a:endParaRPr>
           </a:p>
         </p:txBody>
       </p:sp>
@@ -23640,15 +23101,6 @@
               </a:rPr>
               <a:t>TIME TICK ENGINE &amp; DAY-NIGHT SYSTEMS</a:t>
             </a:r>
-            <a:endParaRPr lang="en-US" sz="1350" b="0" i="0" u="none" strike="noStrike" cap="none">
-              <a:solidFill>
-                <a:srgbClr val="0891B2"/>
-              </a:solidFill>
-              <a:latin typeface="JetBrains Mono Medium" panose="02000009000000000000"/>
-              <a:ea typeface="JetBrains Mono Medium" panose="02000009000000000000"/>
-              <a:cs typeface="JetBrains Mono Medium" panose="02000009000000000000"/>
-              <a:sym typeface="JetBrains Mono Medium" panose="02000009000000000000"/>
-            </a:endParaRPr>
           </a:p>
         </p:txBody>
       </p:sp>
@@ -23706,7 +23158,7 @@
           <p:cNvSpPr txBox="1"/>
           <p:nvPr>
             <p:custDataLst>
-              <p:tags r:id="rId7"/>
+              <p:tags r:id="rId4"/>
             </p:custDataLst>
           </p:nvPr>
         </p:nvSpPr>
@@ -23750,15 +23202,6 @@
               </a:rPr>
               <a:t>时钟驱动引擎</a:t>
             </a:r>
-            <a:endParaRPr lang="en-US" sz="1500" b="1" i="0" u="none" strike="noStrike" cap="none">
-              <a:solidFill>
-                <a:srgbClr val="1E40AF"/>
-              </a:solidFill>
-              <a:latin typeface="Inter" panose="02000503000000020004"/>
-              <a:ea typeface="Inter" panose="02000503000000020004"/>
-              <a:cs typeface="Inter" panose="02000503000000020004"/>
-              <a:sym typeface="Inter" panose="02000503000000020004"/>
-            </a:endParaRPr>
           </a:p>
         </p:txBody>
       </p:sp>
@@ -23768,7 +23211,7 @@
           <p:cNvSpPr txBox="1"/>
           <p:nvPr>
             <p:custDataLst>
-              <p:tags r:id="rId8"/>
+              <p:tags r:id="rId5"/>
             </p:custDataLst>
           </p:nvPr>
         </p:nvSpPr>
@@ -23885,7 +23328,7 @@
           <p:cNvSpPr txBox="1"/>
           <p:nvPr>
             <p:custDataLst>
-              <p:tags r:id="rId9"/>
+              <p:tags r:id="rId6"/>
             </p:custDataLst>
           </p:nvPr>
         </p:nvSpPr>
@@ -23929,15 +23372,6 @@
               </a:rPr>
               <a:t>日间小卖部</a:t>
             </a:r>
-            <a:endParaRPr lang="en-US" sz="1500" b="1" i="0" u="none" strike="noStrike" cap="none">
-              <a:solidFill>
-                <a:srgbClr val="1E40AF"/>
-              </a:solidFill>
-              <a:latin typeface="Inter" panose="02000503000000020004"/>
-              <a:ea typeface="Inter" panose="02000503000000020004"/>
-              <a:cs typeface="Inter" panose="02000503000000020004"/>
-              <a:sym typeface="Inter" panose="02000503000000020004"/>
-            </a:endParaRPr>
           </a:p>
         </p:txBody>
       </p:sp>
@@ -23947,7 +23381,7 @@
           <p:cNvSpPr txBox="1"/>
           <p:nvPr>
             <p:custDataLst>
-              <p:tags r:id="rId10"/>
+              <p:tags r:id="rId7"/>
             </p:custDataLst>
           </p:nvPr>
         </p:nvSpPr>
@@ -24064,7 +23498,7 @@
           <p:cNvSpPr txBox="1"/>
           <p:nvPr>
             <p:custDataLst>
-              <p:tags r:id="rId11"/>
+              <p:tags r:id="rId8"/>
             </p:custDataLst>
           </p:nvPr>
         </p:nvSpPr>
@@ -24118,13 +23552,13 @@
           <p:cNvSpPr txBox="1"/>
           <p:nvPr>
             <p:custDataLst>
-              <p:tags r:id="rId12"/>
+              <p:tags r:id="rId9"/>
             </p:custDataLst>
           </p:nvPr>
         </p:nvSpPr>
         <p:spPr>
           <a:xfrm>
-            <a:off x="8343900" y="2539305"/>
+            <a:off x="8343900" y="2682180"/>
             <a:ext cx="3028950" cy="1721485"/>
           </a:xfrm>
           <a:prstGeom prst="rect">
@@ -24163,7 +23597,7 @@
                 <a:cs typeface="Inter" panose="02000503000000020004"/>
                 <a:sym typeface="Inter" panose="02000503000000020004"/>
               </a:rPr>
-              <a:t>触发极高性价比的珍贵黑市交易。额外添加**“跨时段强制驱逐”安全防线，当后台时钟跨越临界点时，系统会自动重置玩家的商店挂机状态，彻底杜绝状态机串线与跨场景穿模的恶性 </a:t>
+              <a:t>触发极高性价比的珍贵黑市交易。额外添加“跨时段强制驱逐”安全防线，当后台时钟跨越临界点时，系统会自动重置玩家的商店挂机状态，彻底杜绝状态机串线与跨场景穿模的恶性 </a:t>
             </a:r>
             <a:r>
               <a:rPr lang="en-GB" altLang="zh-CN" b="0" i="0" u="none" strike="noStrike" cap="none" dirty="0">
@@ -24200,7 +23634,7 @@
           <p:nvPr/>
         </p:nvPicPr>
         <p:blipFill rotWithShape="1">
-          <a:blip r:embed="rId13"/>
+          <a:blip r:embed="rId18"/>
           <a:srcRect/>
           <a:stretch>
             <a:fillRect/>
@@ -24296,12 +23730,12 @@
           <p:cNvPicPr preferRelativeResize="0"/>
           <p:nvPr>
             <p:custDataLst>
-              <p:tags r:id="rId14"/>
+              <p:tags r:id="rId10"/>
             </p:custDataLst>
           </p:nvPr>
         </p:nvPicPr>
         <p:blipFill rotWithShape="1">
-          <a:blip r:embed="rId15"/>
+          <a:blip r:embed="rId19"/>
           <a:srcRect/>
           <a:stretch>
             <a:fillRect/>
@@ -24327,12 +23761,12 @@
           <p:cNvPicPr preferRelativeResize="0"/>
           <p:nvPr>
             <p:custDataLst>
-              <p:tags r:id="rId16"/>
+              <p:tags r:id="rId11"/>
             </p:custDataLst>
           </p:nvPr>
         </p:nvPicPr>
         <p:blipFill rotWithShape="1">
-          <a:blip r:embed="rId17"/>
+          <a:blip r:embed="rId20"/>
           <a:srcRect/>
           <a:stretch>
             <a:fillRect/>
@@ -24358,12 +23792,12 @@
           <p:cNvPicPr preferRelativeResize="0"/>
           <p:nvPr>
             <p:custDataLst>
-              <p:tags r:id="rId18"/>
+              <p:tags r:id="rId12"/>
             </p:custDataLst>
           </p:nvPr>
         </p:nvPicPr>
         <p:blipFill rotWithShape="1">
-          <a:blip r:embed="rId19"/>
+          <a:blip r:embed="rId21"/>
           <a:srcRect/>
           <a:stretch>
             <a:fillRect/>
@@ -24423,7 +23857,7 @@
           <p:nvPr/>
         </p:nvPicPr>
         <p:blipFill rotWithShape="1">
-          <a:blip r:embed="rId1"/>
+          <a:blip r:embed="rId13"/>
           <a:srcRect/>
           <a:stretch>
             <a:fillRect/>
@@ -24449,12 +23883,12 @@
           <p:cNvPicPr preferRelativeResize="0"/>
           <p:nvPr>
             <p:custDataLst>
-              <p:tags r:id="rId2"/>
+              <p:tags r:id="rId1"/>
             </p:custDataLst>
           </p:nvPr>
         </p:nvPicPr>
         <p:blipFill rotWithShape="1">
-          <a:blip r:embed="rId3"/>
+          <a:blip r:embed="rId14"/>
           <a:srcRect/>
           <a:stretch>
             <a:fillRect/>
@@ -24480,12 +23914,12 @@
           <p:cNvPicPr preferRelativeResize="0"/>
           <p:nvPr>
             <p:custDataLst>
-              <p:tags r:id="rId4"/>
+              <p:tags r:id="rId2"/>
             </p:custDataLst>
           </p:nvPr>
         </p:nvPicPr>
         <p:blipFill rotWithShape="1">
-          <a:blip r:embed="rId5"/>
+          <a:blip r:embed="rId15"/>
           <a:srcRect/>
           <a:stretch>
             <a:fillRect/>
@@ -24652,15 +24086,6 @@
               </a:rPr>
               <a:t>OOP BEST PRACTICES: INHERITANCE AND POLYMORPHISM</a:t>
             </a:r>
-            <a:endParaRPr lang="en-US" sz="1350" b="0" i="0" u="none" strike="noStrike" cap="none">
-              <a:solidFill>
-                <a:srgbClr val="0891B2"/>
-              </a:solidFill>
-              <a:latin typeface="JetBrains Mono Medium" panose="02000009000000000000"/>
-              <a:ea typeface="JetBrains Mono Medium" panose="02000009000000000000"/>
-              <a:cs typeface="JetBrains Mono Medium" panose="02000009000000000000"/>
-              <a:sym typeface="JetBrains Mono Medium" panose="02000009000000000000"/>
-            </a:endParaRPr>
           </a:p>
         </p:txBody>
       </p:sp>
@@ -24670,7 +24095,7 @@
           <p:cNvSpPr txBox="1"/>
           <p:nvPr>
             <p:custDataLst>
-              <p:tags r:id="rId6"/>
+              <p:tags r:id="rId3"/>
             </p:custDataLst>
           </p:nvPr>
         </p:nvSpPr>
@@ -24714,15 +24139,6 @@
               </a:rPr>
               <a:t>角色属性高度封装</a:t>
             </a:r>
-            <a:endParaRPr lang="en-US" sz="1800" b="1" i="0" u="none" strike="noStrike" cap="none">
-              <a:solidFill>
-                <a:srgbClr val="1E40AF"/>
-              </a:solidFill>
-              <a:latin typeface="Inter" panose="02000503000000020004"/>
-              <a:ea typeface="Inter" panose="02000503000000020004"/>
-              <a:cs typeface="Inter" panose="02000503000000020004"/>
-              <a:sym typeface="Inter" panose="02000503000000020004"/>
-            </a:endParaRPr>
           </a:p>
         </p:txBody>
       </p:sp>
@@ -24732,13 +24148,13 @@
           <p:cNvSpPr txBox="1"/>
           <p:nvPr>
             <p:custDataLst>
-              <p:tags r:id="rId7"/>
+              <p:tags r:id="rId4"/>
             </p:custDataLst>
           </p:nvPr>
         </p:nvSpPr>
         <p:spPr>
           <a:xfrm>
-            <a:off x="866775" y="5188880"/>
+            <a:off x="866775" y="5073763"/>
             <a:ext cx="4743450" cy="959485"/>
           </a:xfrm>
           <a:prstGeom prst="rect">
@@ -24897,7 +24313,7 @@
           <p:cNvSpPr txBox="1"/>
           <p:nvPr>
             <p:custDataLst>
-              <p:tags r:id="rId8"/>
+              <p:tags r:id="rId5"/>
             </p:custDataLst>
           </p:nvPr>
         </p:nvSpPr>
@@ -24941,15 +24357,6 @@
               </a:rPr>
               <a:t>继承与多态的实战典范</a:t>
             </a:r>
-            <a:endParaRPr lang="en-US" sz="1800" b="1" i="0" u="none" strike="noStrike" cap="none">
-              <a:solidFill>
-                <a:srgbClr val="1E40AF"/>
-              </a:solidFill>
-              <a:latin typeface="Inter" panose="02000503000000020004"/>
-              <a:ea typeface="Inter" panose="02000503000000020004"/>
-              <a:cs typeface="Inter" panose="02000503000000020004"/>
-              <a:sym typeface="Inter" panose="02000503000000020004"/>
-            </a:endParaRPr>
           </a:p>
         </p:txBody>
       </p:sp>
@@ -24959,13 +24366,13 @@
           <p:cNvSpPr txBox="1"/>
           <p:nvPr>
             <p:custDataLst>
-              <p:tags r:id="rId9"/>
+              <p:tags r:id="rId6"/>
             </p:custDataLst>
           </p:nvPr>
         </p:nvSpPr>
         <p:spPr>
           <a:xfrm>
-            <a:off x="6581775" y="5111353"/>
+            <a:off x="6581775" y="5071664"/>
             <a:ext cx="4743450" cy="1279525"/>
           </a:xfrm>
           <a:prstGeom prst="rect">
@@ -25124,12 +24531,12 @@
           <p:cNvPicPr preferRelativeResize="0"/>
           <p:nvPr>
             <p:custDataLst>
-              <p:tags r:id="rId10"/>
+              <p:tags r:id="rId7"/>
             </p:custDataLst>
           </p:nvPr>
         </p:nvPicPr>
         <p:blipFill rotWithShape="1">
-          <a:blip r:embed="rId11"/>
+          <a:blip r:embed="rId16"/>
           <a:srcRect/>
           <a:stretch>
             <a:fillRect/>
@@ -25155,12 +24562,12 @@
           <p:cNvPicPr preferRelativeResize="0"/>
           <p:nvPr>
             <p:custDataLst>
-              <p:tags r:id="rId12"/>
+              <p:tags r:id="rId8"/>
             </p:custDataLst>
           </p:nvPr>
         </p:nvPicPr>
         <p:blipFill rotWithShape="1">
-          <a:blip r:embed="rId13"/>
+          <a:blip r:embed="rId17"/>
           <a:srcRect/>
           <a:stretch>
             <a:fillRect/>
@@ -25188,15 +24595,15 @@
           </p:cNvPicPr>
           <p:nvPr>
             <p:custDataLst>
-              <p:tags r:id="rId14"/>
+              <p:tags r:id="rId9"/>
             </p:custDataLst>
           </p:nvPr>
         </p:nvPicPr>
         <p:blipFill>
-          <a:blip r:embed="rId15">
+          <a:blip r:embed="rId18">
             <a:extLst>
               <a:ext uri="{96DAC541-7B7A-43D3-8B79-37D633B846F1}">
-                <asvg:svgBlip xmlns:asvg="http://schemas.microsoft.com/office/drawing/2016/SVG/main" r:embed="rId16"/>
+                <asvg:svgBlip xmlns:asvg="http://schemas.microsoft.com/office/drawing/2016/SVG/main" r:embed="rId19"/>
               </a:ext>
             </a:extLst>
           </a:blip>
@@ -25222,15 +24629,15 @@
           </p:cNvPicPr>
           <p:nvPr>
             <p:custDataLst>
-              <p:tags r:id="rId17"/>
+              <p:tags r:id="rId10"/>
             </p:custDataLst>
           </p:nvPr>
         </p:nvPicPr>
         <p:blipFill>
-          <a:blip r:embed="rId18">
+          <a:blip r:embed="rId20">
             <a:extLst>
               <a:ext uri="{96DAC541-7B7A-43D3-8B79-37D633B846F1}">
-                <asvg:svgBlip xmlns:asvg="http://schemas.microsoft.com/office/drawing/2016/SVG/main" r:embed="rId19"/>
+                <asvg:svgBlip xmlns:asvg="http://schemas.microsoft.com/office/drawing/2016/SVG/main" r:embed="rId21"/>
               </a:ext>
             </a:extLst>
           </a:blip>
@@ -25288,7 +24695,7 @@
           <p:nvPr/>
         </p:nvPicPr>
         <p:blipFill rotWithShape="1">
-          <a:blip r:embed="rId1"/>
+          <a:blip r:embed="rId3"/>
           <a:srcRect/>
           <a:stretch>
             <a:fillRect/>
@@ -25315,7 +24722,7 @@
           <p:nvPr/>
         </p:nvPicPr>
         <p:blipFill rotWithShape="1">
-          <a:blip r:embed="rId2"/>
+          <a:blip r:embed="rId4"/>
           <a:srcRect/>
           <a:stretch>
             <a:fillRect/>
@@ -25342,7 +24749,7 @@
           <p:nvPr/>
         </p:nvPicPr>
         <p:blipFill rotWithShape="1">
-          <a:blip r:embed="rId3"/>
+          <a:blip r:embed="rId5"/>
           <a:srcRect/>
           <a:stretch>
             <a:fillRect/>
@@ -25411,15 +24818,6 @@
               </a:rPr>
               <a:t>面向对象的战斗引擎判定</a:t>
             </a:r>
-            <a:endParaRPr lang="en-US" sz="2850" b="1" i="0" u="none" strike="noStrike" cap="none">
-              <a:solidFill>
-                <a:srgbClr val="1E40AF"/>
-              </a:solidFill>
-              <a:latin typeface="Inter" panose="02000503000000020004"/>
-              <a:ea typeface="Inter" panose="02000503000000020004"/>
-              <a:cs typeface="Inter" panose="02000503000000020004"/>
-              <a:sym typeface="Inter" panose="02000503000000020004"/>
-            </a:endParaRPr>
           </a:p>
         </p:txBody>
       </p:sp>
@@ -25517,15 +24915,6 @@
               </a:rPr>
               <a:t>STATE MACHINE DRIVEN COMBAT SYSTEM</a:t>
             </a:r>
-            <a:endParaRPr lang="en-US" sz="1350" b="0" i="0" u="none" strike="noStrike" cap="none">
-              <a:solidFill>
-                <a:srgbClr val="0891B2"/>
-              </a:solidFill>
-              <a:latin typeface="JetBrains Mono Medium" panose="02000009000000000000"/>
-              <a:ea typeface="JetBrains Mono Medium" panose="02000009000000000000"/>
-              <a:cs typeface="JetBrains Mono Medium" panose="02000009000000000000"/>
-              <a:sym typeface="JetBrains Mono Medium" panose="02000009000000000000"/>
-            </a:endParaRPr>
           </a:p>
         </p:txBody>
       </p:sp>
@@ -25575,15 +24964,6 @@
               </a:rPr>
               <a:t>状态机控制判定</a:t>
             </a:r>
-            <a:endParaRPr lang="en-US" sz="1500" b="1" i="0" u="none" strike="noStrike" cap="none">
-              <a:solidFill>
-                <a:srgbClr val="1E40AF"/>
-              </a:solidFill>
-              <a:latin typeface="Inter" panose="02000503000000020004"/>
-              <a:ea typeface="Inter" panose="02000503000000020004"/>
-              <a:cs typeface="Inter" panose="02000503000000020004"/>
-              <a:sym typeface="Inter" panose="02000503000000020004"/>
-            </a:endParaRPr>
           </a:p>
         </p:txBody>
       </p:sp>
@@ -25595,7 +24975,7 @@
         </p:nvSpPr>
         <p:spPr>
           <a:xfrm>
-            <a:off x="5610225" y="2237853"/>
+            <a:off x="5610223" y="1386780"/>
             <a:ext cx="6010275" cy="738505"/>
           </a:xfrm>
           <a:prstGeom prst="rect">
@@ -25696,7 +25076,7 @@
         </p:nvSpPr>
         <p:spPr>
           <a:xfrm>
-            <a:off x="5610224" y="2981715"/>
+            <a:off x="5610223" y="2519793"/>
             <a:ext cx="6010275" cy="2215515"/>
           </a:xfrm>
           <a:prstGeom prst="rect">
@@ -25929,7 +25309,7 @@
         </p:nvSpPr>
         <p:spPr>
           <a:xfrm>
-            <a:off x="5610225" y="5129817"/>
+            <a:off x="5610223" y="4839739"/>
             <a:ext cx="6010275" cy="1477010"/>
           </a:xfrm>
           <a:prstGeom prst="rect">
@@ -26058,60 +25438,6 @@
           </a:p>
         </p:txBody>
       </p:sp>
-      <p:pic>
-        <p:nvPicPr>
-          <p:cNvPr id="219" name="Google Shape;219;p20" descr="image.png"/>
-          <p:cNvPicPr preferRelativeResize="0"/>
-          <p:nvPr/>
-        </p:nvPicPr>
-        <p:blipFill rotWithShape="1">
-          <a:blip r:embed="rId4"/>
-          <a:srcRect/>
-          <a:stretch>
-            <a:fillRect/>
-          </a:stretch>
-        </p:blipFill>
-        <p:spPr>
-          <a:xfrm>
-            <a:off x="5276850" y="3122265"/>
-            <a:ext cx="190500" cy="200025"/>
-          </a:xfrm>
-          <a:prstGeom prst="rect">
-            <a:avLst/>
-          </a:prstGeom>
-          <a:noFill/>
-          <a:ln>
-            <a:noFill/>
-          </a:ln>
-        </p:spPr>
-      </p:pic>
-      <p:pic>
-        <p:nvPicPr>
-          <p:cNvPr id="220" name="Google Shape;220;p20" descr="image.png"/>
-          <p:cNvPicPr preferRelativeResize="0"/>
-          <p:nvPr/>
-        </p:nvPicPr>
-        <p:blipFill rotWithShape="1">
-          <a:blip r:embed="rId5"/>
-          <a:srcRect/>
-          <a:stretch>
-            <a:fillRect/>
-          </a:stretch>
-        </p:blipFill>
-        <p:spPr>
-          <a:xfrm>
-            <a:off x="5232400" y="5257800"/>
-            <a:ext cx="142875" cy="200025"/>
-          </a:xfrm>
-          <a:prstGeom prst="rect">
-            <a:avLst/>
-          </a:prstGeom>
-          <a:noFill/>
-          <a:ln>
-            <a:noFill/>
-          </a:ln>
-        </p:spPr>
-      </p:pic>
     </p:spTree>
   </p:cSld>
   <p:clrMapOvr>
@@ -26152,7 +25478,7 @@
           <p:nvPr/>
         </p:nvPicPr>
         <p:blipFill rotWithShape="1">
-          <a:blip r:embed="rId1"/>
+          <a:blip r:embed="rId3"/>
           <a:srcRect/>
           <a:stretch>
             <a:fillRect/>
@@ -26179,7 +25505,7 @@
           <p:nvPr/>
         </p:nvPicPr>
         <p:blipFill rotWithShape="1">
-          <a:blip r:embed="rId2"/>
+          <a:blip r:embed="rId4"/>
           <a:srcRect/>
           <a:stretch>
             <a:fillRect/>
@@ -26206,7 +25532,7 @@
           <p:nvPr/>
         </p:nvPicPr>
         <p:blipFill rotWithShape="1">
-          <a:blip r:embed="rId3"/>
+          <a:blip r:embed="rId5"/>
           <a:srcRect/>
           <a:stretch>
             <a:fillRect/>
@@ -26275,15 +25601,6 @@
               </a:rPr>
               <a:t>核心挑战：图形界面的全面升级</a:t>
             </a:r>
-            <a:endParaRPr lang="en-US" sz="2850" b="1" i="0" u="none" strike="noStrike" cap="none">
-              <a:solidFill>
-                <a:srgbClr val="1E40AF"/>
-              </a:solidFill>
-              <a:latin typeface="Inter" panose="02000503000000020004"/>
-              <a:ea typeface="Inter" panose="02000503000000020004"/>
-              <a:cs typeface="Inter" panose="02000503000000020004"/>
-              <a:sym typeface="Inter" panose="02000503000000020004"/>
-            </a:endParaRPr>
           </a:p>
         </p:txBody>
       </p:sp>
@@ -26381,15 +25698,6 @@
               </a:rPr>
               <a:t>CHALLENGE I: COMMAND LINE RESTRUCTURING</a:t>
             </a:r>
-            <a:endParaRPr lang="en-US" sz="1350" b="0" i="0" u="none" strike="noStrike" cap="none">
-              <a:solidFill>
-                <a:srgbClr val="0891B2"/>
-              </a:solidFill>
-              <a:latin typeface="JetBrains Mono Medium" panose="02000009000000000000"/>
-              <a:ea typeface="JetBrains Mono Medium" panose="02000009000000000000"/>
-              <a:cs typeface="JetBrains Mono Medium" panose="02000009000000000000"/>
-              <a:sym typeface="JetBrains Mono Medium" panose="02000009000000000000"/>
-            </a:endParaRPr>
           </a:p>
         </p:txBody>
       </p:sp>
@@ -26439,15 +25747,6 @@
               </a:rPr>
               <a:t>1. 业务逻辑“零创伤”迁徙</a:t>
             </a:r>
-            <a:endParaRPr lang="en-US" sz="1800" b="1" i="0" u="none" strike="noStrike" cap="none">
-              <a:solidFill>
-                <a:srgbClr val="1E40AF"/>
-              </a:solidFill>
-              <a:latin typeface="Inter" panose="02000503000000020004"/>
-              <a:ea typeface="Inter" panose="02000503000000020004"/>
-              <a:cs typeface="Inter" panose="02000503000000020004"/>
-              <a:sym typeface="Inter" panose="02000503000000020004"/>
-            </a:endParaRPr>
           </a:p>
         </p:txBody>
       </p:sp>
@@ -26500,15 +25799,6 @@
               </a:rPr>
               <a:t>在原有纯黑框字符版业务代码毫不知情的情况下，将其整体打包内嵌至 Qt6 视口视图架构中。在视图刷新阶段通过映射指针直接提取数据源渲染图元，完美规避重写旧逻辑的巨大工作量。</a:t>
             </a:r>
-            <a:endParaRPr lang="en-US" sz="1200" b="0" i="0" u="none" strike="noStrike" cap="none">
-              <a:solidFill>
-                <a:srgbClr val="475569"/>
-              </a:solidFill>
-              <a:latin typeface="Inter" panose="02000503000000020004"/>
-              <a:ea typeface="Inter" panose="02000503000000020004"/>
-              <a:cs typeface="Inter" panose="02000503000000020004"/>
-              <a:sym typeface="Inter" panose="02000503000000020004"/>
-            </a:endParaRPr>
           </a:p>
         </p:txBody>
       </p:sp>
@@ -26680,7 +25970,7 @@
           <p:nvPr/>
         </p:nvPicPr>
         <p:blipFill rotWithShape="1">
-          <a:blip r:embed="rId4"/>
+          <a:blip r:embed="rId6"/>
           <a:srcRect/>
           <a:stretch>
             <a:fillRect/>
@@ -26783,7 +26073,7 @@
             <p:nvPr/>
           </p:nvPicPr>
           <p:blipFill rotWithShape="1">
-            <a:blip r:embed="rId5"/>
+            <a:blip r:embed="rId7"/>
             <a:srcRect/>
             <a:stretch>
               <a:fillRect/>
@@ -26850,7 +26140,6 @@
               <a:rPr kumimoji="1" lang="zh-CN" altLang="en-US" sz="1050" dirty="0"/>
               <a:t>状态机轮询取代原生阻塞拦截</a:t>
             </a:r>
-            <a:endParaRPr kumimoji="1" lang="zh-CN" altLang="en-US" sz="1050" dirty="0"/>
           </a:p>
           <a:p>
             <a:r>
@@ -26881,7 +26170,6 @@
               <a:rPr kumimoji="1" lang="en-GB" altLang="zh-CN" sz="1050" dirty="0"/>
               <a:t>* event) {</a:t>
             </a:r>
-            <a:endParaRPr kumimoji="1" lang="en-GB" altLang="zh-CN" sz="1050" dirty="0"/>
           </a:p>
           <a:p>
             <a:r>
@@ -26892,7 +26180,6 @@
               <a:rPr kumimoji="1" lang="zh-CN" altLang="en-US" sz="1050" dirty="0"/>
               <a:t>拦截器：仅记录按键状态，不处理移动逻辑</a:t>
             </a:r>
-            <a:endParaRPr kumimoji="1" lang="zh-CN" altLang="en-US" sz="1050" dirty="0"/>
           </a:p>
           <a:p>
             <a:r>
@@ -26919,7 +26206,6 @@
               <a:rPr kumimoji="1" lang="en-GB" altLang="zh-CN" sz="1050" dirty="0"/>
               <a:t> = true;</a:t>
             </a:r>
-            <a:endParaRPr kumimoji="1" lang="en-GB" altLang="zh-CN" sz="1050" dirty="0"/>
           </a:p>
           <a:p>
             <a:r>
@@ -26942,7 +26228,6 @@
               <a:rPr kumimoji="1" lang="en-GB" altLang="zh-CN" sz="1050" dirty="0"/>
               <a:t> = true;</a:t>
             </a:r>
-            <a:endParaRPr kumimoji="1" lang="en-GB" altLang="zh-CN" sz="1050" dirty="0"/>
           </a:p>
           <a:p>
             <a:r>
@@ -26965,7 +26250,6 @@
               <a:rPr kumimoji="1" lang="en-GB" altLang="zh-CN" sz="1050" dirty="0"/>
               <a:t> = true;</a:t>
             </a:r>
-            <a:endParaRPr kumimoji="1" lang="en-GB" altLang="zh-CN" sz="1050" dirty="0"/>
           </a:p>
           <a:p>
             <a:r>
@@ -26988,14 +26272,12 @@
               <a:rPr kumimoji="1" lang="en-GB" altLang="zh-CN" sz="1050" dirty="0"/>
               <a:t> = true;</a:t>
             </a:r>
-            <a:endParaRPr kumimoji="1" lang="en-GB" altLang="zh-CN" sz="1050" dirty="0"/>
           </a:p>
           <a:p>
             <a:r>
               <a:rPr kumimoji="1" lang="en-GB" altLang="zh-CN" sz="1050" dirty="0"/>
               <a:t>}</a:t>
             </a:r>
-            <a:endParaRPr kumimoji="1" lang="en-GB" altLang="zh-CN" sz="1050" dirty="0"/>
           </a:p>
           <a:p>
             <a:endParaRPr kumimoji="1" lang="en-GB" altLang="zh-CN" sz="1050" dirty="0"/>
@@ -27021,7 +26303,6 @@
               <a:rPr kumimoji="1" lang="zh-CN" altLang="en-US" sz="1050" dirty="0"/>
               <a:t>定时器轮询</a:t>
             </a:r>
-            <a:endParaRPr kumimoji="1" lang="zh-CN" altLang="en-US" sz="1050" dirty="0"/>
           </a:p>
           <a:p>
             <a:r>
@@ -27040,7 +26321,6 @@
               <a:rPr kumimoji="1" lang="en-GB" altLang="zh-CN" sz="1050" dirty="0"/>
               <a:t>(this);</a:t>
             </a:r>
-            <a:endParaRPr kumimoji="1" lang="en-GB" altLang="zh-CN" sz="1050" dirty="0"/>
           </a:p>
           <a:p>
             <a:r>
@@ -27063,7 +26343,6 @@
               <a:rPr kumimoji="1" lang="en-GB" altLang="zh-CN" sz="1050" dirty="0"/>
               <a:t>::timeout, this, [=]() {</a:t>
             </a:r>
-            <a:endParaRPr kumimoji="1" lang="en-GB" altLang="zh-CN" sz="1050" dirty="0"/>
           </a:p>
           <a:p>
             <a:r>
@@ -27078,7 +26357,6 @@
               <a:rPr kumimoji="1" lang="en-GB" altLang="zh-CN" sz="1050" dirty="0"/>
               <a:t> = 0;</a:t>
             </a:r>
-            <a:endParaRPr kumimoji="1" lang="en-GB" altLang="zh-CN" sz="1050" dirty="0"/>
           </a:p>
           <a:p>
             <a:r>
@@ -27113,7 +26391,6 @@
               <a:rPr kumimoji="1" lang="zh-CN" altLang="en-US" sz="1050" dirty="0"/>
               <a:t>的丝滑移动</a:t>
             </a:r>
-            <a:endParaRPr kumimoji="1" lang="zh-CN" altLang="en-US" sz="1050" dirty="0"/>
           </a:p>
           <a:p>
             <a:r>
@@ -27148,7 +26425,6 @@
               <a:rPr kumimoji="1" lang="en-GB" altLang="zh-CN" sz="1050" dirty="0"/>
               <a:t>;</a:t>
             </a:r>
-            <a:endParaRPr kumimoji="1" lang="en-GB" altLang="zh-CN" sz="1050" dirty="0"/>
           </a:p>
           <a:p>
             <a:r>
@@ -27179,7 +26455,6 @@
               <a:rPr kumimoji="1" lang="en-GB" altLang="zh-CN" sz="1050" dirty="0"/>
               <a:t>;</a:t>
             </a:r>
-            <a:endParaRPr kumimoji="1" lang="en-GB" altLang="zh-CN" sz="1050" dirty="0"/>
           </a:p>
           <a:p>
             <a:r>
@@ -27202,7 +26477,6 @@
               <a:rPr kumimoji="1" lang="en-GB" altLang="zh-CN" sz="1050" dirty="0"/>
               <a:t>;</a:t>
             </a:r>
-            <a:endParaRPr kumimoji="1" lang="en-GB" altLang="zh-CN" sz="1050" dirty="0"/>
           </a:p>
           <a:p>
             <a:r>
@@ -27225,14 +26499,12 @@
               <a:rPr kumimoji="1" lang="en-GB" altLang="zh-CN" sz="1050" dirty="0"/>
               <a:t>;</a:t>
             </a:r>
-            <a:endParaRPr kumimoji="1" lang="en-GB" altLang="zh-CN" sz="1050" dirty="0"/>
           </a:p>
           <a:p>
             <a:r>
               <a:rPr kumimoji="1" lang="en-GB" altLang="zh-CN" sz="1050" dirty="0"/>
               <a:t>    </a:t>
             </a:r>
-            <a:endParaRPr kumimoji="1" lang="en-GB" altLang="zh-CN" sz="1050" dirty="0"/>
           </a:p>
           <a:p>
             <a:r>
@@ -27259,14 +26531,12 @@
               <a:rPr kumimoji="1" lang="zh-CN" altLang="en-US" sz="1050" dirty="0"/>
               <a:t>帧平滑渲染</a:t>
             </a:r>
-            <a:endParaRPr kumimoji="1" lang="zh-CN" altLang="en-US" sz="1050" dirty="0"/>
           </a:p>
           <a:p>
             <a:r>
               <a:rPr kumimoji="1" lang="en-US" altLang="zh-CN" sz="1050" dirty="0"/>
               <a:t>});</a:t>
             </a:r>
-            <a:endParaRPr kumimoji="1" lang="en-US" altLang="zh-CN" sz="1050" dirty="0"/>
           </a:p>
           <a:p>
             <a:r>
@@ -27302,7 +26572,7 @@
           <p:nvPr/>
         </p:nvPicPr>
         <p:blipFill>
-          <a:blip r:embed="rId6"/>
+          <a:blip r:embed="rId8"/>
           <a:stretch>
             <a:fillRect/>
           </a:stretch>
@@ -27326,295 +26596,295 @@
 </file>
 
 <file path=ppt/tags/tag1.xml><?xml version="1.0" encoding="utf-8"?>
-<p:tagLst xmlns:p="http://schemas.openxmlformats.org/presentationml/2006/main">
+<p:tagLst xmlns:a="http://schemas.openxmlformats.org/drawingml/2006/main" xmlns:r="http://schemas.openxmlformats.org/officeDocument/2006/relationships" xmlns:p="http://schemas.openxmlformats.org/presentationml/2006/main">
   <p:tag name="KSO_WM_DIAGRAM_VIRTUALLY_FRAME" val="{&quot;height&quot;:386.5546456692913,&quot;left&quot;:45,&quot;top&quot;:115.94527559055118,&quot;width&quot;:870}"/>
 </p:tagLst>
 </file>
 
 <file path=ppt/tags/tag10.xml><?xml version="1.0" encoding="utf-8"?>
-<p:tagLst xmlns:p="http://schemas.openxmlformats.org/presentationml/2006/main">
+<p:tagLst xmlns:a="http://schemas.openxmlformats.org/drawingml/2006/main" xmlns:r="http://schemas.openxmlformats.org/officeDocument/2006/relationships" xmlns:p="http://schemas.openxmlformats.org/presentationml/2006/main">
   <p:tag name="KSO_WM_DIAGRAM_VIRTUALLY_FRAME" val="{&quot;height&quot;:467.25,&quot;left&quot;:45,&quot;top&quot;:115.94527559055118,&quot;width&quot;:870}"/>
 </p:tagLst>
 </file>
 
 <file path=ppt/tags/tag11.xml><?xml version="1.0" encoding="utf-8"?>
-<p:tagLst xmlns:p="http://schemas.openxmlformats.org/presentationml/2006/main">
+<p:tagLst xmlns:a="http://schemas.openxmlformats.org/drawingml/2006/main" xmlns:r="http://schemas.openxmlformats.org/officeDocument/2006/relationships" xmlns:p="http://schemas.openxmlformats.org/presentationml/2006/main">
   <p:tag name="KSO_WM_DIAGRAM_VIRTUALLY_FRAME" val="{&quot;height&quot;:467.25,&quot;left&quot;:45,&quot;top&quot;:115.94527559055118,&quot;width&quot;:870}"/>
 </p:tagLst>
 </file>
 
 <file path=ppt/tags/tag12.xml><?xml version="1.0" encoding="utf-8"?>
-<p:tagLst xmlns:p="http://schemas.openxmlformats.org/presentationml/2006/main">
+<p:tagLst xmlns:a="http://schemas.openxmlformats.org/drawingml/2006/main" xmlns:r="http://schemas.openxmlformats.org/officeDocument/2006/relationships" xmlns:p="http://schemas.openxmlformats.org/presentationml/2006/main">
   <p:tag name="KSO_WM_DIAGRAM_VIRTUALLY_FRAME" val="{&quot;height&quot;:467.25,&quot;left&quot;:45,&quot;top&quot;:115.94527559055118,&quot;width&quot;:870}"/>
 </p:tagLst>
 </file>
 
 <file path=ppt/tags/tag13.xml><?xml version="1.0" encoding="utf-8"?>
-<p:tagLst xmlns:p="http://schemas.openxmlformats.org/presentationml/2006/main">
+<p:tagLst xmlns:a="http://schemas.openxmlformats.org/drawingml/2006/main" xmlns:r="http://schemas.openxmlformats.org/officeDocument/2006/relationships" xmlns:p="http://schemas.openxmlformats.org/presentationml/2006/main">
   <p:tag name="KSO_WM_DIAGRAM_VIRTUALLY_FRAME" val="{&quot;height&quot;:467.25,&quot;left&quot;:45,&quot;top&quot;:115.94527559055118,&quot;width&quot;:870}"/>
 </p:tagLst>
 </file>
 
 <file path=ppt/tags/tag14.xml><?xml version="1.0" encoding="utf-8"?>
-<p:tagLst xmlns:p="http://schemas.openxmlformats.org/presentationml/2006/main">
+<p:tagLst xmlns:a="http://schemas.openxmlformats.org/drawingml/2006/main" xmlns:r="http://schemas.openxmlformats.org/officeDocument/2006/relationships" xmlns:p="http://schemas.openxmlformats.org/presentationml/2006/main">
   <p:tag name="KSO_WM_DIAGRAM_VIRTUALLY_FRAME" val="{&quot;height&quot;:467.25,&quot;left&quot;:45,&quot;top&quot;:115.94527559055118,&quot;width&quot;:870}"/>
 </p:tagLst>
 </file>
 
 <file path=ppt/tags/tag15.xml><?xml version="1.0" encoding="utf-8"?>
-<p:tagLst xmlns:p="http://schemas.openxmlformats.org/presentationml/2006/main">
+<p:tagLst xmlns:a="http://schemas.openxmlformats.org/drawingml/2006/main" xmlns:r="http://schemas.openxmlformats.org/officeDocument/2006/relationships" xmlns:p="http://schemas.openxmlformats.org/presentationml/2006/main">
   <p:tag name="KSO_WM_DIAGRAM_VIRTUALLY_FRAME" val="{&quot;height&quot;:467.25,&quot;left&quot;:45,&quot;top&quot;:115.94527559055118,&quot;width&quot;:870}"/>
 </p:tagLst>
 </file>
 
 <file path=ppt/tags/tag16.xml><?xml version="1.0" encoding="utf-8"?>
-<p:tagLst xmlns:p="http://schemas.openxmlformats.org/presentationml/2006/main">
+<p:tagLst xmlns:a="http://schemas.openxmlformats.org/drawingml/2006/main" xmlns:r="http://schemas.openxmlformats.org/officeDocument/2006/relationships" xmlns:p="http://schemas.openxmlformats.org/presentationml/2006/main">
   <p:tag name="KSO_WM_DIAGRAM_VIRTUALLY_FRAME" val="{&quot;height&quot;:467.25,&quot;left&quot;:45,&quot;top&quot;:115.94527559055118,&quot;width&quot;:870}"/>
 </p:tagLst>
 </file>
 
 <file path=ppt/tags/tag17.xml><?xml version="1.0" encoding="utf-8"?>
-<p:tagLst xmlns:p="http://schemas.openxmlformats.org/presentationml/2006/main">
+<p:tagLst xmlns:a="http://schemas.openxmlformats.org/drawingml/2006/main" xmlns:r="http://schemas.openxmlformats.org/officeDocument/2006/relationships" xmlns:p="http://schemas.openxmlformats.org/presentationml/2006/main">
   <p:tag name="KSO_WM_DIAGRAM_VIRTUALLY_FRAME" val="{&quot;height&quot;:467.25,&quot;left&quot;:45,&quot;top&quot;:115.94527559055118,&quot;width&quot;:870}"/>
 </p:tagLst>
 </file>
 
 <file path=ppt/tags/tag18.xml><?xml version="1.0" encoding="utf-8"?>
-<p:tagLst xmlns:p="http://schemas.openxmlformats.org/presentationml/2006/main">
+<p:tagLst xmlns:a="http://schemas.openxmlformats.org/drawingml/2006/main" xmlns:r="http://schemas.openxmlformats.org/officeDocument/2006/relationships" xmlns:p="http://schemas.openxmlformats.org/presentationml/2006/main">
   <p:tag name="KSO_WM_DIAGRAM_VIRTUALLY_FRAME" val="{&quot;height&quot;:467.25,&quot;left&quot;:45,&quot;top&quot;:115.94527559055118,&quot;width&quot;:870}"/>
 </p:tagLst>
 </file>
 
 <file path=ppt/tags/tag19.xml><?xml version="1.0" encoding="utf-8"?>
-<p:tagLst xmlns:p="http://schemas.openxmlformats.org/presentationml/2006/main">
+<p:tagLst xmlns:a="http://schemas.openxmlformats.org/drawingml/2006/main" xmlns:r="http://schemas.openxmlformats.org/officeDocument/2006/relationships" xmlns:p="http://schemas.openxmlformats.org/presentationml/2006/main">
   <p:tag name="KSO_WM_DIAGRAM_VIRTUALLY_FRAME" val="{&quot;height&quot;:467.25,&quot;left&quot;:45,&quot;top&quot;:115.94527559055118,&quot;width&quot;:870}"/>
 </p:tagLst>
 </file>
 
 <file path=ppt/tags/tag2.xml><?xml version="1.0" encoding="utf-8"?>
-<p:tagLst xmlns:p="http://schemas.openxmlformats.org/presentationml/2006/main">
+<p:tagLst xmlns:a="http://schemas.openxmlformats.org/drawingml/2006/main" xmlns:r="http://schemas.openxmlformats.org/officeDocument/2006/relationships" xmlns:p="http://schemas.openxmlformats.org/presentationml/2006/main">
   <p:tag name="KSO_WM_DIAGRAM_VIRTUALLY_FRAME" val="{&quot;height&quot;:386.5546456692913,&quot;left&quot;:45,&quot;top&quot;:115.94527559055118,&quot;width&quot;:870}"/>
 </p:tagLst>
 </file>
 
 <file path=ppt/tags/tag20.xml><?xml version="1.0" encoding="utf-8"?>
-<p:tagLst xmlns:p="http://schemas.openxmlformats.org/presentationml/2006/main">
+<p:tagLst xmlns:a="http://schemas.openxmlformats.org/drawingml/2006/main" xmlns:r="http://schemas.openxmlformats.org/officeDocument/2006/relationships" xmlns:p="http://schemas.openxmlformats.org/presentationml/2006/main">
   <p:tag name="KSO_WM_DIAGRAM_VIRTUALLY_FRAME" val="{&quot;height&quot;:281.25,&quot;left&quot;:45,&quot;top&quot;:115.94527559055118,&quot;width&quot;:870}"/>
 </p:tagLst>
 </file>
 
 <file path=ppt/tags/tag21.xml><?xml version="1.0" encoding="utf-8"?>
-<p:tagLst xmlns:p="http://schemas.openxmlformats.org/presentationml/2006/main">
+<p:tagLst xmlns:a="http://schemas.openxmlformats.org/drawingml/2006/main" xmlns:r="http://schemas.openxmlformats.org/officeDocument/2006/relationships" xmlns:p="http://schemas.openxmlformats.org/presentationml/2006/main">
   <p:tag name="KSO_WM_DIAGRAM_VIRTUALLY_FRAME" val="{&quot;height&quot;:281.25,&quot;left&quot;:45,&quot;top&quot;:115.94527559055118,&quot;width&quot;:870}"/>
 </p:tagLst>
 </file>
 
 <file path=ppt/tags/tag22.xml><?xml version="1.0" encoding="utf-8"?>
-<p:tagLst xmlns:p="http://schemas.openxmlformats.org/presentationml/2006/main">
+<p:tagLst xmlns:a="http://schemas.openxmlformats.org/drawingml/2006/main" xmlns:r="http://schemas.openxmlformats.org/officeDocument/2006/relationships" xmlns:p="http://schemas.openxmlformats.org/presentationml/2006/main">
   <p:tag name="KSO_WM_DIAGRAM_VIRTUALLY_FRAME" val="{&quot;height&quot;:281.25,&quot;left&quot;:45,&quot;top&quot;:115.94527559055118,&quot;width&quot;:870}"/>
 </p:tagLst>
 </file>
 
 <file path=ppt/tags/tag23.xml><?xml version="1.0" encoding="utf-8"?>
-<p:tagLst xmlns:p="http://schemas.openxmlformats.org/presentationml/2006/main">
+<p:tagLst xmlns:a="http://schemas.openxmlformats.org/drawingml/2006/main" xmlns:r="http://schemas.openxmlformats.org/officeDocument/2006/relationships" xmlns:p="http://schemas.openxmlformats.org/presentationml/2006/main">
   <p:tag name="KSO_WM_DIAGRAM_VIRTUALLY_FRAME" val="{&quot;height&quot;:281.25,&quot;left&quot;:45,&quot;top&quot;:115.94527559055118,&quot;width&quot;:870}"/>
 </p:tagLst>
 </file>
 
 <file path=ppt/tags/tag24.xml><?xml version="1.0" encoding="utf-8"?>
-<p:tagLst xmlns:p="http://schemas.openxmlformats.org/presentationml/2006/main">
+<p:tagLst xmlns:a="http://schemas.openxmlformats.org/drawingml/2006/main" xmlns:r="http://schemas.openxmlformats.org/officeDocument/2006/relationships" xmlns:p="http://schemas.openxmlformats.org/presentationml/2006/main">
   <p:tag name="KSO_WM_DIAGRAM_VIRTUALLY_FRAME" val="{&quot;height&quot;:281.25,&quot;left&quot;:45,&quot;top&quot;:115.94527559055118,&quot;width&quot;:870}"/>
 </p:tagLst>
 </file>
 
 <file path=ppt/tags/tag25.xml><?xml version="1.0" encoding="utf-8"?>
-<p:tagLst xmlns:p="http://schemas.openxmlformats.org/presentationml/2006/main">
+<p:tagLst xmlns:a="http://schemas.openxmlformats.org/drawingml/2006/main" xmlns:r="http://schemas.openxmlformats.org/officeDocument/2006/relationships" xmlns:p="http://schemas.openxmlformats.org/presentationml/2006/main">
   <p:tag name="KSO_WM_DIAGRAM_VIRTUALLY_FRAME" val="{&quot;height&quot;:281.25,&quot;left&quot;:45,&quot;top&quot;:115.94527559055118,&quot;width&quot;:870}"/>
 </p:tagLst>
 </file>
 
 <file path=ppt/tags/tag26.xml><?xml version="1.0" encoding="utf-8"?>
-<p:tagLst xmlns:p="http://schemas.openxmlformats.org/presentationml/2006/main">
+<p:tagLst xmlns:a="http://schemas.openxmlformats.org/drawingml/2006/main" xmlns:r="http://schemas.openxmlformats.org/officeDocument/2006/relationships" xmlns:p="http://schemas.openxmlformats.org/presentationml/2006/main">
   <p:tag name="KSO_WM_DIAGRAM_VIRTUALLY_FRAME" val="{&quot;height&quot;:281.25,&quot;left&quot;:45,&quot;top&quot;:115.94527559055118,&quot;width&quot;:870}"/>
 </p:tagLst>
 </file>
 
 <file path=ppt/tags/tag27.xml><?xml version="1.0" encoding="utf-8"?>
-<p:tagLst xmlns:p="http://schemas.openxmlformats.org/presentationml/2006/main">
+<p:tagLst xmlns:a="http://schemas.openxmlformats.org/drawingml/2006/main" xmlns:r="http://schemas.openxmlformats.org/officeDocument/2006/relationships" xmlns:p="http://schemas.openxmlformats.org/presentationml/2006/main">
   <p:tag name="KSO_WM_DIAGRAM_VIRTUALLY_FRAME" val="{&quot;height&quot;:281.25,&quot;left&quot;:45,&quot;top&quot;:115.94527559055118,&quot;width&quot;:870}"/>
 </p:tagLst>
 </file>
 
 <file path=ppt/tags/tag28.xml><?xml version="1.0" encoding="utf-8"?>
-<p:tagLst xmlns:p="http://schemas.openxmlformats.org/presentationml/2006/main">
+<p:tagLst xmlns:a="http://schemas.openxmlformats.org/drawingml/2006/main" xmlns:r="http://schemas.openxmlformats.org/officeDocument/2006/relationships" xmlns:p="http://schemas.openxmlformats.org/presentationml/2006/main">
   <p:tag name="KSO_WM_DIAGRAM_VIRTUALLY_FRAME" val="{&quot;height&quot;:281.25,&quot;left&quot;:45,&quot;top&quot;:115.94527559055118,&quot;width&quot;:870}"/>
 </p:tagLst>
 </file>
 
 <file path=ppt/tags/tag29.xml><?xml version="1.0" encoding="utf-8"?>
-<p:tagLst xmlns:p="http://schemas.openxmlformats.org/presentationml/2006/main">
+<p:tagLst xmlns:a="http://schemas.openxmlformats.org/drawingml/2006/main" xmlns:r="http://schemas.openxmlformats.org/officeDocument/2006/relationships" xmlns:p="http://schemas.openxmlformats.org/presentationml/2006/main">
   <p:tag name="KSO_WM_DIAGRAM_VIRTUALLY_FRAME" val="{&quot;height&quot;:281.25,&quot;left&quot;:45,&quot;top&quot;:115.94527559055118,&quot;width&quot;:870}"/>
 </p:tagLst>
 </file>
 
 <file path=ppt/tags/tag3.xml><?xml version="1.0" encoding="utf-8"?>
-<p:tagLst xmlns:p="http://schemas.openxmlformats.org/presentationml/2006/main">
+<p:tagLst xmlns:a="http://schemas.openxmlformats.org/drawingml/2006/main" xmlns:r="http://schemas.openxmlformats.org/officeDocument/2006/relationships" xmlns:p="http://schemas.openxmlformats.org/presentationml/2006/main">
   <p:tag name="KSO_WM_DIAGRAM_VIRTUALLY_FRAME" val="{&quot;height&quot;:386.5546456692913,&quot;left&quot;:45,&quot;top&quot;:115.94527559055118,&quot;width&quot;:870}"/>
 </p:tagLst>
 </file>
 
 <file path=ppt/tags/tag30.xml><?xml version="1.0" encoding="utf-8"?>
-<p:tagLst xmlns:p="http://schemas.openxmlformats.org/presentationml/2006/main">
+<p:tagLst xmlns:a="http://schemas.openxmlformats.org/drawingml/2006/main" xmlns:r="http://schemas.openxmlformats.org/officeDocument/2006/relationships" xmlns:p="http://schemas.openxmlformats.org/presentationml/2006/main">
   <p:tag name="KSO_WM_DIAGRAM_VIRTUALLY_FRAME" val="{&quot;height&quot;:281.25,&quot;left&quot;:45,&quot;top&quot;:115.94527559055118,&quot;width&quot;:870}"/>
 </p:tagLst>
 </file>
 
 <file path=ppt/tags/tag31.xml><?xml version="1.0" encoding="utf-8"?>
-<p:tagLst xmlns:p="http://schemas.openxmlformats.org/presentationml/2006/main">
+<p:tagLst xmlns:a="http://schemas.openxmlformats.org/drawingml/2006/main" xmlns:r="http://schemas.openxmlformats.org/officeDocument/2006/relationships" xmlns:p="http://schemas.openxmlformats.org/presentationml/2006/main">
   <p:tag name="KSO_WM_DIAGRAM_VIRTUALLY_FRAME" val="{&quot;height&quot;:281.25,&quot;left&quot;:45,&quot;top&quot;:115.94527559055118,&quot;width&quot;:870}"/>
 </p:tagLst>
 </file>
 
 <file path=ppt/tags/tag32.xml><?xml version="1.0" encoding="utf-8"?>
-<p:tagLst xmlns:p="http://schemas.openxmlformats.org/presentationml/2006/main">
+<p:tagLst xmlns:a="http://schemas.openxmlformats.org/drawingml/2006/main" xmlns:r="http://schemas.openxmlformats.org/officeDocument/2006/relationships" xmlns:p="http://schemas.openxmlformats.org/presentationml/2006/main">
   <p:tag name="KSO_WM_DIAGRAM_VIRTUALLY_FRAME" val="{&quot;height&quot;:387.2734645669292,&quot;left&quot;:45,&quot;top&quot;:115.94527559055118,&quot;width&quot;:870}"/>
 </p:tagLst>
 </file>
 
 <file path=ppt/tags/tag33.xml><?xml version="1.0" encoding="utf-8"?>
-<p:tagLst xmlns:p="http://schemas.openxmlformats.org/presentationml/2006/main">
+<p:tagLst xmlns:a="http://schemas.openxmlformats.org/drawingml/2006/main" xmlns:r="http://schemas.openxmlformats.org/officeDocument/2006/relationships" xmlns:p="http://schemas.openxmlformats.org/presentationml/2006/main">
   <p:tag name="KSO_WM_DIAGRAM_VIRTUALLY_FRAME" val="{&quot;height&quot;:387.2734645669292,&quot;left&quot;:45,&quot;top&quot;:115.94527559055118,&quot;width&quot;:870}"/>
 </p:tagLst>
 </file>
 
 <file path=ppt/tags/tag34.xml><?xml version="1.0" encoding="utf-8"?>
-<p:tagLst xmlns:p="http://schemas.openxmlformats.org/presentationml/2006/main">
+<p:tagLst xmlns:a="http://schemas.openxmlformats.org/drawingml/2006/main" xmlns:r="http://schemas.openxmlformats.org/officeDocument/2006/relationships" xmlns:p="http://schemas.openxmlformats.org/presentationml/2006/main">
   <p:tag name="KSO_WM_DIAGRAM_VIRTUALLY_FRAME" val="{&quot;height&quot;:387.2734645669292,&quot;left&quot;:45,&quot;top&quot;:115.94527559055118,&quot;width&quot;:870}"/>
 </p:tagLst>
 </file>
 
 <file path=ppt/tags/tag35.xml><?xml version="1.0" encoding="utf-8"?>
-<p:tagLst xmlns:p="http://schemas.openxmlformats.org/presentationml/2006/main">
+<p:tagLst xmlns:a="http://schemas.openxmlformats.org/drawingml/2006/main" xmlns:r="http://schemas.openxmlformats.org/officeDocument/2006/relationships" xmlns:p="http://schemas.openxmlformats.org/presentationml/2006/main">
   <p:tag name="KSO_WM_DIAGRAM_VIRTUALLY_FRAME" val="{&quot;height&quot;:387.2734645669292,&quot;left&quot;:45,&quot;top&quot;:115.94527559055118,&quot;width&quot;:870}"/>
 </p:tagLst>
 </file>
 
 <file path=ppt/tags/tag36.xml><?xml version="1.0" encoding="utf-8"?>
-<p:tagLst xmlns:p="http://schemas.openxmlformats.org/presentationml/2006/main">
+<p:tagLst xmlns:a="http://schemas.openxmlformats.org/drawingml/2006/main" xmlns:r="http://schemas.openxmlformats.org/officeDocument/2006/relationships" xmlns:p="http://schemas.openxmlformats.org/presentationml/2006/main">
   <p:tag name="KSO_WM_DIAGRAM_VIRTUALLY_FRAME" val="{&quot;height&quot;:387.2734645669292,&quot;left&quot;:45,&quot;top&quot;:115.94527559055118,&quot;width&quot;:870}"/>
 </p:tagLst>
 </file>
 
 <file path=ppt/tags/tag37.xml><?xml version="1.0" encoding="utf-8"?>
-<p:tagLst xmlns:p="http://schemas.openxmlformats.org/presentationml/2006/main">
+<p:tagLst xmlns:a="http://schemas.openxmlformats.org/drawingml/2006/main" xmlns:r="http://schemas.openxmlformats.org/officeDocument/2006/relationships" xmlns:p="http://schemas.openxmlformats.org/presentationml/2006/main">
   <p:tag name="KSO_WM_DIAGRAM_VIRTUALLY_FRAME" val="{&quot;height&quot;:387.2734645669292,&quot;left&quot;:45,&quot;top&quot;:115.94527559055118,&quot;width&quot;:870}"/>
 </p:tagLst>
 </file>
 
 <file path=ppt/tags/tag38.xml><?xml version="1.0" encoding="utf-8"?>
-<p:tagLst xmlns:p="http://schemas.openxmlformats.org/presentationml/2006/main">
+<p:tagLst xmlns:a="http://schemas.openxmlformats.org/drawingml/2006/main" xmlns:r="http://schemas.openxmlformats.org/officeDocument/2006/relationships" xmlns:p="http://schemas.openxmlformats.org/presentationml/2006/main">
   <p:tag name="KSO_WM_DIAGRAM_VIRTUALLY_FRAME" val="{&quot;height&quot;:387.2734645669292,&quot;left&quot;:45,&quot;top&quot;:115.94527559055118,&quot;width&quot;:870}"/>
 </p:tagLst>
 </file>
 
 <file path=ppt/tags/tag39.xml><?xml version="1.0" encoding="utf-8"?>
-<p:tagLst xmlns:p="http://schemas.openxmlformats.org/presentationml/2006/main">
+<p:tagLst xmlns:a="http://schemas.openxmlformats.org/drawingml/2006/main" xmlns:r="http://schemas.openxmlformats.org/officeDocument/2006/relationships" xmlns:p="http://schemas.openxmlformats.org/presentationml/2006/main">
   <p:tag name="KSO_WM_DIAGRAM_VIRTUALLY_FRAME" val="{&quot;height&quot;:387.2734645669292,&quot;left&quot;:45,&quot;top&quot;:115.94527559055118,&quot;width&quot;:870}"/>
 </p:tagLst>
 </file>
 
 <file path=ppt/tags/tag4.xml><?xml version="1.0" encoding="utf-8"?>
-<p:tagLst xmlns:p="http://schemas.openxmlformats.org/presentationml/2006/main">
+<p:tagLst xmlns:a="http://schemas.openxmlformats.org/drawingml/2006/main" xmlns:r="http://schemas.openxmlformats.org/officeDocument/2006/relationships" xmlns:p="http://schemas.openxmlformats.org/presentationml/2006/main">
   <p:tag name="KSO_WM_DIAGRAM_VIRTUALLY_FRAME" val="{&quot;height&quot;:386.5546456692913,&quot;left&quot;:45,&quot;top&quot;:115.94527559055118,&quot;width&quot;:870}"/>
 </p:tagLst>
 </file>
 
 <file path=ppt/tags/tag40.xml><?xml version="1.0" encoding="utf-8"?>
-<p:tagLst xmlns:p="http://schemas.openxmlformats.org/presentationml/2006/main">
+<p:tagLst xmlns:a="http://schemas.openxmlformats.org/drawingml/2006/main" xmlns:r="http://schemas.openxmlformats.org/officeDocument/2006/relationships" xmlns:p="http://schemas.openxmlformats.org/presentationml/2006/main">
   <p:tag name="KSO_WM_DIAGRAM_VIRTUALLY_FRAME" val="{&quot;height&quot;:387.2734645669292,&quot;left&quot;:45,&quot;top&quot;:115.94527559055118,&quot;width&quot;:870}"/>
 </p:tagLst>
 </file>
 
 <file path=ppt/tags/tag41.xml><?xml version="1.0" encoding="utf-8"?>
-<p:tagLst xmlns:p="http://schemas.openxmlformats.org/presentationml/2006/main">
+<p:tagLst xmlns:a="http://schemas.openxmlformats.org/drawingml/2006/main" xmlns:r="http://schemas.openxmlformats.org/officeDocument/2006/relationships" xmlns:p="http://schemas.openxmlformats.org/presentationml/2006/main">
   <p:tag name="KSO_WM_DIAGRAM_VIRTUALLY_FRAME" val="{&quot;height&quot;:387.2734645669292,&quot;left&quot;:45,&quot;top&quot;:115.94527559055118,&quot;width&quot;:870}"/>
 </p:tagLst>
 </file>
 
 <file path=ppt/tags/tag42.xml><?xml version="1.0" encoding="utf-8"?>
-<p:tagLst xmlns:p="http://schemas.openxmlformats.org/presentationml/2006/main">
+<p:tagLst xmlns:a="http://schemas.openxmlformats.org/drawingml/2006/main" xmlns:r="http://schemas.openxmlformats.org/officeDocument/2006/relationships" xmlns:p="http://schemas.openxmlformats.org/presentationml/2006/main">
   <p:tag name="KSO_WM_DIAGRAM_VIRTUALLY_FRAME" val="{&quot;height&quot;:441.93984251968504,&quot;left&quot;:45,&quot;top&quot;:115.94527559055118,&quot;width&quot;:870}"/>
 </p:tagLst>
 </file>
 
 <file path=ppt/tags/tag43.xml><?xml version="1.0" encoding="utf-8"?>
-<p:tagLst xmlns:p="http://schemas.openxmlformats.org/presentationml/2006/main">
+<p:tagLst xmlns:a="http://schemas.openxmlformats.org/drawingml/2006/main" xmlns:r="http://schemas.openxmlformats.org/officeDocument/2006/relationships" xmlns:p="http://schemas.openxmlformats.org/presentationml/2006/main">
   <p:tag name="KSO_WM_DIAGRAM_VIRTUALLY_FRAME" val="{&quot;height&quot;:441.93984251968504,&quot;left&quot;:45,&quot;top&quot;:115.94527559055118,&quot;width&quot;:870}"/>
 </p:tagLst>
 </file>
 
 <file path=ppt/tags/tag44.xml><?xml version="1.0" encoding="utf-8"?>
-<p:tagLst xmlns:p="http://schemas.openxmlformats.org/presentationml/2006/main">
+<p:tagLst xmlns:a="http://schemas.openxmlformats.org/drawingml/2006/main" xmlns:r="http://schemas.openxmlformats.org/officeDocument/2006/relationships" xmlns:p="http://schemas.openxmlformats.org/presentationml/2006/main">
   <p:tag name="KSO_WM_DIAGRAM_VIRTUALLY_FRAME" val="{&quot;height&quot;:441.93984251968504,&quot;left&quot;:45,&quot;top&quot;:115.94527559055118,&quot;width&quot;:870}"/>
 </p:tagLst>
 </file>
 
 <file path=ppt/tags/tag45.xml><?xml version="1.0" encoding="utf-8"?>
-<p:tagLst xmlns:p="http://schemas.openxmlformats.org/presentationml/2006/main">
+<p:tagLst xmlns:a="http://schemas.openxmlformats.org/drawingml/2006/main" xmlns:r="http://schemas.openxmlformats.org/officeDocument/2006/relationships" xmlns:p="http://schemas.openxmlformats.org/presentationml/2006/main">
   <p:tag name="KSO_WM_DIAGRAM_VIRTUALLY_FRAME" val="{&quot;height&quot;:441.93984251968504,&quot;left&quot;:45,&quot;top&quot;:115.94527559055118,&quot;width&quot;:870}"/>
 </p:tagLst>
 </file>
 
 <file path=ppt/tags/tag46.xml><?xml version="1.0" encoding="utf-8"?>
-<p:tagLst xmlns:p="http://schemas.openxmlformats.org/presentationml/2006/main">
+<p:tagLst xmlns:a="http://schemas.openxmlformats.org/drawingml/2006/main" xmlns:r="http://schemas.openxmlformats.org/officeDocument/2006/relationships" xmlns:p="http://schemas.openxmlformats.org/presentationml/2006/main">
   <p:tag name="KSO_WM_DIAGRAM_VIRTUALLY_FRAME" val="{&quot;height&quot;:441.93984251968504,&quot;left&quot;:45,&quot;top&quot;:115.94527559055118,&quot;width&quot;:870}"/>
 </p:tagLst>
 </file>
 
 <file path=ppt/tags/tag47.xml><?xml version="1.0" encoding="utf-8"?>
-<p:tagLst xmlns:p="http://schemas.openxmlformats.org/presentationml/2006/main">
+<p:tagLst xmlns:a="http://schemas.openxmlformats.org/drawingml/2006/main" xmlns:r="http://schemas.openxmlformats.org/officeDocument/2006/relationships" xmlns:p="http://schemas.openxmlformats.org/presentationml/2006/main">
   <p:tag name="KSO_WM_DIAGRAM_VIRTUALLY_FRAME" val="{&quot;height&quot;:441.93984251968504,&quot;left&quot;:45,&quot;top&quot;:115.94527559055118,&quot;width&quot;:870}"/>
 </p:tagLst>
 </file>
 
 <file path=ppt/tags/tag48.xml><?xml version="1.0" encoding="utf-8"?>
-<p:tagLst xmlns:p="http://schemas.openxmlformats.org/presentationml/2006/main">
+<p:tagLst xmlns:a="http://schemas.openxmlformats.org/drawingml/2006/main" xmlns:r="http://schemas.openxmlformats.org/officeDocument/2006/relationships" xmlns:p="http://schemas.openxmlformats.org/presentationml/2006/main">
   <p:tag name="KSO_WM_DIAGRAM_VIRTUALLY_FRAME" val="{&quot;height&quot;:441.93984251968504,&quot;left&quot;:45,&quot;top&quot;:115.94527559055118,&quot;width&quot;:870}"/>
 </p:tagLst>
 </file>
 
 <file path=ppt/tags/tag49.xml><?xml version="1.0" encoding="utf-8"?>
-<p:tagLst xmlns:p="http://schemas.openxmlformats.org/presentationml/2006/main">
+<p:tagLst xmlns:a="http://schemas.openxmlformats.org/drawingml/2006/main" xmlns:r="http://schemas.openxmlformats.org/officeDocument/2006/relationships" xmlns:p="http://schemas.openxmlformats.org/presentationml/2006/main">
   <p:tag name="KSO_WM_DIAGRAM_VIRTUALLY_FRAME" val="{&quot;height&quot;:441.93984251968504,&quot;left&quot;:45,&quot;top&quot;:115.94527559055118,&quot;width&quot;:870}"/>
 </p:tagLst>
 </file>
 
 <file path=ppt/tags/tag5.xml><?xml version="1.0" encoding="utf-8"?>
-<p:tagLst xmlns:p="http://schemas.openxmlformats.org/presentationml/2006/main">
+<p:tagLst xmlns:a="http://schemas.openxmlformats.org/drawingml/2006/main" xmlns:r="http://schemas.openxmlformats.org/officeDocument/2006/relationships" xmlns:p="http://schemas.openxmlformats.org/presentationml/2006/main">
   <p:tag name="KSO_WM_DIAGRAM_VIRTUALLY_FRAME" val="{&quot;height&quot;:386.5546456692913,&quot;left&quot;:45,&quot;top&quot;:115.94527559055118,&quot;width&quot;:870}"/>
 </p:tagLst>
 </file>
 
 <file path=ppt/tags/tag6.xml><?xml version="1.0" encoding="utf-8"?>
-<p:tagLst xmlns:p="http://schemas.openxmlformats.org/presentationml/2006/main">
+<p:tagLst xmlns:a="http://schemas.openxmlformats.org/drawingml/2006/main" xmlns:r="http://schemas.openxmlformats.org/officeDocument/2006/relationships" xmlns:p="http://schemas.openxmlformats.org/presentationml/2006/main">
   <p:tag name="KSO_WM_DIAGRAM_VIRTUALLY_FRAME" val="{&quot;height&quot;:386.5546456692913,&quot;left&quot;:45,&quot;top&quot;:115.94527559055118,&quot;width&quot;:870}"/>
 </p:tagLst>
 </file>
 
 <file path=ppt/tags/tag7.xml><?xml version="1.0" encoding="utf-8"?>
-<p:tagLst xmlns:p="http://schemas.openxmlformats.org/presentationml/2006/main">
+<p:tagLst xmlns:a="http://schemas.openxmlformats.org/drawingml/2006/main" xmlns:r="http://schemas.openxmlformats.org/officeDocument/2006/relationships" xmlns:p="http://schemas.openxmlformats.org/presentationml/2006/main">
   <p:tag name="KSO_WM_DIAGRAM_VIRTUALLY_FRAME" val="{&quot;height&quot;:386.5546456692913,&quot;left&quot;:45,&quot;top&quot;:115.94527559055118,&quot;width&quot;:870}"/>
 </p:tagLst>
 </file>
 
 <file path=ppt/tags/tag8.xml><?xml version="1.0" encoding="utf-8"?>
-<p:tagLst xmlns:p="http://schemas.openxmlformats.org/presentationml/2006/main">
+<p:tagLst xmlns:a="http://schemas.openxmlformats.org/drawingml/2006/main" xmlns:r="http://schemas.openxmlformats.org/officeDocument/2006/relationships" xmlns:p="http://schemas.openxmlformats.org/presentationml/2006/main">
   <p:tag name="KSO_WM_DIAGRAM_VIRTUALLY_FRAME" val="{&quot;height&quot;:386.5546456692913,&quot;left&quot;:45,&quot;top&quot;:115.94527559055118,&quot;width&quot;:870}"/>
 </p:tagLst>
 </file>
 
 <file path=ppt/tags/tag9.xml><?xml version="1.0" encoding="utf-8"?>
-<p:tagLst xmlns:p="http://schemas.openxmlformats.org/presentationml/2006/main">
+<p:tagLst xmlns:a="http://schemas.openxmlformats.org/drawingml/2006/main" xmlns:r="http://schemas.openxmlformats.org/officeDocument/2006/relationships" xmlns:p="http://schemas.openxmlformats.org/presentationml/2006/main">
   <p:tag name="KSO_WM_DIAGRAM_VIRTUALLY_FRAME" val="{&quot;height&quot;:467.25,&quot;left&quot;:45,&quot;top&quot;:115.94527559055118,&quot;width&quot;:870}"/>
 </p:tagLst>
 </file>
@@ -27895,6 +27165,8 @@
       </a:bgFillStyleLst>
     </a:fmtScheme>
   </a:themeElements>
+  <a:objectDefaults/>
+  <a:extraClrSchemeLst/>
   <a:extLst>
     <a:ext uri="{05A4C25C-085E-4340-85A3-A5531E510DB2}">
       <thm15:themeFamily xmlns:thm15="http://schemas.microsoft.com/office/thememl/2012/main" name="Office Theme" id="{62F939B6-93AF-4DB8-9C6B-D6C7DFDC589F}" vid="{4A3C46E8-61CC-4603-A589-7422A47A8E4A}"/>
@@ -28179,6 +27451,8 @@
       </a:bgFillStyleLst>
     </a:fmtScheme>
   </a:themeElements>
+  <a:objectDefaults/>
+  <a:extraClrSchemeLst/>
   <a:extLst>
     <a:ext uri="{05A4C25C-085E-4340-85A3-A5531E510DB2}">
       <thm15:themeFamily xmlns:thm15="http://schemas.microsoft.com/office/thememl/2012/main" name="Office Theme" id="{62F939B6-93AF-4DB8-9C6B-D6C7DFDC589F}" vid="{4A3C46E8-61CC-4603-A589-7422A47A8E4A}"/>
